--- a/lessons/lesson-08/slides.pptx
+++ b/lessons/lesson-08/slides.pptx
@@ -2,26 +2,27 @@
 <file path=ppt/presentation.xml><?xml version="1.0" encoding="utf-8"?>
 <p:presentation xmlns:p="http://schemas.openxmlformats.org/presentationml/2006/main">
   <p:sldMasterIdLst>
-    <p:sldMasterId xmlns:r="http://schemas.openxmlformats.org/officeDocument/2006/relationships" id="2147483648" r:id="R5d3679314fb34a5a"/>
+    <p:sldMasterId xmlns:r="http://schemas.openxmlformats.org/officeDocument/2006/relationships" id="2147483648" r:id="R34dd0d1816984d90"/>
   </p:sldMasterIdLst>
   <p:notesMasterIdLst>
-    <p:notesMasterId xmlns:r="http://schemas.openxmlformats.org/officeDocument/2006/relationships" r:id="Rcaa2fafb29774d7b"/>
+    <p:notesMasterId xmlns:r="http://schemas.openxmlformats.org/officeDocument/2006/relationships" r:id="R92290588e6574df9"/>
   </p:notesMasterIdLst>
   <p:sldIdLst>
-    <p:sldId xmlns:r="http://schemas.openxmlformats.org/officeDocument/2006/relationships" id="256" r:id="R1d650e49b70b4b07"/>
-    <p:sldId xmlns:r="http://schemas.openxmlformats.org/officeDocument/2006/relationships" id="257" r:id="Rd3ef2e8469a94242"/>
-    <p:sldId xmlns:r="http://schemas.openxmlformats.org/officeDocument/2006/relationships" id="258" r:id="R03c0be2b2f02471c"/>
-    <p:sldId xmlns:r="http://schemas.openxmlformats.org/officeDocument/2006/relationships" id="259" r:id="R7f226b48c49a45ad"/>
-    <p:sldId xmlns:r="http://schemas.openxmlformats.org/officeDocument/2006/relationships" id="260" r:id="R7a2bb1f646734f06"/>
-    <p:sldId xmlns:r="http://schemas.openxmlformats.org/officeDocument/2006/relationships" id="261" r:id="R8f78dbf6af434a9d"/>
-    <p:sldId xmlns:r="http://schemas.openxmlformats.org/officeDocument/2006/relationships" id="262" r:id="R037d76cd2e3242b4"/>
-    <p:sldId xmlns:r="http://schemas.openxmlformats.org/officeDocument/2006/relationships" id="263" r:id="R92cee00affd64262"/>
-    <p:sldId xmlns:r="http://schemas.openxmlformats.org/officeDocument/2006/relationships" id="264" r:id="R99964785fa27460e"/>
-    <p:sldId xmlns:r="http://schemas.openxmlformats.org/officeDocument/2006/relationships" id="265" r:id="R880386096d7841b4"/>
-    <p:sldId xmlns:r="http://schemas.openxmlformats.org/officeDocument/2006/relationships" id="266" r:id="R55e10143111447f2"/>
-    <p:sldId xmlns:r="http://schemas.openxmlformats.org/officeDocument/2006/relationships" id="267" r:id="R6f64d385008a4c68"/>
-    <p:sldId xmlns:r="http://schemas.openxmlformats.org/officeDocument/2006/relationships" id="268" r:id="Rfc58d907cc0c4ea7"/>
-    <p:sldId xmlns:r="http://schemas.openxmlformats.org/officeDocument/2006/relationships" id="269" r:id="R9c80481aa9c04bd3"/>
+    <p:sldId xmlns:r="http://schemas.openxmlformats.org/officeDocument/2006/relationships" id="256" r:id="R7d65d1b3081d490d"/>
+    <p:sldId xmlns:r="http://schemas.openxmlformats.org/officeDocument/2006/relationships" id="257" r:id="Raf7c0c9ee29c4d43"/>
+    <p:sldId xmlns:r="http://schemas.openxmlformats.org/officeDocument/2006/relationships" id="258" r:id="Rab0d2c9eb3e648d5"/>
+    <p:sldId xmlns:r="http://schemas.openxmlformats.org/officeDocument/2006/relationships" id="259" r:id="Rd2f311a2e3c34518"/>
+    <p:sldId xmlns:r="http://schemas.openxmlformats.org/officeDocument/2006/relationships" id="260" r:id="Rbdafd17ae2974e17"/>
+    <p:sldId xmlns:r="http://schemas.openxmlformats.org/officeDocument/2006/relationships" id="261" r:id="Rffd290d099604127"/>
+    <p:sldId xmlns:r="http://schemas.openxmlformats.org/officeDocument/2006/relationships" id="262" r:id="R9be53e3bd2254186"/>
+    <p:sldId xmlns:r="http://schemas.openxmlformats.org/officeDocument/2006/relationships" id="263" r:id="R467cea9ba0ec4b56"/>
+    <p:sldId xmlns:r="http://schemas.openxmlformats.org/officeDocument/2006/relationships" id="264" r:id="R77310992c271496f"/>
+    <p:sldId xmlns:r="http://schemas.openxmlformats.org/officeDocument/2006/relationships" id="265" r:id="Rcce4c0bb105d41d6"/>
+    <p:sldId xmlns:r="http://schemas.openxmlformats.org/officeDocument/2006/relationships" id="266" r:id="Rf4df4ce73de14196"/>
+    <p:sldId xmlns:r="http://schemas.openxmlformats.org/officeDocument/2006/relationships" id="267" r:id="R2b7801542a2c48ea"/>
+    <p:sldId xmlns:r="http://schemas.openxmlformats.org/officeDocument/2006/relationships" id="268" r:id="R3362a91d04ea45b9"/>
+    <p:sldId xmlns:r="http://schemas.openxmlformats.org/officeDocument/2006/relationships" id="269" r:id="R65ae930c142744dc"/>
+    <p:sldId xmlns:r="http://schemas.openxmlformats.org/officeDocument/2006/relationships" id="270" r:id="Rc3241198d6e04c54"/>
   </p:sldIdLst>
   <p:sldSz cx="12192000" cy="6858000"/>
   <p:notesSz cx="6858000" cy="9144000"/>
@@ -886,6 +887,101 @@
           <a:lstStyle xmlns:a="http://schemas.openxmlformats.org/drawingml/2006/main"/>
           <a:p xmlns:a="http://schemas.openxmlformats.org/drawingml/2006/main">
             <a:r>
+              <a:t>回收方案陈述、同伴质询、作者决策和行动回写的闭环。本页不新增正式提交。</a:t>
+            </a:r>
+          </a:p>
+          <a:p xmlns:a="http://schemas.openxmlformats.org/drawingml/2006/main">
+            <a:r>
+              <a:t/>
+            </a:r>
+          </a:p>
+          <a:p xmlns:a="http://schemas.openxmlformats.org/drawingml/2006/main">
+            <a:r>
+              <a:t>[Sources]</a:t>
+            </a:r>
+          </a:p>
+          <a:p xmlns:a="http://schemas.openxmlformats.org/drawingml/2006/main">
+            <a:r>
+              <a:t>- /Users/bright/Projects/courses/graduate/lessons/lesson-08/handout.md</a:t>
+            </a:r>
+          </a:p>
+          <a:p xmlns:a="http://schemas.openxmlformats.org/drawingml/2006/main">
+            <a:r>
+              <a:t>- /Users/bright/Projects/courses/graduate/course/assignments.md</a:t>
+            </a:r>
+          </a:p>
+          <a:p xmlns:a="http://schemas.openxmlformats.org/drawingml/2006/main">
+            <a:r>
+              <a:t>[/Sources]</a:t>
+            </a:r>
+          </a:p>
+        </p:txBody>
+      </p:sp>
+      <p:sp>
+        <p:nvSpPr>
+          <p:cNvPr id="4" name="Slide Number Placeholder 3"/>
+          <p:cNvSpPr>
+            <a:spLocks xmlns:a="http://schemas.openxmlformats.org/drawingml/2006/main" noGrp="1"/>
+          </p:cNvSpPr>
+          <p:nvPr>
+            <p:ph type="sldNum" idx="5"/>
+          </p:nvPr>
+        </p:nvSpPr>
+        <p:spPr/>
+        <p:txBody>
+          <a:bodyPr xmlns:a="http://schemas.openxmlformats.org/drawingml/2006/main"/>
+          <a:lstStyle xmlns:a="http://schemas.openxmlformats.org/drawingml/2006/main"/>
+          <a:p xmlns:a="http://schemas.openxmlformats.org/drawingml/2006/main"/>
+        </p:txBody>
+      </p:sp>
+    </p:spTree>
+  </p:cSld>
+  <p:clrMapOvr>
+    <a:masterClrMapping xmlns:a="http://schemas.openxmlformats.org/drawingml/2006/main"/>
+  </p:clrMapOvr>
+</p:notes>
+</file>
+
+<file path=ppt/notesSlides/notesSlide15.xml><?xml version="1.0" encoding="utf-8"?>
+<p:notes xmlns:p="http://schemas.openxmlformats.org/presentationml/2006/main">
+  <p:cSld>
+    <p:spTree>
+      <p:nvGrpSpPr>
+        <p:cNvPr id="1" name=""/>
+        <p:cNvGrpSpPr/>
+        <p:nvPr/>
+      </p:nvGrpSpPr>
+      <p:grpSpPr>
+        <a:xfrm xmlns:a="http://schemas.openxmlformats.org/drawingml/2006/main"/>
+      </p:grpSpPr>
+      <p:sp>
+        <p:nvSpPr>
+          <p:cNvPr id="2" name="Slide Image Placeholder 1"/>
+          <p:cNvSpPr>
+            <a:spLocks xmlns:a="http://schemas.openxmlformats.org/drawingml/2006/main" noGrp="1"/>
+          </p:cNvSpPr>
+          <p:nvPr>
+            <p:ph type="sldImg" idx="0"/>
+          </p:nvPr>
+        </p:nvSpPr>
+        <p:spPr/>
+      </p:sp>
+      <p:sp>
+        <p:nvSpPr>
+          <p:cNvPr id="3" name="Notes Placeholder 2"/>
+          <p:cNvSpPr>
+            <a:spLocks xmlns:a="http://schemas.openxmlformats.org/drawingml/2006/main" noGrp="1"/>
+          </p:cNvSpPr>
+          <p:nvPr>
+            <p:ph type="body" idx="1"/>
+          </p:nvPr>
+        </p:nvSpPr>
+        <p:spPr/>
+        <p:txBody>
+          <a:bodyPr xmlns:a="http://schemas.openxmlformats.org/drawingml/2006/main"/>
+          <a:lstStyle xmlns:a="http://schemas.openxmlformats.org/drawingml/2006/main"/>
+          <a:p xmlns:a="http://schemas.openxmlformats.org/drawingml/2006/main">
+            <a:r>
               <a:t>收束到开场：同伴质询只有转成具体工件修改才有价值。提醒从轻量脚手架迁移到完整项目模板时保留 AI 使用记录和伦理说明。</a:t>
             </a:r>
           </a:p>
@@ -1737,7 +1833,7 @@
           <p:nvPr/>
         </p:nvPicPr>
         <p:blipFill>
-          <a:blip xmlns:r="http://schemas.openxmlformats.org/officeDocument/2006/relationships" xmlns:a="http://schemas.openxmlformats.org/drawingml/2006/main" r:embed="Re82d2a6ec7574eb5">
+          <a:blip xmlns:r="http://schemas.openxmlformats.org/officeDocument/2006/relationships" xmlns:a="http://schemas.openxmlformats.org/drawingml/2006/main" r:embed="R2d54a55fe0f84ed5">
             <a:duotone>
               <a:prstClr val="black"/>
               <a:schemeClr val="accent1">
@@ -1915,7 +2011,7 @@
           <p:nvPr/>
         </p:nvPicPr>
         <p:blipFill rotWithShape="1">
-          <a:blip xmlns:r="http://schemas.openxmlformats.org/officeDocument/2006/relationships" xmlns:a="http://schemas.openxmlformats.org/drawingml/2006/main" r:embed="R13b3fdcf60504505"/>
+          <a:blip xmlns:r="http://schemas.openxmlformats.org/officeDocument/2006/relationships" xmlns:a="http://schemas.openxmlformats.org/drawingml/2006/main" r:embed="Rc1cc0ab7613e4f06"/>
           <a:srcRect xmlns:a="http://schemas.openxmlformats.org/drawingml/2006/main" l="74359" t="0" r="1346" b="0"/>
           <a:stretch xmlns:a="http://schemas.openxmlformats.org/drawingml/2006/main"/>
         </p:blipFill>
@@ -1938,7 +2034,7 @@
           <p:nvPr/>
         </p:nvPicPr>
         <p:blipFill rotWithShape="1">
-          <a:blip xmlns:r="http://schemas.openxmlformats.org/officeDocument/2006/relationships" xmlns:a="http://schemas.openxmlformats.org/drawingml/2006/main" r:embed="R5000e6182bf34af4">
+          <a:blip xmlns:r="http://schemas.openxmlformats.org/officeDocument/2006/relationships" xmlns:a="http://schemas.openxmlformats.org/drawingml/2006/main" r:embed="R9f15421715754a79">
             <a:alphaModFix amt="35000"/>
           </a:blip>
           <a:srcRect xmlns:a="http://schemas.openxmlformats.org/drawingml/2006/main" l="0" t="9831" r="0" b="36385"/>
@@ -2200,7 +2296,7 @@
           <p:nvPr/>
         </p:nvPicPr>
         <p:blipFill>
-          <a:blip xmlns:r="http://schemas.openxmlformats.org/officeDocument/2006/relationships" xmlns:a="http://schemas.openxmlformats.org/drawingml/2006/main" r:embed="R2f5ed67b288347d7"/>
+          <a:blip xmlns:r="http://schemas.openxmlformats.org/officeDocument/2006/relationships" xmlns:a="http://schemas.openxmlformats.org/drawingml/2006/main" r:embed="R0bc65eb931524592"/>
           <a:srcRect xmlns:a="http://schemas.openxmlformats.org/drawingml/2006/main" l="0" t="0" r="54251" b="0"/>
           <a:stretch xmlns:a="http://schemas.openxmlformats.org/drawingml/2006/main"/>
         </p:blipFill>
@@ -2457,7 +2553,7 @@
           <p:nvPr/>
         </p:nvPicPr>
         <p:blipFill rotWithShape="1">
-          <a:blip xmlns:r="http://schemas.openxmlformats.org/officeDocument/2006/relationships" xmlns:a="http://schemas.openxmlformats.org/drawingml/2006/main" r:embed="R30f1ea24202641c8"/>
+          <a:blip xmlns:r="http://schemas.openxmlformats.org/officeDocument/2006/relationships" xmlns:a="http://schemas.openxmlformats.org/drawingml/2006/main" r:embed="Rf62e273984534358"/>
           <a:srcRect xmlns:a="http://schemas.openxmlformats.org/drawingml/2006/main" l="0" t="0" r="1346" b="0"/>
           <a:stretch xmlns:a="http://schemas.openxmlformats.org/drawingml/2006/main"/>
         </p:blipFill>
@@ -2640,7 +2736,7 @@
           <p:nvPr/>
         </p:nvPicPr>
         <p:blipFill>
-          <a:blip xmlns:r="http://schemas.openxmlformats.org/officeDocument/2006/relationships" xmlns:a="http://schemas.openxmlformats.org/drawingml/2006/main" r:embed="R6df72e01799542f6"/>
+          <a:blip xmlns:r="http://schemas.openxmlformats.org/officeDocument/2006/relationships" xmlns:a="http://schemas.openxmlformats.org/drawingml/2006/main" r:embed="Rcabff04e444a4844"/>
           <a:stretch xmlns:a="http://schemas.openxmlformats.org/drawingml/2006/main">
             <a:fillRect l="0" t="0" r="0" b="0"/>
           </a:stretch>
@@ -2736,7 +2832,7 @@
           <p:nvPr/>
         </p:nvPicPr>
         <p:blipFill>
-          <a:blip xmlns:r="http://schemas.openxmlformats.org/officeDocument/2006/relationships" xmlns:a="http://schemas.openxmlformats.org/drawingml/2006/main" r:embed="R08366a2887ba4dfa">
+          <a:blip xmlns:r="http://schemas.openxmlformats.org/officeDocument/2006/relationships" xmlns:a="http://schemas.openxmlformats.org/drawingml/2006/main" r:embed="R5b3394a0c03848c6">
             <a:duotone>
               <a:prstClr val="black"/>
               <a:schemeClr val="accent1">
@@ -2903,7 +2999,7 @@
           <p:nvPr/>
         </p:nvPicPr>
         <p:blipFill rotWithShape="1">
-          <a:blip xmlns:r="http://schemas.openxmlformats.org/officeDocument/2006/relationships" xmlns:a="http://schemas.openxmlformats.org/drawingml/2006/main" r:embed="Ra5b99b6110184f1c">
+          <a:blip xmlns:r="http://schemas.openxmlformats.org/officeDocument/2006/relationships" xmlns:a="http://schemas.openxmlformats.org/drawingml/2006/main" r:embed="R93a663b95eb94822">
             <a:alphaModFix amt="20000"/>
             <a:duotone>
               <a:schemeClr val="accent4">
@@ -3001,10 +3097,10 @@
   </p:cSld>
   <p:clrMap bg1="lt1" tx1="dk1" bg2="lt2" tx2="dk2" accent1="accent1" accent2="accent2" accent3="accent3" accent4="accent4" accent5="accent5" accent6="accent6" hlink="hlink" folHlink="folHlink"/>
   <p:sldLayoutIdLst>
-    <p:sldLayoutId xmlns:r="http://schemas.openxmlformats.org/officeDocument/2006/relationships" id="2147483649" r:id="R0fa7f2e08e7e47ba"/>
-    <p:sldLayoutId xmlns:r="http://schemas.openxmlformats.org/officeDocument/2006/relationships" id="2147483650" r:id="R80c28b717efa47fc"/>
-    <p:sldLayoutId xmlns:r="http://schemas.openxmlformats.org/officeDocument/2006/relationships" id="2147483651" r:id="R68b1272001124e5d"/>
-    <p:sldLayoutId xmlns:r="http://schemas.openxmlformats.org/officeDocument/2006/relationships" id="2147483652" r:id="R65a99b39e8e94eaf"/>
+    <p:sldLayoutId xmlns:r="http://schemas.openxmlformats.org/officeDocument/2006/relationships" id="2147483649" r:id="R3ed36fe8c1e2412f"/>
+    <p:sldLayoutId xmlns:r="http://schemas.openxmlformats.org/officeDocument/2006/relationships" id="2147483650" r:id="R260a602f4a154694"/>
+    <p:sldLayoutId xmlns:r="http://schemas.openxmlformats.org/officeDocument/2006/relationships" id="2147483651" r:id="R2f340c4de49b4a70"/>
+    <p:sldLayoutId xmlns:r="http://schemas.openxmlformats.org/officeDocument/2006/relationships" id="2147483652" r:id="Rd3347fa1673f4b2b"/>
   </p:sldLayoutIdLst>
   <p:hf hdr="0" ftr="0" dt="0"/>
   <p:txStyles>
@@ -3537,120 +3633,6 @@
       </p:grpSpPr>
       <p:sp>
         <p:nvSpPr>
-          <p:cNvPr id="3" name="内容占位符 2">
-            <a:extLst xmlns:a="http://schemas.openxmlformats.org/drawingml/2006/main">
-              <a:ext uri="{FF2B5EF4-FFF2-40B4-BE49-F238E27FC236}">
-                <a16:creationId xmlns:a16="http://schemas.microsoft.com/office/drawing/2014/main" id="{D1D30E0E-D2D5-4C08-A919-2A1C2D5A8D02}"/>
-              </a:ext>
-            </a:extLst>
-          </p:cNvPr>
-          <p:cNvSpPr>
-            <a:spLocks xmlns:a="http://schemas.openxmlformats.org/drawingml/2006/main" noGrp="1"/>
-          </p:cNvSpPr>
-          <p:nvPr>
-            <p:ph idx="10"/>
-          </p:nvPr>
-        </p:nvSpPr>
-        <p:spPr>
-          <a:xfrm xmlns:a="http://schemas.openxmlformats.org/drawingml/2006/main">
-            <a:off x="1238250" y="3028950"/>
-            <a:ext cx="9715500" cy="2324100"/>
-          </a:xfrm>
-        </p:spPr>
-        <p:txBody>
-          <a:bodyPr xmlns:a="http://schemas.openxmlformats.org/drawingml/2006/main" lIns="76200" tIns="38100" rIns="76200" bIns="38100" anchor="ctr"/>
-          <a:lstStyle xmlns:a="http://schemas.openxmlformats.org/drawingml/2006/main"/>
-          <a:p xmlns:a="http://schemas.openxmlformats.org/drawingml/2006/main">
-            <a:pPr algn="ctr">
-              <a:lnSpc>
-                <a:spcPct val="125000"/>
-              </a:lnSpc>
-              <a:buNone/>
-            </a:pPr>
-            <a:r>
-              <a:rPr sz="1800" b="0">
-                <a:solidFill>
-                  <a:srgbClr val="263746"/>
-                </a:solidFill>
-                <a:latin typeface="Microsoft YaHei"/>
-                <a:ea typeface="Microsoft YaHei"/>
-                <a:cs typeface="Microsoft YaHei"/>
-              </a:rPr>
-              <a:t>内部工件 → 同伴质询 → 采纳决策</a:t>
-            </a:r>
-            <a:endParaRPr>
-              <a:latin typeface="+mn-ea"/>
-              <a:ea typeface="+mn-ea"/>
-              <a:cs typeface="+mn-ea"/>
-            </a:endParaRPr>
-          </a:p>
-          <a:p xmlns:a="http://schemas.openxmlformats.org/drawingml/2006/main">
-            <a:r>
-              <a:rPr>
-                <a:latin typeface="+mn-ea"/>
-                <a:ea typeface="+mn-ea"/>
-                <a:cs typeface="+mn-ea"/>
-              </a:rPr>
-              <a:t/>
-            </a:r>
-            <a:endParaRPr>
-              <a:latin typeface="+mn-ea"/>
-              <a:ea typeface="+mn-ea"/>
-              <a:cs typeface="+mn-ea"/>
-            </a:endParaRPr>
-          </a:p>
-          <a:p xmlns:a="http://schemas.openxmlformats.org/drawingml/2006/main">
-            <a:pPr algn="ctr">
-              <a:lnSpc>
-                <a:spcPct val="125000"/>
-              </a:lnSpc>
-              <a:buNone/>
-            </a:pPr>
-            <a:r>
-              <a:rPr sz="1800" b="0">
-                <a:solidFill>
-                  <a:srgbClr val="263746"/>
-                </a:solidFill>
-                <a:latin typeface="Microsoft YaHei"/>
-                <a:ea typeface="Microsoft YaHei"/>
-                <a:cs typeface="Microsoft YaHei"/>
-              </a:rPr>
-              <a:t>把第 7 课方案暴露给同伴，当场记录取舍</a:t>
-            </a:r>
-            <a:endParaRPr>
-              <a:latin typeface="+mn-ea"/>
-              <a:ea typeface="+mn-ea"/>
-              <a:cs typeface="+mn-ea"/>
-            </a:endParaRPr>
-          </a:p>
-          <a:p xmlns:a="http://schemas.openxmlformats.org/drawingml/2006/main">
-            <a:pPr algn="ctr">
-              <a:lnSpc>
-                <a:spcPct val="125000"/>
-              </a:lnSpc>
-              <a:buNone/>
-            </a:pPr>
-            <a:r>
-              <a:rPr sz="1800" b="0">
-                <a:solidFill>
-                  <a:srgbClr val="263746"/>
-                </a:solidFill>
-                <a:latin typeface="Microsoft YaHei"/>
-                <a:ea typeface="Microsoft YaHei"/>
-                <a:cs typeface="Microsoft YaHei"/>
-              </a:rPr>
-              <a:t>第八讲｜形成性活动 · 不正式提交 → 第 9 课判断门</a:t>
-            </a:r>
-            <a:endParaRPr>
-              <a:latin typeface="+mn-ea"/>
-              <a:ea typeface="+mn-ea"/>
-              <a:cs typeface="+mn-ea"/>
-            </a:endParaRPr>
-          </a:p>
-        </p:txBody>
-      </p:sp>
-      <p:sp>
-        <p:nvSpPr>
           <p:cNvPr id="2" name="矩形 11">
             <a:extLst xmlns:a="http://schemas.openxmlformats.org/drawingml/2006/main">
               <a:ext uri="{FF2B5EF4-FFF2-40B4-BE49-F238E27FC236}">
@@ -3665,8 +3647,8 @@
         </p:nvSpPr>
         <p:spPr>
           <a:xfrm xmlns:a="http://schemas.openxmlformats.org/drawingml/2006/main">
-            <a:off x="1333500" y="1295400"/>
-            <a:ext cx="9525000" cy="1645920"/>
+            <a:off x="1143000" y="1790700"/>
+            <a:ext cx="9906000" cy="1524000"/>
           </a:xfrm>
           <a:prstGeom xmlns:a="http://schemas.openxmlformats.org/drawingml/2006/main" prst="rect">
             <a:avLst/>
@@ -3693,7 +3675,7 @@
                 <a:ea typeface="Microsoft YaHei"/>
                 <a:cs typeface="Microsoft YaHei"/>
               </a:rPr>
-              <a:t>学生研究方案分享与设计诊所</a:t>
+              <a:t>第8讲 学生研究方案分享与设计诊所</a:t>
             </a:r>
             <a:endParaRPr sz="4000" b="1" kern="0" spc="20">
               <a:solidFill>
@@ -3805,7 +3787,7 @@
           <p:cNvPr id="6" name="p10-case">
             <a:extLst xmlns:a="http://schemas.openxmlformats.org/drawingml/2006/main">
               <a:ext uri="{FF2B5EF4-FFF2-40B4-BE49-F238E27FC236}">
-                <a16:creationId xmlns:a16="http://schemas.microsoft.com/office/drawing/2014/main" id="{270FDE85-784C-478B-86EF-C90B4AEAF681}"/>
+                <a16:creationId xmlns:a16="http://schemas.microsoft.com/office/drawing/2014/main" id="{5E3B0EDD-8D04-4E0E-856E-EDF2BC52A661}"/>
               </a:ext>
             </a:extLst>
           </p:cNvPr>
@@ -3860,7 +3842,7 @@
           <p:cNvPr id="7" name="p10-left-title">
             <a:extLst xmlns:a="http://schemas.openxmlformats.org/drawingml/2006/main">
               <a:ext uri="{FF2B5EF4-FFF2-40B4-BE49-F238E27FC236}">
-                <a16:creationId xmlns:a16="http://schemas.microsoft.com/office/drawing/2014/main" id="{4F30FA66-A580-4E88-AE73-655B544B6B1D}"/>
+                <a16:creationId xmlns:a16="http://schemas.microsoft.com/office/drawing/2014/main" id="{4596F4CC-4982-47FD-9C45-795B542D3566}"/>
               </a:ext>
             </a:extLst>
           </p:cNvPr>
@@ -3913,7 +3895,7 @@
           <p:cNvPr id="8" name="p10-il-0">
             <a:extLst xmlns:a="http://schemas.openxmlformats.org/drawingml/2006/main">
               <a:ext uri="{FF2B5EF4-FFF2-40B4-BE49-F238E27FC236}">
-                <a16:creationId xmlns:a16="http://schemas.microsoft.com/office/drawing/2014/main" id="{4740E2EC-3673-4BB7-8DF9-89E27FEBF57C}"/>
+                <a16:creationId xmlns:a16="http://schemas.microsoft.com/office/drawing/2014/main" id="{333D27B3-2D0E-48A0-AB0A-A7A9CF0409A3}"/>
               </a:ext>
             </a:extLst>
           </p:cNvPr>
@@ -3970,7 +3952,7 @@
           <p:cNvPr id="9" name="p10-id-0">
             <a:extLst xmlns:a="http://schemas.openxmlformats.org/drawingml/2006/main">
               <a:ext uri="{FF2B5EF4-FFF2-40B4-BE49-F238E27FC236}">
-                <a16:creationId xmlns:a16="http://schemas.microsoft.com/office/drawing/2014/main" id="{6DCCFFDB-1C1E-4965-9330-C4076C61C8C2}"/>
+                <a16:creationId xmlns:a16="http://schemas.microsoft.com/office/drawing/2014/main" id="{83719A01-049C-45D8-8886-C7E65A77F9C8}"/>
               </a:ext>
             </a:extLst>
           </p:cNvPr>
@@ -4025,7 +4007,7 @@
           <p:cNvPr id="10" name="p10-il-1">
             <a:extLst xmlns:a="http://schemas.openxmlformats.org/drawingml/2006/main">
               <a:ext uri="{FF2B5EF4-FFF2-40B4-BE49-F238E27FC236}">
-                <a16:creationId xmlns:a16="http://schemas.microsoft.com/office/drawing/2014/main" id="{EB598A61-4FB7-4BBD-9F35-195D97DB64D7}"/>
+                <a16:creationId xmlns:a16="http://schemas.microsoft.com/office/drawing/2014/main" id="{5581068D-1590-4186-8D0B-02CE695175A4}"/>
               </a:ext>
             </a:extLst>
           </p:cNvPr>
@@ -4082,7 +4064,7 @@
           <p:cNvPr id="11" name="p10-id-1">
             <a:extLst xmlns:a="http://schemas.openxmlformats.org/drawingml/2006/main">
               <a:ext uri="{FF2B5EF4-FFF2-40B4-BE49-F238E27FC236}">
-                <a16:creationId xmlns:a16="http://schemas.microsoft.com/office/drawing/2014/main" id="{48322CD2-D87F-459C-B8CA-625A37348E4B}"/>
+                <a16:creationId xmlns:a16="http://schemas.microsoft.com/office/drawing/2014/main" id="{14F79E42-6969-4FE3-BEC4-2D6846EE2FC8}"/>
               </a:ext>
             </a:extLst>
           </p:cNvPr>
@@ -4137,7 +4119,7 @@
           <p:cNvPr id="12" name="p10-il-2">
             <a:extLst xmlns:a="http://schemas.openxmlformats.org/drawingml/2006/main">
               <a:ext uri="{FF2B5EF4-FFF2-40B4-BE49-F238E27FC236}">
-                <a16:creationId xmlns:a16="http://schemas.microsoft.com/office/drawing/2014/main" id="{23E94D95-0793-407F-8401-C52C29C90D3A}"/>
+                <a16:creationId xmlns:a16="http://schemas.microsoft.com/office/drawing/2014/main" id="{AB0DDA30-D257-4C44-8C68-E6B315EB4F9B}"/>
               </a:ext>
             </a:extLst>
           </p:cNvPr>
@@ -4194,7 +4176,7 @@
           <p:cNvPr id="13" name="p10-id-2">
             <a:extLst xmlns:a="http://schemas.openxmlformats.org/drawingml/2006/main">
               <a:ext uri="{FF2B5EF4-FFF2-40B4-BE49-F238E27FC236}">
-                <a16:creationId xmlns:a16="http://schemas.microsoft.com/office/drawing/2014/main" id="{5B4CDA87-5C7C-46F7-84D7-E4CC5F31149E}"/>
+                <a16:creationId xmlns:a16="http://schemas.microsoft.com/office/drawing/2014/main" id="{6BF7F6A9-F629-4C92-AC8D-9C69C4D51072}"/>
               </a:ext>
             </a:extLst>
           </p:cNvPr>
@@ -4249,7 +4231,7 @@
           <p:cNvPr id="14" name="p10-il-3">
             <a:extLst xmlns:a="http://schemas.openxmlformats.org/drawingml/2006/main">
               <a:ext uri="{FF2B5EF4-FFF2-40B4-BE49-F238E27FC236}">
-                <a16:creationId xmlns:a16="http://schemas.microsoft.com/office/drawing/2014/main" id="{B894A944-631D-46F5-8C0F-3BB7AE4992C7}"/>
+                <a16:creationId xmlns:a16="http://schemas.microsoft.com/office/drawing/2014/main" id="{F716B7DA-67CE-430E-A5B0-56BBA2D87848}"/>
               </a:ext>
             </a:extLst>
           </p:cNvPr>
@@ -4306,7 +4288,7 @@
           <p:cNvPr id="15" name="p10-id-3">
             <a:extLst xmlns:a="http://schemas.openxmlformats.org/drawingml/2006/main">
               <a:ext uri="{FF2B5EF4-FFF2-40B4-BE49-F238E27FC236}">
-                <a16:creationId xmlns:a16="http://schemas.microsoft.com/office/drawing/2014/main" id="{2FFF118F-64AA-4546-B235-E374C0DF61A3}"/>
+                <a16:creationId xmlns:a16="http://schemas.microsoft.com/office/drawing/2014/main" id="{67C78B5C-8D9D-4E69-B95C-0F9434041ACB}"/>
               </a:ext>
             </a:extLst>
           </p:cNvPr>
@@ -4361,7 +4343,7 @@
           <p:cNvPr id="16" name="p10-arrow">
             <a:extLst xmlns:a="http://schemas.openxmlformats.org/drawingml/2006/main">
               <a:ext uri="{FF2B5EF4-FFF2-40B4-BE49-F238E27FC236}">
-                <a16:creationId xmlns:a16="http://schemas.microsoft.com/office/drawing/2014/main" id="{17F1A326-70F3-4BC3-85F8-81FD9F5E2EB4}"/>
+                <a16:creationId xmlns:a16="http://schemas.microsoft.com/office/drawing/2014/main" id="{E4165199-382C-4BA4-B0BB-007DB8C44936}"/>
               </a:ext>
             </a:extLst>
           </p:cNvPr>
@@ -4414,7 +4396,7 @@
           <p:cNvPr id="17" name="p10-right-title">
             <a:extLst xmlns:a="http://schemas.openxmlformats.org/drawingml/2006/main">
               <a:ext uri="{FF2B5EF4-FFF2-40B4-BE49-F238E27FC236}">
-                <a16:creationId xmlns:a16="http://schemas.microsoft.com/office/drawing/2014/main" id="{C9A43327-FDDD-4ECE-82A9-695F29589E41}"/>
+                <a16:creationId xmlns:a16="http://schemas.microsoft.com/office/drawing/2014/main" id="{C4610789-90DE-4B23-9E52-0B0BC046CFA3}"/>
               </a:ext>
             </a:extLst>
           </p:cNvPr>
@@ -4467,7 +4449,7 @@
           <p:cNvPr id="18" name="p10-pn-0">
             <a:extLst xmlns:a="http://schemas.openxmlformats.org/drawingml/2006/main">
               <a:ext uri="{FF2B5EF4-FFF2-40B4-BE49-F238E27FC236}">
-                <a16:creationId xmlns:a16="http://schemas.microsoft.com/office/drawing/2014/main" id="{D4B2C9BC-A648-4CE9-B9AB-767963914924}"/>
+                <a16:creationId xmlns:a16="http://schemas.microsoft.com/office/drawing/2014/main" id="{F92C62CD-9C03-4F77-9E1B-5636D7E404E7}"/>
               </a:ext>
             </a:extLst>
           </p:cNvPr>
@@ -4524,7 +4506,7 @@
           <p:cNvPr id="19" name="p10-p-0">
             <a:extLst xmlns:a="http://schemas.openxmlformats.org/drawingml/2006/main">
               <a:ext uri="{FF2B5EF4-FFF2-40B4-BE49-F238E27FC236}">
-                <a16:creationId xmlns:a16="http://schemas.microsoft.com/office/drawing/2014/main" id="{4A40C69C-0B9B-4971-8A60-D1141D96ECF4}"/>
+                <a16:creationId xmlns:a16="http://schemas.microsoft.com/office/drawing/2014/main" id="{1DB1D0C6-B418-490A-8C06-BF33C99B7122}"/>
               </a:ext>
             </a:extLst>
           </p:cNvPr>
@@ -4579,7 +4561,7 @@
           <p:cNvPr id="20" name="p10-pn-1">
             <a:extLst xmlns:a="http://schemas.openxmlformats.org/drawingml/2006/main">
               <a:ext uri="{FF2B5EF4-FFF2-40B4-BE49-F238E27FC236}">
-                <a16:creationId xmlns:a16="http://schemas.microsoft.com/office/drawing/2014/main" id="{7C6EE3E1-1DC6-4179-AF74-C675836B44F9}"/>
+                <a16:creationId xmlns:a16="http://schemas.microsoft.com/office/drawing/2014/main" id="{257BE8C2-7FC7-48DB-98CC-2EB0D0586CC7}"/>
               </a:ext>
             </a:extLst>
           </p:cNvPr>
@@ -4636,7 +4618,7 @@
           <p:cNvPr id="21" name="p10-p-1">
             <a:extLst xmlns:a="http://schemas.openxmlformats.org/drawingml/2006/main">
               <a:ext uri="{FF2B5EF4-FFF2-40B4-BE49-F238E27FC236}">
-                <a16:creationId xmlns:a16="http://schemas.microsoft.com/office/drawing/2014/main" id="{4A498C7F-E8AB-4E89-9DE0-D15490145749}"/>
+                <a16:creationId xmlns:a16="http://schemas.microsoft.com/office/drawing/2014/main" id="{1D802E66-E1D0-480B-905B-A6D410B98FA6}"/>
               </a:ext>
             </a:extLst>
           </p:cNvPr>
@@ -4691,7 +4673,7 @@
           <p:cNvPr id="22" name="p10-pn-2">
             <a:extLst xmlns:a="http://schemas.openxmlformats.org/drawingml/2006/main">
               <a:ext uri="{FF2B5EF4-FFF2-40B4-BE49-F238E27FC236}">
-                <a16:creationId xmlns:a16="http://schemas.microsoft.com/office/drawing/2014/main" id="{0181356B-F202-404B-91C1-29DF73269C2F}"/>
+                <a16:creationId xmlns:a16="http://schemas.microsoft.com/office/drawing/2014/main" id="{47F19FA6-E73F-4F0E-A9CA-BC788EBFA000}"/>
               </a:ext>
             </a:extLst>
           </p:cNvPr>
@@ -4748,7 +4730,7 @@
           <p:cNvPr id="23" name="p10-p-2">
             <a:extLst xmlns:a="http://schemas.openxmlformats.org/drawingml/2006/main">
               <a:ext uri="{FF2B5EF4-FFF2-40B4-BE49-F238E27FC236}">
-                <a16:creationId xmlns:a16="http://schemas.microsoft.com/office/drawing/2014/main" id="{67AE1BED-E462-454D-ACD3-C32545B3B1F6}"/>
+                <a16:creationId xmlns:a16="http://schemas.microsoft.com/office/drawing/2014/main" id="{128952B5-77E9-44A5-B582-E7D3AFBC9DD5}"/>
               </a:ext>
             </a:extLst>
           </p:cNvPr>
@@ -4803,7 +4785,7 @@
           <p:cNvPr id="24" name="p10-pn-3">
             <a:extLst xmlns:a="http://schemas.openxmlformats.org/drawingml/2006/main">
               <a:ext uri="{FF2B5EF4-FFF2-40B4-BE49-F238E27FC236}">
-                <a16:creationId xmlns:a16="http://schemas.microsoft.com/office/drawing/2014/main" id="{C07B2FBF-A7D2-4C64-9225-0011C3315245}"/>
+                <a16:creationId xmlns:a16="http://schemas.microsoft.com/office/drawing/2014/main" id="{1225EA27-3C94-4C22-A2FF-C3E343443F7C}"/>
               </a:ext>
             </a:extLst>
           </p:cNvPr>
@@ -4860,7 +4842,7 @@
           <p:cNvPr id="25" name="p10-p-3">
             <a:extLst xmlns:a="http://schemas.openxmlformats.org/drawingml/2006/main">
               <a:ext uri="{FF2B5EF4-FFF2-40B4-BE49-F238E27FC236}">
-                <a16:creationId xmlns:a16="http://schemas.microsoft.com/office/drawing/2014/main" id="{9AC6CCAE-6DFF-4F3B-AE95-40185D0AD84D}"/>
+                <a16:creationId xmlns:a16="http://schemas.microsoft.com/office/drawing/2014/main" id="{B749835D-6EFB-4E63-BF2A-AAA78484FE70}"/>
               </a:ext>
             </a:extLst>
           </p:cNvPr>
@@ -4915,7 +4897,7 @@
           <p:cNvPr id="26" name="p10-pn-4">
             <a:extLst xmlns:a="http://schemas.openxmlformats.org/drawingml/2006/main">
               <a:ext uri="{FF2B5EF4-FFF2-40B4-BE49-F238E27FC236}">
-                <a16:creationId xmlns:a16="http://schemas.microsoft.com/office/drawing/2014/main" id="{33EE2654-D7BA-41B4-90F2-E7CB232EB893}"/>
+                <a16:creationId xmlns:a16="http://schemas.microsoft.com/office/drawing/2014/main" id="{45066D65-C7C4-4916-B5CA-BBE1AB2029D3}"/>
               </a:ext>
             </a:extLst>
           </p:cNvPr>
@@ -4972,7 +4954,7 @@
           <p:cNvPr id="27" name="p10-p-4">
             <a:extLst xmlns:a="http://schemas.openxmlformats.org/drawingml/2006/main">
               <a:ext uri="{FF2B5EF4-FFF2-40B4-BE49-F238E27FC236}">
-                <a16:creationId xmlns:a16="http://schemas.microsoft.com/office/drawing/2014/main" id="{A38E5753-46A9-4445-8BDE-6FA98B64A273}"/>
+                <a16:creationId xmlns:a16="http://schemas.microsoft.com/office/drawing/2014/main" id="{FB58D262-6F62-4BE6-A5CF-E19D5B29DC91}"/>
               </a:ext>
             </a:extLst>
           </p:cNvPr>
@@ -5027,7 +5009,7 @@
           <p:cNvPr id="28" name="p10-bottom">
             <a:extLst xmlns:a="http://schemas.openxmlformats.org/drawingml/2006/main">
               <a:ext uri="{FF2B5EF4-FFF2-40B4-BE49-F238E27FC236}">
-                <a16:creationId xmlns:a16="http://schemas.microsoft.com/office/drawing/2014/main" id="{E4E72B68-0265-4C85-B20F-462ED714118F}"/>
+                <a16:creationId xmlns:a16="http://schemas.microsoft.com/office/drawing/2014/main" id="{5CDE4D24-E819-4EB5-B4BA-B78F76E7BAD7}"/>
               </a:ext>
             </a:extLst>
           </p:cNvPr>
@@ -5174,7 +5156,7 @@
           <p:cNvPr id="6" name="p11-boundary">
             <a:extLst xmlns:a="http://schemas.openxmlformats.org/drawingml/2006/main">
               <a:ext uri="{FF2B5EF4-FFF2-40B4-BE49-F238E27FC236}">
-                <a16:creationId xmlns:a16="http://schemas.microsoft.com/office/drawing/2014/main" id="{07982AB7-4DB8-41E9-8A2F-71E6DD0D0CA3}"/>
+                <a16:creationId xmlns:a16="http://schemas.microsoft.com/office/drawing/2014/main" id="{A5BBB748-1ED9-434E-9ED3-074DCEB194F9}"/>
               </a:ext>
             </a:extLst>
           </p:cNvPr>
@@ -5229,7 +5211,7 @@
           <p:cNvPr id="7" name="p11-feedback-title">
             <a:extLst xmlns:a="http://schemas.openxmlformats.org/drawingml/2006/main">
               <a:ext uri="{FF2B5EF4-FFF2-40B4-BE49-F238E27FC236}">
-                <a16:creationId xmlns:a16="http://schemas.microsoft.com/office/drawing/2014/main" id="{56548032-305E-491A-B0B7-BD36C852B6C5}"/>
+                <a16:creationId xmlns:a16="http://schemas.microsoft.com/office/drawing/2014/main" id="{CB7F6728-6672-40E3-98F2-A8C93363F19C}"/>
               </a:ext>
             </a:extLst>
           </p:cNvPr>
@@ -5282,7 +5264,7 @@
           <p:cNvPr id="8" name="p11-decision-title">
             <a:extLst xmlns:a="http://schemas.openxmlformats.org/drawingml/2006/main">
               <a:ext uri="{FF2B5EF4-FFF2-40B4-BE49-F238E27FC236}">
-                <a16:creationId xmlns:a16="http://schemas.microsoft.com/office/drawing/2014/main" id="{6DD4F8F6-00EE-4022-9C11-8D323C1D0ACE}"/>
+                <a16:creationId xmlns:a16="http://schemas.microsoft.com/office/drawing/2014/main" id="{0CBA3B0A-E631-497C-BE08-BD3410355F2E}"/>
               </a:ext>
             </a:extLst>
           </p:cNvPr>
@@ -5335,7 +5317,7 @@
           <p:cNvPr id="9" name="p11-dim-0">
             <a:extLst xmlns:a="http://schemas.openxmlformats.org/drawingml/2006/main">
               <a:ext uri="{FF2B5EF4-FFF2-40B4-BE49-F238E27FC236}">
-                <a16:creationId xmlns:a16="http://schemas.microsoft.com/office/drawing/2014/main" id="{45365ED2-6A3D-4D07-A5D3-B1953989A756}"/>
+                <a16:creationId xmlns:a16="http://schemas.microsoft.com/office/drawing/2014/main" id="{5208DA7F-E5E4-4A31-9EAD-5ECF527DBB2B}"/>
               </a:ext>
             </a:extLst>
           </p:cNvPr>
@@ -5392,7 +5374,7 @@
           <p:cNvPr id="10" name="p11-fb-0">
             <a:extLst xmlns:a="http://schemas.openxmlformats.org/drawingml/2006/main">
               <a:ext uri="{FF2B5EF4-FFF2-40B4-BE49-F238E27FC236}">
-                <a16:creationId xmlns:a16="http://schemas.microsoft.com/office/drawing/2014/main" id="{1836FED6-5D0A-4704-AAEC-65F20864D1E6}"/>
+                <a16:creationId xmlns:a16="http://schemas.microsoft.com/office/drawing/2014/main" id="{ECA42A5B-486D-413F-B7FC-029A2FB3C244}"/>
               </a:ext>
             </a:extLst>
           </p:cNvPr>
@@ -5447,7 +5429,7 @@
           <p:cNvPr id="11" name="p11-arrow-0">
             <a:extLst xmlns:a="http://schemas.openxmlformats.org/drawingml/2006/main">
               <a:ext uri="{FF2B5EF4-FFF2-40B4-BE49-F238E27FC236}">
-                <a16:creationId xmlns:a16="http://schemas.microsoft.com/office/drawing/2014/main" id="{5A380DF1-63A4-492C-9D3F-B1134EC4F209}"/>
+                <a16:creationId xmlns:a16="http://schemas.microsoft.com/office/drawing/2014/main" id="{4D77788C-9672-46E5-8460-727631E31796}"/>
               </a:ext>
             </a:extLst>
           </p:cNvPr>
@@ -5500,7 +5482,7 @@
           <p:cNvPr id="12" name="p11-decision-0">
             <a:extLst xmlns:a="http://schemas.openxmlformats.org/drawingml/2006/main">
               <a:ext uri="{FF2B5EF4-FFF2-40B4-BE49-F238E27FC236}">
-                <a16:creationId xmlns:a16="http://schemas.microsoft.com/office/drawing/2014/main" id="{31161CD9-42FD-4214-9BF3-01B34551B71B}"/>
+                <a16:creationId xmlns:a16="http://schemas.microsoft.com/office/drawing/2014/main" id="{0D078005-EBC2-46E5-B490-A6A1D0C712C6}"/>
               </a:ext>
             </a:extLst>
           </p:cNvPr>
@@ -5557,7 +5539,7 @@
           <p:cNvPr id="13" name="p11-reason-0">
             <a:extLst xmlns:a="http://schemas.openxmlformats.org/drawingml/2006/main">
               <a:ext uri="{FF2B5EF4-FFF2-40B4-BE49-F238E27FC236}">
-                <a16:creationId xmlns:a16="http://schemas.microsoft.com/office/drawing/2014/main" id="{E4680B05-A3CC-4865-B9BE-4409874CCE6F}"/>
+                <a16:creationId xmlns:a16="http://schemas.microsoft.com/office/drawing/2014/main" id="{B853AA5B-AB38-42F2-A0E2-4188CF0108FE}"/>
               </a:ext>
             </a:extLst>
           </p:cNvPr>
@@ -5612,7 +5594,7 @@
           <p:cNvPr id="14" name="p11-dim-1">
             <a:extLst xmlns:a="http://schemas.openxmlformats.org/drawingml/2006/main">
               <a:ext uri="{FF2B5EF4-FFF2-40B4-BE49-F238E27FC236}">
-                <a16:creationId xmlns:a16="http://schemas.microsoft.com/office/drawing/2014/main" id="{F448CFE6-480B-47C1-9AA9-8CF23DDC6B75}"/>
+                <a16:creationId xmlns:a16="http://schemas.microsoft.com/office/drawing/2014/main" id="{B75B008D-CD54-4C63-B7DB-11502A8135D7}"/>
               </a:ext>
             </a:extLst>
           </p:cNvPr>
@@ -5669,7 +5651,7 @@
           <p:cNvPr id="15" name="p11-fb-1">
             <a:extLst xmlns:a="http://schemas.openxmlformats.org/drawingml/2006/main">
               <a:ext uri="{FF2B5EF4-FFF2-40B4-BE49-F238E27FC236}">
-                <a16:creationId xmlns:a16="http://schemas.microsoft.com/office/drawing/2014/main" id="{14340D57-4055-4B8F-8BDF-F45DF25CEDA3}"/>
+                <a16:creationId xmlns:a16="http://schemas.microsoft.com/office/drawing/2014/main" id="{B15C1718-FF78-4B18-8219-43FB7E20BF7A}"/>
               </a:ext>
             </a:extLst>
           </p:cNvPr>
@@ -5724,7 +5706,7 @@
           <p:cNvPr id="16" name="p11-arrow-1">
             <a:extLst xmlns:a="http://schemas.openxmlformats.org/drawingml/2006/main">
               <a:ext uri="{FF2B5EF4-FFF2-40B4-BE49-F238E27FC236}">
-                <a16:creationId xmlns:a16="http://schemas.microsoft.com/office/drawing/2014/main" id="{F3EB34B4-F37E-4E4C-9257-3FAC61D83ED3}"/>
+                <a16:creationId xmlns:a16="http://schemas.microsoft.com/office/drawing/2014/main" id="{4EA65563-1798-469C-A641-F2DA9A092C11}"/>
               </a:ext>
             </a:extLst>
           </p:cNvPr>
@@ -5777,7 +5759,7 @@
           <p:cNvPr id="17" name="p11-decision-1">
             <a:extLst xmlns:a="http://schemas.openxmlformats.org/drawingml/2006/main">
               <a:ext uri="{FF2B5EF4-FFF2-40B4-BE49-F238E27FC236}">
-                <a16:creationId xmlns:a16="http://schemas.microsoft.com/office/drawing/2014/main" id="{A3D7A378-DB3E-44BE-901E-5B3AE26B3F30}"/>
+                <a16:creationId xmlns:a16="http://schemas.microsoft.com/office/drawing/2014/main" id="{1CFF7A0A-8826-4DD1-9671-FE20EF73295E}"/>
               </a:ext>
             </a:extLst>
           </p:cNvPr>
@@ -5834,7 +5816,7 @@
           <p:cNvPr id="18" name="p11-reason-1">
             <a:extLst xmlns:a="http://schemas.openxmlformats.org/drawingml/2006/main">
               <a:ext uri="{FF2B5EF4-FFF2-40B4-BE49-F238E27FC236}">
-                <a16:creationId xmlns:a16="http://schemas.microsoft.com/office/drawing/2014/main" id="{0F61DB42-48FC-47B8-AB6F-8D5AFC1D60D6}"/>
+                <a16:creationId xmlns:a16="http://schemas.microsoft.com/office/drawing/2014/main" id="{F15B0D6A-D4D8-4C4F-8785-6538A4851681}"/>
               </a:ext>
             </a:extLst>
           </p:cNvPr>
@@ -5889,7 +5871,7 @@
           <p:cNvPr id="19" name="p11-dim-2">
             <a:extLst xmlns:a="http://schemas.openxmlformats.org/drawingml/2006/main">
               <a:ext uri="{FF2B5EF4-FFF2-40B4-BE49-F238E27FC236}">
-                <a16:creationId xmlns:a16="http://schemas.microsoft.com/office/drawing/2014/main" id="{FD6A9B92-661E-41EF-9D0A-8BBCF43D3FB5}"/>
+                <a16:creationId xmlns:a16="http://schemas.microsoft.com/office/drawing/2014/main" id="{4088896A-1130-4160-891B-A351462DDA2C}"/>
               </a:ext>
             </a:extLst>
           </p:cNvPr>
@@ -5946,7 +5928,7 @@
           <p:cNvPr id="20" name="p11-fb-2">
             <a:extLst xmlns:a="http://schemas.openxmlformats.org/drawingml/2006/main">
               <a:ext uri="{FF2B5EF4-FFF2-40B4-BE49-F238E27FC236}">
-                <a16:creationId xmlns:a16="http://schemas.microsoft.com/office/drawing/2014/main" id="{8869F47B-9E51-4516-9D56-93CA4877E7CB}"/>
+                <a16:creationId xmlns:a16="http://schemas.microsoft.com/office/drawing/2014/main" id="{8D770609-28D8-4BA0-87E6-7705DD017CE8}"/>
               </a:ext>
             </a:extLst>
           </p:cNvPr>
@@ -6001,7 +5983,7 @@
           <p:cNvPr id="21" name="p11-arrow-2">
             <a:extLst xmlns:a="http://schemas.openxmlformats.org/drawingml/2006/main">
               <a:ext uri="{FF2B5EF4-FFF2-40B4-BE49-F238E27FC236}">
-                <a16:creationId xmlns:a16="http://schemas.microsoft.com/office/drawing/2014/main" id="{45366632-3216-437C-BF36-7012A90B9FAD}"/>
+                <a16:creationId xmlns:a16="http://schemas.microsoft.com/office/drawing/2014/main" id="{29F8F740-D3F8-48BD-86DE-5E061CC0C64E}"/>
               </a:ext>
             </a:extLst>
           </p:cNvPr>
@@ -6054,7 +6036,7 @@
           <p:cNvPr id="22" name="p11-decision-2">
             <a:extLst xmlns:a="http://schemas.openxmlformats.org/drawingml/2006/main">
               <a:ext uri="{FF2B5EF4-FFF2-40B4-BE49-F238E27FC236}">
-                <a16:creationId xmlns:a16="http://schemas.microsoft.com/office/drawing/2014/main" id="{0370978E-80C0-4362-9755-A2D2998D61A3}"/>
+                <a16:creationId xmlns:a16="http://schemas.microsoft.com/office/drawing/2014/main" id="{7C6991E1-DA8D-427B-BDB9-5F8F778EFBBC}"/>
               </a:ext>
             </a:extLst>
           </p:cNvPr>
@@ -6111,7 +6093,7 @@
           <p:cNvPr id="23" name="p11-reason-2">
             <a:extLst xmlns:a="http://schemas.openxmlformats.org/drawingml/2006/main">
               <a:ext uri="{FF2B5EF4-FFF2-40B4-BE49-F238E27FC236}">
-                <a16:creationId xmlns:a16="http://schemas.microsoft.com/office/drawing/2014/main" id="{D2649C8F-6500-4C21-A446-3E600F1D4129}"/>
+                <a16:creationId xmlns:a16="http://schemas.microsoft.com/office/drawing/2014/main" id="{49DB1B44-170E-42C7-B77F-CBC3FD0A4A56}"/>
               </a:ext>
             </a:extLst>
           </p:cNvPr>
@@ -6166,7 +6148,7 @@
           <p:cNvPr id="24" name="p11-bottom">
             <a:extLst xmlns:a="http://schemas.openxmlformats.org/drawingml/2006/main">
               <a:ext uri="{FF2B5EF4-FFF2-40B4-BE49-F238E27FC236}">
-                <a16:creationId xmlns:a16="http://schemas.microsoft.com/office/drawing/2014/main" id="{AB38F793-09D6-44C6-AD53-6BD4858C4D8E}"/>
+                <a16:creationId xmlns:a16="http://schemas.microsoft.com/office/drawing/2014/main" id="{A445A287-266D-4062-BFEF-9F6A8D406AAA}"/>
               </a:ext>
             </a:extLst>
           </p:cNvPr>
@@ -6313,7 +6295,7 @@
           <p:cNvPr id="6" name="p12-table-h-0">
             <a:extLst xmlns:a="http://schemas.openxmlformats.org/drawingml/2006/main">
               <a:ext uri="{FF2B5EF4-FFF2-40B4-BE49-F238E27FC236}">
-                <a16:creationId xmlns:a16="http://schemas.microsoft.com/office/drawing/2014/main" id="{AB972BF0-B263-4107-9B4D-5210A3402DB7}"/>
+                <a16:creationId xmlns:a16="http://schemas.microsoft.com/office/drawing/2014/main" id="{9C174011-2604-4D16-A0C8-A07305B1207E}"/>
               </a:ext>
             </a:extLst>
           </p:cNvPr>
@@ -6368,7 +6350,7 @@
           <p:cNvPr id="7" name="p12-table-h-1">
             <a:extLst xmlns:a="http://schemas.openxmlformats.org/drawingml/2006/main">
               <a:ext uri="{FF2B5EF4-FFF2-40B4-BE49-F238E27FC236}">
-                <a16:creationId xmlns:a16="http://schemas.microsoft.com/office/drawing/2014/main" id="{C4590CEF-441A-4162-AB99-89761533CA59}"/>
+                <a16:creationId xmlns:a16="http://schemas.microsoft.com/office/drawing/2014/main" id="{46A964C4-68A2-44A6-A556-C408C174032B}"/>
               </a:ext>
             </a:extLst>
           </p:cNvPr>
@@ -6423,7 +6405,7 @@
           <p:cNvPr id="8" name="p12-table-h-2">
             <a:extLst xmlns:a="http://schemas.openxmlformats.org/drawingml/2006/main">
               <a:ext uri="{FF2B5EF4-FFF2-40B4-BE49-F238E27FC236}">
-                <a16:creationId xmlns:a16="http://schemas.microsoft.com/office/drawing/2014/main" id="{DB35D281-4C1A-4BA1-8944-6AAE58D67CCD}"/>
+                <a16:creationId xmlns:a16="http://schemas.microsoft.com/office/drawing/2014/main" id="{CF592E1F-5FC3-4B26-8C38-D6BDC205A5C1}"/>
               </a:ext>
             </a:extLst>
           </p:cNvPr>
@@ -6478,7 +6460,7 @@
           <p:cNvPr id="9" name="p12-table-r0-0">
             <a:extLst xmlns:a="http://schemas.openxmlformats.org/drawingml/2006/main">
               <a:ext uri="{FF2B5EF4-FFF2-40B4-BE49-F238E27FC236}">
-                <a16:creationId xmlns:a16="http://schemas.microsoft.com/office/drawing/2014/main" id="{29B85B1B-E939-478D-86C6-FF700197566A}"/>
+                <a16:creationId xmlns:a16="http://schemas.microsoft.com/office/drawing/2014/main" id="{FF091818-19D1-4296-A90C-6CE5D4F16837}"/>
               </a:ext>
             </a:extLst>
           </p:cNvPr>
@@ -6539,7 +6521,7 @@
           <p:cNvPr id="10" name="p12-table-r0-1">
             <a:extLst xmlns:a="http://schemas.openxmlformats.org/drawingml/2006/main">
               <a:ext uri="{FF2B5EF4-FFF2-40B4-BE49-F238E27FC236}">
-                <a16:creationId xmlns:a16="http://schemas.microsoft.com/office/drawing/2014/main" id="{63FA49B5-D8F9-4C12-8D39-769AC6D91EE5}"/>
+                <a16:creationId xmlns:a16="http://schemas.microsoft.com/office/drawing/2014/main" id="{BAD97917-E5DD-4CA4-B2D9-D1000DAF2DD8}"/>
               </a:ext>
             </a:extLst>
           </p:cNvPr>
@@ -6600,7 +6582,7 @@
           <p:cNvPr id="11" name="p12-table-r0-2">
             <a:extLst xmlns:a="http://schemas.openxmlformats.org/drawingml/2006/main">
               <a:ext uri="{FF2B5EF4-FFF2-40B4-BE49-F238E27FC236}">
-                <a16:creationId xmlns:a16="http://schemas.microsoft.com/office/drawing/2014/main" id="{E58A2E2A-4CEC-4F27-A2D9-08DF8F0F57F5}"/>
+                <a16:creationId xmlns:a16="http://schemas.microsoft.com/office/drawing/2014/main" id="{70431D19-191F-4969-8EDF-9EFF8483EC54}"/>
               </a:ext>
             </a:extLst>
           </p:cNvPr>
@@ -6661,7 +6643,7 @@
           <p:cNvPr id="12" name="p12-table-r1-0">
             <a:extLst xmlns:a="http://schemas.openxmlformats.org/drawingml/2006/main">
               <a:ext uri="{FF2B5EF4-FFF2-40B4-BE49-F238E27FC236}">
-                <a16:creationId xmlns:a16="http://schemas.microsoft.com/office/drawing/2014/main" id="{C51A5921-B836-4A17-A424-37DC9DEE95AE}"/>
+                <a16:creationId xmlns:a16="http://schemas.microsoft.com/office/drawing/2014/main" id="{41B0A6C1-BBD2-4DB6-BC7E-770E0CF10DA6}"/>
               </a:ext>
             </a:extLst>
           </p:cNvPr>
@@ -6722,7 +6704,7 @@
           <p:cNvPr id="13" name="p12-table-r1-1">
             <a:extLst xmlns:a="http://schemas.openxmlformats.org/drawingml/2006/main">
               <a:ext uri="{FF2B5EF4-FFF2-40B4-BE49-F238E27FC236}">
-                <a16:creationId xmlns:a16="http://schemas.microsoft.com/office/drawing/2014/main" id="{3E4E3935-260F-4038-A11F-34D50449FA7B}"/>
+                <a16:creationId xmlns:a16="http://schemas.microsoft.com/office/drawing/2014/main" id="{BD515FB3-0B18-4415-9C96-5D16B7E17A71}"/>
               </a:ext>
             </a:extLst>
           </p:cNvPr>
@@ -6783,7 +6765,7 @@
           <p:cNvPr id="14" name="p12-table-r1-2">
             <a:extLst xmlns:a="http://schemas.openxmlformats.org/drawingml/2006/main">
               <a:ext uri="{FF2B5EF4-FFF2-40B4-BE49-F238E27FC236}">
-                <a16:creationId xmlns:a16="http://schemas.microsoft.com/office/drawing/2014/main" id="{242AB112-B461-48A7-A13B-4BB6B44A1564}"/>
+                <a16:creationId xmlns:a16="http://schemas.microsoft.com/office/drawing/2014/main" id="{414AD6E7-6941-40C9-B97C-9B8E3D49FCEA}"/>
               </a:ext>
             </a:extLst>
           </p:cNvPr>
@@ -6844,7 +6826,7 @@
           <p:cNvPr id="15" name="p12-table-r2-0">
             <a:extLst xmlns:a="http://schemas.openxmlformats.org/drawingml/2006/main">
               <a:ext uri="{FF2B5EF4-FFF2-40B4-BE49-F238E27FC236}">
-                <a16:creationId xmlns:a16="http://schemas.microsoft.com/office/drawing/2014/main" id="{973D9C0F-D13A-4C5C-9420-F3BC08B61260}"/>
+                <a16:creationId xmlns:a16="http://schemas.microsoft.com/office/drawing/2014/main" id="{043B9B1B-771C-442E-AFF5-20FD9C2FB13A}"/>
               </a:ext>
             </a:extLst>
           </p:cNvPr>
@@ -6905,7 +6887,7 @@
           <p:cNvPr id="16" name="p12-table-r2-1">
             <a:extLst xmlns:a="http://schemas.openxmlformats.org/drawingml/2006/main">
               <a:ext uri="{FF2B5EF4-FFF2-40B4-BE49-F238E27FC236}">
-                <a16:creationId xmlns:a16="http://schemas.microsoft.com/office/drawing/2014/main" id="{B64D90C8-BA5E-4595-B7ED-A5F9A05B75A3}"/>
+                <a16:creationId xmlns:a16="http://schemas.microsoft.com/office/drawing/2014/main" id="{1BCBA33E-5867-44B1-AB9D-CD0EBC01E2CE}"/>
               </a:ext>
             </a:extLst>
           </p:cNvPr>
@@ -6966,7 +6948,7 @@
           <p:cNvPr id="17" name="p12-table-r2-2">
             <a:extLst xmlns:a="http://schemas.openxmlformats.org/drawingml/2006/main">
               <a:ext uri="{FF2B5EF4-FFF2-40B4-BE49-F238E27FC236}">
-                <a16:creationId xmlns:a16="http://schemas.microsoft.com/office/drawing/2014/main" id="{DC83C1DA-5F6A-4CA9-9AA1-6885C24CC0EB}"/>
+                <a16:creationId xmlns:a16="http://schemas.microsoft.com/office/drawing/2014/main" id="{BDB790AA-DDF3-472C-8451-8276C4A301CD}"/>
               </a:ext>
             </a:extLst>
           </p:cNvPr>
@@ -7027,7 +7009,7 @@
           <p:cNvPr id="18" name="p12-table-r3-0">
             <a:extLst xmlns:a="http://schemas.openxmlformats.org/drawingml/2006/main">
               <a:ext uri="{FF2B5EF4-FFF2-40B4-BE49-F238E27FC236}">
-                <a16:creationId xmlns:a16="http://schemas.microsoft.com/office/drawing/2014/main" id="{14D80618-DD2B-4C61-BFB2-61C2EFE6C00C}"/>
+                <a16:creationId xmlns:a16="http://schemas.microsoft.com/office/drawing/2014/main" id="{588E319E-1B9A-47D1-B962-A60B46D034FF}"/>
               </a:ext>
             </a:extLst>
           </p:cNvPr>
@@ -7088,7 +7070,7 @@
           <p:cNvPr id="19" name="p12-table-r3-1">
             <a:extLst xmlns:a="http://schemas.openxmlformats.org/drawingml/2006/main">
               <a:ext uri="{FF2B5EF4-FFF2-40B4-BE49-F238E27FC236}">
-                <a16:creationId xmlns:a16="http://schemas.microsoft.com/office/drawing/2014/main" id="{96407ADF-3C49-4535-9EFC-56553823AE99}"/>
+                <a16:creationId xmlns:a16="http://schemas.microsoft.com/office/drawing/2014/main" id="{4C6238EF-3FE9-4E7C-A430-0A95D368463F}"/>
               </a:ext>
             </a:extLst>
           </p:cNvPr>
@@ -7149,7 +7131,7 @@
           <p:cNvPr id="20" name="p12-table-r3-2">
             <a:extLst xmlns:a="http://schemas.openxmlformats.org/drawingml/2006/main">
               <a:ext uri="{FF2B5EF4-FFF2-40B4-BE49-F238E27FC236}">
-                <a16:creationId xmlns:a16="http://schemas.microsoft.com/office/drawing/2014/main" id="{E1B9BC00-65E0-4C50-B92F-EDCE31DEAC6E}"/>
+                <a16:creationId xmlns:a16="http://schemas.microsoft.com/office/drawing/2014/main" id="{190E3EF9-DE4F-42E8-ACB4-570394C670DA}"/>
               </a:ext>
             </a:extLst>
           </p:cNvPr>
@@ -7210,7 +7192,7 @@
           <p:cNvPr id="21" name="p12-table-r4-0">
             <a:extLst xmlns:a="http://schemas.openxmlformats.org/drawingml/2006/main">
               <a:ext uri="{FF2B5EF4-FFF2-40B4-BE49-F238E27FC236}">
-                <a16:creationId xmlns:a16="http://schemas.microsoft.com/office/drawing/2014/main" id="{2FE45A46-4909-4613-8767-E966BC15283E}"/>
+                <a16:creationId xmlns:a16="http://schemas.microsoft.com/office/drawing/2014/main" id="{6622BAAE-CBA1-4027-8343-C281700476F5}"/>
               </a:ext>
             </a:extLst>
           </p:cNvPr>
@@ -7271,7 +7253,7 @@
           <p:cNvPr id="22" name="p12-table-r4-1">
             <a:extLst xmlns:a="http://schemas.openxmlformats.org/drawingml/2006/main">
               <a:ext uri="{FF2B5EF4-FFF2-40B4-BE49-F238E27FC236}">
-                <a16:creationId xmlns:a16="http://schemas.microsoft.com/office/drawing/2014/main" id="{A56C8AEA-8CED-4195-965C-3421ADC9CF30}"/>
+                <a16:creationId xmlns:a16="http://schemas.microsoft.com/office/drawing/2014/main" id="{42E5DE63-8626-4892-97E1-E2804E1ED0F8}"/>
               </a:ext>
             </a:extLst>
           </p:cNvPr>
@@ -7332,7 +7314,7 @@
           <p:cNvPr id="23" name="p12-table-r4-2">
             <a:extLst xmlns:a="http://schemas.openxmlformats.org/drawingml/2006/main">
               <a:ext uri="{FF2B5EF4-FFF2-40B4-BE49-F238E27FC236}">
-                <a16:creationId xmlns:a16="http://schemas.microsoft.com/office/drawing/2014/main" id="{2698BB89-E2E9-48A4-81D5-34844D4780DF}"/>
+                <a16:creationId xmlns:a16="http://schemas.microsoft.com/office/drawing/2014/main" id="{A76C4D65-EAEE-4B74-B775-97FE7AC672BE}"/>
               </a:ext>
             </a:extLst>
           </p:cNvPr>
@@ -7393,7 +7375,7 @@
           <p:cNvPr id="24" name="p12-table-r5-0">
             <a:extLst xmlns:a="http://schemas.openxmlformats.org/drawingml/2006/main">
               <a:ext uri="{FF2B5EF4-FFF2-40B4-BE49-F238E27FC236}">
-                <a16:creationId xmlns:a16="http://schemas.microsoft.com/office/drawing/2014/main" id="{E871B3FE-2D1D-4867-9EC6-C9511BF42FD3}"/>
+                <a16:creationId xmlns:a16="http://schemas.microsoft.com/office/drawing/2014/main" id="{BBD5E247-6C26-4DDE-BF5D-14BE3D9D1267}"/>
               </a:ext>
             </a:extLst>
           </p:cNvPr>
@@ -7454,7 +7436,7 @@
           <p:cNvPr id="25" name="p12-table-r5-1">
             <a:extLst xmlns:a="http://schemas.openxmlformats.org/drawingml/2006/main">
               <a:ext uri="{FF2B5EF4-FFF2-40B4-BE49-F238E27FC236}">
-                <a16:creationId xmlns:a16="http://schemas.microsoft.com/office/drawing/2014/main" id="{414BD02C-F589-47A4-8452-3533242C9E56}"/>
+                <a16:creationId xmlns:a16="http://schemas.microsoft.com/office/drawing/2014/main" id="{0630401A-BEC9-4833-AE21-7366AF6F9647}"/>
               </a:ext>
             </a:extLst>
           </p:cNvPr>
@@ -7515,7 +7497,7 @@
           <p:cNvPr id="26" name="p12-table-r5-2">
             <a:extLst xmlns:a="http://schemas.openxmlformats.org/drawingml/2006/main">
               <a:ext uri="{FF2B5EF4-FFF2-40B4-BE49-F238E27FC236}">
-                <a16:creationId xmlns:a16="http://schemas.microsoft.com/office/drawing/2014/main" id="{558E2C4D-4EFD-4760-B1AA-C8B12C1C26DD}"/>
+                <a16:creationId xmlns:a16="http://schemas.microsoft.com/office/drawing/2014/main" id="{B8292887-A138-4796-B9CF-B06EE5E4B81B}"/>
               </a:ext>
             </a:extLst>
           </p:cNvPr>
@@ -7576,7 +7558,7 @@
           <p:cNvPr id="27" name="p12-table-r6-0">
             <a:extLst xmlns:a="http://schemas.openxmlformats.org/drawingml/2006/main">
               <a:ext uri="{FF2B5EF4-FFF2-40B4-BE49-F238E27FC236}">
-                <a16:creationId xmlns:a16="http://schemas.microsoft.com/office/drawing/2014/main" id="{BC401C56-C735-49A1-85CF-F873B86266AD}"/>
+                <a16:creationId xmlns:a16="http://schemas.microsoft.com/office/drawing/2014/main" id="{2E464318-B394-49A7-BD8E-0F709E99A3F1}"/>
               </a:ext>
             </a:extLst>
           </p:cNvPr>
@@ -7637,7 +7619,7 @@
           <p:cNvPr id="28" name="p12-table-r6-1">
             <a:extLst xmlns:a="http://schemas.openxmlformats.org/drawingml/2006/main">
               <a:ext uri="{FF2B5EF4-FFF2-40B4-BE49-F238E27FC236}">
-                <a16:creationId xmlns:a16="http://schemas.microsoft.com/office/drawing/2014/main" id="{7D0EDE98-AF22-4224-B57F-BB81A6F5137B}"/>
+                <a16:creationId xmlns:a16="http://schemas.microsoft.com/office/drawing/2014/main" id="{51D46D3E-CC7F-45B8-8BDC-DD8EE34E1D8E}"/>
               </a:ext>
             </a:extLst>
           </p:cNvPr>
@@ -7698,7 +7680,7 @@
           <p:cNvPr id="29" name="p12-table-r6-2">
             <a:extLst xmlns:a="http://schemas.openxmlformats.org/drawingml/2006/main">
               <a:ext uri="{FF2B5EF4-FFF2-40B4-BE49-F238E27FC236}">
-                <a16:creationId xmlns:a16="http://schemas.microsoft.com/office/drawing/2014/main" id="{8A876004-4F82-4752-97B3-846BA0665772}"/>
+                <a16:creationId xmlns:a16="http://schemas.microsoft.com/office/drawing/2014/main" id="{173FAE43-0D99-438D-8F19-CE1086C95D53}"/>
               </a:ext>
             </a:extLst>
           </p:cNvPr>
@@ -7759,7 +7741,7 @@
           <p:cNvPr id="30" name="p12-table-r7-0">
             <a:extLst xmlns:a="http://schemas.openxmlformats.org/drawingml/2006/main">
               <a:ext uri="{FF2B5EF4-FFF2-40B4-BE49-F238E27FC236}">
-                <a16:creationId xmlns:a16="http://schemas.microsoft.com/office/drawing/2014/main" id="{72EA3DBF-8983-4234-9515-579E798E7B1E}"/>
+                <a16:creationId xmlns:a16="http://schemas.microsoft.com/office/drawing/2014/main" id="{0FE79794-95D3-428E-81FD-0CD319D81BDB}"/>
               </a:ext>
             </a:extLst>
           </p:cNvPr>
@@ -7820,7 +7802,7 @@
           <p:cNvPr id="31" name="p12-table-r7-1">
             <a:extLst xmlns:a="http://schemas.openxmlformats.org/drawingml/2006/main">
               <a:ext uri="{FF2B5EF4-FFF2-40B4-BE49-F238E27FC236}">
-                <a16:creationId xmlns:a16="http://schemas.microsoft.com/office/drawing/2014/main" id="{501CEEB8-CC88-430D-9553-A46FF01A877F}"/>
+                <a16:creationId xmlns:a16="http://schemas.microsoft.com/office/drawing/2014/main" id="{5E232034-A542-4941-A66E-A9B945E2196D}"/>
               </a:ext>
             </a:extLst>
           </p:cNvPr>
@@ -7881,7 +7863,7 @@
           <p:cNvPr id="32" name="p12-table-r7-2">
             <a:extLst xmlns:a="http://schemas.openxmlformats.org/drawingml/2006/main">
               <a:ext uri="{FF2B5EF4-FFF2-40B4-BE49-F238E27FC236}">
-                <a16:creationId xmlns:a16="http://schemas.microsoft.com/office/drawing/2014/main" id="{08E6D6BC-ECD1-4D17-BFD4-5187E592BDD4}"/>
+                <a16:creationId xmlns:a16="http://schemas.microsoft.com/office/drawing/2014/main" id="{48B29EF9-5F3A-4AE8-BFD4-B0894D1DCD2A}"/>
               </a:ext>
             </a:extLst>
           </p:cNvPr>
@@ -7942,7 +7924,7 @@
           <p:cNvPr id="33" name="p12-bottom">
             <a:extLst xmlns:a="http://schemas.openxmlformats.org/drawingml/2006/main">
               <a:ext uri="{FF2B5EF4-FFF2-40B4-BE49-F238E27FC236}">
-                <a16:creationId xmlns:a16="http://schemas.microsoft.com/office/drawing/2014/main" id="{2328DFB7-2C74-4C5C-9FC5-CD6C5A7F07ED}"/>
+                <a16:creationId xmlns:a16="http://schemas.microsoft.com/office/drawing/2014/main" id="{7BF0C014-6E04-4F26-B075-FE3230D04897}"/>
               </a:ext>
             </a:extLst>
           </p:cNvPr>
@@ -8089,7 +8071,7 @@
           <p:cNvPr id="6" name="p13-time">
             <a:extLst xmlns:a="http://schemas.openxmlformats.org/drawingml/2006/main">
               <a:ext uri="{FF2B5EF4-FFF2-40B4-BE49-F238E27FC236}">
-                <a16:creationId xmlns:a16="http://schemas.microsoft.com/office/drawing/2014/main" id="{A3CB2F06-4ACD-4167-A75C-A02686F14E93}"/>
+                <a16:creationId xmlns:a16="http://schemas.microsoft.com/office/drawing/2014/main" id="{9E8E104C-D83A-4845-B61B-5858C7637526}"/>
               </a:ext>
             </a:extLst>
           </p:cNvPr>
@@ -8142,7 +8124,7 @@
           <p:cNvPr id="7" name="p13-left-title">
             <a:extLst xmlns:a="http://schemas.openxmlformats.org/drawingml/2006/main">
               <a:ext uri="{FF2B5EF4-FFF2-40B4-BE49-F238E27FC236}">
-                <a16:creationId xmlns:a16="http://schemas.microsoft.com/office/drawing/2014/main" id="{0155AF0C-0C07-4044-A8DC-0E5E3DA06FA5}"/>
+                <a16:creationId xmlns:a16="http://schemas.microsoft.com/office/drawing/2014/main" id="{8310920D-F3B5-4F6F-A7AF-54D87D82D6D6}"/>
               </a:ext>
             </a:extLst>
           </p:cNvPr>
@@ -8195,7 +8177,7 @@
           <p:cNvPr id="8" name="p13-line-0">
             <a:extLst xmlns:a="http://schemas.openxmlformats.org/drawingml/2006/main">
               <a:ext uri="{FF2B5EF4-FFF2-40B4-BE49-F238E27FC236}">
-                <a16:creationId xmlns:a16="http://schemas.microsoft.com/office/drawing/2014/main" id="{75757573-E8A6-435A-BE7E-89B56BBF03D1}"/>
+                <a16:creationId xmlns:a16="http://schemas.microsoft.com/office/drawing/2014/main" id="{E8C56193-AAB4-4F65-A8E6-F9DAB1801562}"/>
               </a:ext>
             </a:extLst>
           </p:cNvPr>
@@ -8226,7 +8208,7 @@
           <p:cNvPr id="9" name="p13-n-0">
             <a:extLst xmlns:a="http://schemas.openxmlformats.org/drawingml/2006/main">
               <a:ext uri="{FF2B5EF4-FFF2-40B4-BE49-F238E27FC236}">
-                <a16:creationId xmlns:a16="http://schemas.microsoft.com/office/drawing/2014/main" id="{19736FD8-C248-41E3-A53F-8385F8EE4514}"/>
+                <a16:creationId xmlns:a16="http://schemas.microsoft.com/office/drawing/2014/main" id="{A4D63C23-E1CE-419F-86F6-F27E00F37169}"/>
               </a:ext>
             </a:extLst>
           </p:cNvPr>
@@ -8283,7 +8265,7 @@
           <p:cNvPr id="10" name="p13-task-0">
             <a:extLst xmlns:a="http://schemas.openxmlformats.org/drawingml/2006/main">
               <a:ext uri="{FF2B5EF4-FFF2-40B4-BE49-F238E27FC236}">
-                <a16:creationId xmlns:a16="http://schemas.microsoft.com/office/drawing/2014/main" id="{DBE91DC3-CCB6-4FCD-BCF2-8F065DD80D21}"/>
+                <a16:creationId xmlns:a16="http://schemas.microsoft.com/office/drawing/2014/main" id="{EC8E7425-F310-4482-BFC4-6BAD6BF35999}"/>
               </a:ext>
             </a:extLst>
           </p:cNvPr>
@@ -8338,7 +8320,7 @@
           <p:cNvPr id="11" name="p13-line-1">
             <a:extLst xmlns:a="http://schemas.openxmlformats.org/drawingml/2006/main">
               <a:ext uri="{FF2B5EF4-FFF2-40B4-BE49-F238E27FC236}">
-                <a16:creationId xmlns:a16="http://schemas.microsoft.com/office/drawing/2014/main" id="{4BEFE032-61FF-4E2F-A5CB-07610B261B4D}"/>
+                <a16:creationId xmlns:a16="http://schemas.microsoft.com/office/drawing/2014/main" id="{0AAEBE12-6FFA-437D-A66C-2F59F53B31BA}"/>
               </a:ext>
             </a:extLst>
           </p:cNvPr>
@@ -8369,7 +8351,7 @@
           <p:cNvPr id="12" name="p13-n-1">
             <a:extLst xmlns:a="http://schemas.openxmlformats.org/drawingml/2006/main">
               <a:ext uri="{FF2B5EF4-FFF2-40B4-BE49-F238E27FC236}">
-                <a16:creationId xmlns:a16="http://schemas.microsoft.com/office/drawing/2014/main" id="{BF88E2BD-CE28-4380-8283-5B392C1DC5F2}"/>
+                <a16:creationId xmlns:a16="http://schemas.microsoft.com/office/drawing/2014/main" id="{616C8246-9689-40C1-A975-84BF0EFBF18B}"/>
               </a:ext>
             </a:extLst>
           </p:cNvPr>
@@ -8426,7 +8408,7 @@
           <p:cNvPr id="13" name="p13-task-1">
             <a:extLst xmlns:a="http://schemas.openxmlformats.org/drawingml/2006/main">
               <a:ext uri="{FF2B5EF4-FFF2-40B4-BE49-F238E27FC236}">
-                <a16:creationId xmlns:a16="http://schemas.microsoft.com/office/drawing/2014/main" id="{47CAAB47-362A-4400-AF8A-FA543A017059}"/>
+                <a16:creationId xmlns:a16="http://schemas.microsoft.com/office/drawing/2014/main" id="{0539DE2A-FBB5-4515-8A7A-86EAD2577D7C}"/>
               </a:ext>
             </a:extLst>
           </p:cNvPr>
@@ -8481,7 +8463,7 @@
           <p:cNvPr id="14" name="p13-line-2">
             <a:extLst xmlns:a="http://schemas.openxmlformats.org/drawingml/2006/main">
               <a:ext uri="{FF2B5EF4-FFF2-40B4-BE49-F238E27FC236}">
-                <a16:creationId xmlns:a16="http://schemas.microsoft.com/office/drawing/2014/main" id="{99518F30-258C-4E9E-A2C1-F7BD844678F7}"/>
+                <a16:creationId xmlns:a16="http://schemas.microsoft.com/office/drawing/2014/main" id="{96A9BCE8-4974-4E77-BC24-BFEDE8D7D123}"/>
               </a:ext>
             </a:extLst>
           </p:cNvPr>
@@ -8512,7 +8494,7 @@
           <p:cNvPr id="15" name="p13-n-2">
             <a:extLst xmlns:a="http://schemas.openxmlformats.org/drawingml/2006/main">
               <a:ext uri="{FF2B5EF4-FFF2-40B4-BE49-F238E27FC236}">
-                <a16:creationId xmlns:a16="http://schemas.microsoft.com/office/drawing/2014/main" id="{A8AADAA3-188D-437E-B3CA-494352E856E4}"/>
+                <a16:creationId xmlns:a16="http://schemas.microsoft.com/office/drawing/2014/main" id="{42C063EB-8D11-4311-946A-FA8DAB0FB1A5}"/>
               </a:ext>
             </a:extLst>
           </p:cNvPr>
@@ -8569,7 +8551,7 @@
           <p:cNvPr id="16" name="p13-task-2">
             <a:extLst xmlns:a="http://schemas.openxmlformats.org/drawingml/2006/main">
               <a:ext uri="{FF2B5EF4-FFF2-40B4-BE49-F238E27FC236}">
-                <a16:creationId xmlns:a16="http://schemas.microsoft.com/office/drawing/2014/main" id="{6B2B432D-AD39-4AB3-B284-30F626C711A8}"/>
+                <a16:creationId xmlns:a16="http://schemas.microsoft.com/office/drawing/2014/main" id="{820C2568-5530-433A-9443-A40FB129964A}"/>
               </a:ext>
             </a:extLst>
           </p:cNvPr>
@@ -8624,7 +8606,7 @@
           <p:cNvPr id="17" name="p13-n-3">
             <a:extLst xmlns:a="http://schemas.openxmlformats.org/drawingml/2006/main">
               <a:ext uri="{FF2B5EF4-FFF2-40B4-BE49-F238E27FC236}">
-                <a16:creationId xmlns:a16="http://schemas.microsoft.com/office/drawing/2014/main" id="{D0935479-3BAE-4AD9-AA63-2F2F9EDDBB80}"/>
+                <a16:creationId xmlns:a16="http://schemas.microsoft.com/office/drawing/2014/main" id="{5C51274D-EAFF-44AE-9894-E217F274C15A}"/>
               </a:ext>
             </a:extLst>
           </p:cNvPr>
@@ -8681,7 +8663,7 @@
           <p:cNvPr id="18" name="p13-task-3">
             <a:extLst xmlns:a="http://schemas.openxmlformats.org/drawingml/2006/main">
               <a:ext uri="{FF2B5EF4-FFF2-40B4-BE49-F238E27FC236}">
-                <a16:creationId xmlns:a16="http://schemas.microsoft.com/office/drawing/2014/main" id="{DA492548-4D4F-4801-9EEF-2FA4DC1F43C7}"/>
+                <a16:creationId xmlns:a16="http://schemas.microsoft.com/office/drawing/2014/main" id="{8DDE5D61-3C32-433B-8BCB-73C16E54460D}"/>
               </a:ext>
             </a:extLst>
           </p:cNvPr>
@@ -8736,7 +8718,7 @@
           <p:cNvPr id="19" name="p13-divider">
             <a:extLst xmlns:a="http://schemas.openxmlformats.org/drawingml/2006/main">
               <a:ext uri="{FF2B5EF4-FFF2-40B4-BE49-F238E27FC236}">
-                <a16:creationId xmlns:a16="http://schemas.microsoft.com/office/drawing/2014/main" id="{DF1F7143-17CE-452C-A865-31E187B5F95E}"/>
+                <a16:creationId xmlns:a16="http://schemas.microsoft.com/office/drawing/2014/main" id="{D0669808-2768-4030-927D-1C14B8A75349}"/>
               </a:ext>
             </a:extLst>
           </p:cNvPr>
@@ -8767,7 +8749,7 @@
           <p:cNvPr id="20" name="p13-right-title">
             <a:extLst xmlns:a="http://schemas.openxmlformats.org/drawingml/2006/main">
               <a:ext uri="{FF2B5EF4-FFF2-40B4-BE49-F238E27FC236}">
-                <a16:creationId xmlns:a16="http://schemas.microsoft.com/office/drawing/2014/main" id="{E2B6B068-4AA5-4362-A32F-D4B87DEE47ED}"/>
+                <a16:creationId xmlns:a16="http://schemas.microsoft.com/office/drawing/2014/main" id="{B951F4CE-C970-4372-B938-A8CE54E7B4BA}"/>
               </a:ext>
             </a:extLst>
           </p:cNvPr>
@@ -8820,7 +8802,7 @@
           <p:cNvPr id="21" name="p13-time-0">
             <a:extLst xmlns:a="http://schemas.openxmlformats.org/drawingml/2006/main">
               <a:ext uri="{FF2B5EF4-FFF2-40B4-BE49-F238E27FC236}">
-                <a16:creationId xmlns:a16="http://schemas.microsoft.com/office/drawing/2014/main" id="{494C3BE7-2FB0-4966-B193-52C7A9F5BA65}"/>
+                <a16:creationId xmlns:a16="http://schemas.microsoft.com/office/drawing/2014/main" id="{64D5FF41-E4B1-4F2C-824D-A70C25CCF347}"/>
               </a:ext>
             </a:extLst>
           </p:cNvPr>
@@ -8877,7 +8859,7 @@
           <p:cNvPr id="22" name="p13-phase-0">
             <a:extLst xmlns:a="http://schemas.openxmlformats.org/drawingml/2006/main">
               <a:ext uri="{FF2B5EF4-FFF2-40B4-BE49-F238E27FC236}">
-                <a16:creationId xmlns:a16="http://schemas.microsoft.com/office/drawing/2014/main" id="{BB19B884-4501-4413-812B-6F0343F1DF59}"/>
+                <a16:creationId xmlns:a16="http://schemas.microsoft.com/office/drawing/2014/main" id="{428F0198-A322-4157-9C26-81EE61D4B290}"/>
               </a:ext>
             </a:extLst>
           </p:cNvPr>
@@ -8932,7 +8914,7 @@
           <p:cNvPr id="23" name="p13-time-1">
             <a:extLst xmlns:a="http://schemas.openxmlformats.org/drawingml/2006/main">
               <a:ext uri="{FF2B5EF4-FFF2-40B4-BE49-F238E27FC236}">
-                <a16:creationId xmlns:a16="http://schemas.microsoft.com/office/drawing/2014/main" id="{B9576ED3-1A90-49A3-B3AB-2A026AA24F54}"/>
+                <a16:creationId xmlns:a16="http://schemas.microsoft.com/office/drawing/2014/main" id="{82E817EC-7C65-499E-A7A1-47DB0B866067}"/>
               </a:ext>
             </a:extLst>
           </p:cNvPr>
@@ -8989,7 +8971,7 @@
           <p:cNvPr id="24" name="p13-phase-1">
             <a:extLst xmlns:a="http://schemas.openxmlformats.org/drawingml/2006/main">
               <a:ext uri="{FF2B5EF4-FFF2-40B4-BE49-F238E27FC236}">
-                <a16:creationId xmlns:a16="http://schemas.microsoft.com/office/drawing/2014/main" id="{5123BA46-7ED5-4C13-8853-B97CDA70018F}"/>
+                <a16:creationId xmlns:a16="http://schemas.microsoft.com/office/drawing/2014/main" id="{0F8F35A2-D640-4831-A432-24384B3C44DC}"/>
               </a:ext>
             </a:extLst>
           </p:cNvPr>
@@ -9044,7 +9026,7 @@
           <p:cNvPr id="25" name="p13-time-2">
             <a:extLst xmlns:a="http://schemas.openxmlformats.org/drawingml/2006/main">
               <a:ext uri="{FF2B5EF4-FFF2-40B4-BE49-F238E27FC236}">
-                <a16:creationId xmlns:a16="http://schemas.microsoft.com/office/drawing/2014/main" id="{D9D2D863-C903-472C-AC7D-99497F1A1C0E}"/>
+                <a16:creationId xmlns:a16="http://schemas.microsoft.com/office/drawing/2014/main" id="{7DAD0982-A812-44DB-BB0B-F8024563CA46}"/>
               </a:ext>
             </a:extLst>
           </p:cNvPr>
@@ -9101,7 +9083,7 @@
           <p:cNvPr id="26" name="p13-phase-2">
             <a:extLst xmlns:a="http://schemas.openxmlformats.org/drawingml/2006/main">
               <a:ext uri="{FF2B5EF4-FFF2-40B4-BE49-F238E27FC236}">
-                <a16:creationId xmlns:a16="http://schemas.microsoft.com/office/drawing/2014/main" id="{166F0AAA-7D6B-4589-8A3B-76B00AE84EFD}"/>
+                <a16:creationId xmlns:a16="http://schemas.microsoft.com/office/drawing/2014/main" id="{A00A952A-1F4D-47FB-B6D1-963480A7C031}"/>
               </a:ext>
             </a:extLst>
           </p:cNvPr>
@@ -9156,7 +9138,7 @@
           <p:cNvPr id="27" name="p13-fallback">
             <a:extLst xmlns:a="http://schemas.openxmlformats.org/drawingml/2006/main">
               <a:ext uri="{FF2B5EF4-FFF2-40B4-BE49-F238E27FC236}">
-                <a16:creationId xmlns:a16="http://schemas.microsoft.com/office/drawing/2014/main" id="{BB9E9AB4-FEAC-42E2-8E20-E934A9CFAE32}"/>
+                <a16:creationId xmlns:a16="http://schemas.microsoft.com/office/drawing/2014/main" id="{1543A59F-E4DD-47D3-B464-C2F9E4D26CAD}"/>
               </a:ext>
             </a:extLst>
           </p:cNvPr>
@@ -9270,7 +9252,7 @@
                 <a:ea typeface="Microsoft YaHei"/>
                 <a:cs typeface="Microsoft YaHei"/>
               </a:rPr>
-              <a:t>退出卡：把今天的反馈变成第 9 课的最小行动</a:t>
+              <a:t>本讲知识点总结</a:t>
             </a:r>
             <a:endParaRPr/>
           </a:p>
@@ -9306,10 +9288,869 @@
       </p:sp>
       <p:sp>
         <p:nvSpPr>
+          <p:cNvPr id="6" name="p14-sn0">
+            <a:extLst xmlns:a="http://schemas.openxmlformats.org/drawingml/2006/main">
+              <a:ext uri="{FF2B5EF4-FFF2-40B4-BE49-F238E27FC236}">
+                <a16:creationId xmlns:a16="http://schemas.microsoft.com/office/drawing/2014/main" id="{2681709B-F29B-4AD5-B72D-DB5FDE84D901}"/>
+              </a:ext>
+            </a:extLst>
+          </p:cNvPr>
+          <p:cNvSpPr>
+            <a:spLocks xmlns:a="http://schemas.openxmlformats.org/drawingml/2006/main" noGrp="1"/>
+          </p:cNvSpPr>
+          <p:nvPr/>
+        </p:nvSpPr>
+        <p:spPr>
+          <a:xfrm xmlns:a="http://schemas.openxmlformats.org/drawingml/2006/main">
+            <a:off x="495300" y="1123950"/>
+            <a:ext cx="476250" cy="476250"/>
+          </a:xfrm>
+          <a:prstGeom xmlns:a="http://schemas.openxmlformats.org/drawingml/2006/main" prst="roundRect">
+            <a:avLst>
+              <a:gd name="adj" fmla="val 16000"/>
+            </a:avLst>
+          </a:prstGeom>
+          <a:solidFill xmlns:a="http://schemas.openxmlformats.org/drawingml/2006/main">
+            <a:srgbClr val="18354E"/>
+          </a:solidFill>
+          <a:ln xmlns:a="http://schemas.openxmlformats.org/drawingml/2006/main" w="0">
+            <a:noFill/>
+            <a:prstDash val="solid"/>
+          </a:ln>
+        </p:spPr>
+        <p:txBody>
+          <a:bodyPr xmlns:a="http://schemas.openxmlformats.org/drawingml/2006/main" lIns="76200" tIns="38100" rIns="76200" bIns="38100" anchor="ctr"/>
+          <a:lstStyle xmlns:a="http://schemas.openxmlformats.org/drawingml/2006/main"/>
+          <a:p xmlns:a="http://schemas.openxmlformats.org/drawingml/2006/main">
+            <a:pPr algn="ctr">
+              <a:defRPr sz="1500" b="1">
+                <a:solidFill>
+                  <a:srgbClr val="FFFFFF"/>
+                </a:solidFill>
+              </a:defRPr>
+            </a:pPr>
+            <a:r>
+              <a:rPr sz="1500" b="1">
+                <a:solidFill>
+                  <a:srgbClr val="FFFFFF"/>
+                </a:solidFill>
+                <a:latin typeface="Arial"/>
+                <a:ea typeface="Arial"/>
+                <a:cs typeface="Arial"/>
+              </a:rPr>
+              <a:t>1</a:t>
+            </a:r>
+          </a:p>
+        </p:txBody>
+      </p:sp>
+      <p:sp>
+        <p:nvSpPr>
+          <p:cNvPr id="7" name="p14-sh0">
+            <a:extLst xmlns:a="http://schemas.openxmlformats.org/drawingml/2006/main">
+              <a:ext uri="{FF2B5EF4-FFF2-40B4-BE49-F238E27FC236}">
+                <a16:creationId xmlns:a16="http://schemas.microsoft.com/office/drawing/2014/main" id="{16758BF6-DA9A-4302-9363-F24D3FC96695}"/>
+              </a:ext>
+            </a:extLst>
+          </p:cNvPr>
+          <p:cNvSpPr>
+            <a:spLocks xmlns:a="http://schemas.openxmlformats.org/drawingml/2006/main" noGrp="1"/>
+          </p:cNvSpPr>
+          <p:nvPr/>
+        </p:nvSpPr>
+        <p:spPr>
+          <a:xfrm xmlns:a="http://schemas.openxmlformats.org/drawingml/2006/main">
+            <a:off x="1066800" y="1066800"/>
+            <a:ext cx="2047875" cy="552450"/>
+          </a:xfrm>
+          <a:prstGeom xmlns:a="http://schemas.openxmlformats.org/drawingml/2006/main" prst="roundRect">
+            <a:avLst>
+              <a:gd name="adj" fmla="val 13793"/>
+            </a:avLst>
+          </a:prstGeom>
+          <a:solidFill xmlns:a="http://schemas.openxmlformats.org/drawingml/2006/main">
+            <a:srgbClr val="E8F0F6"/>
+          </a:solidFill>
+          <a:ln xmlns:a="http://schemas.openxmlformats.org/drawingml/2006/main" w="0">
+            <a:noFill/>
+            <a:prstDash val="solid"/>
+          </a:ln>
+        </p:spPr>
+        <p:txBody>
+          <a:bodyPr xmlns:a="http://schemas.openxmlformats.org/drawingml/2006/main" lIns="76200" tIns="38100" rIns="76200" bIns="38100" anchor="ctr"/>
+          <a:lstStyle xmlns:a="http://schemas.openxmlformats.org/drawingml/2006/main"/>
+          <a:p xmlns:a="http://schemas.openxmlformats.org/drawingml/2006/main">
+            <a:pPr algn="ctr">
+              <a:defRPr sz="1650" b="1">
+                <a:solidFill>
+                  <a:srgbClr val="18354E"/>
+                </a:solidFill>
+              </a:defRPr>
+            </a:pPr>
+            <a:r>
+              <a:rPr sz="1650" b="1">
+                <a:solidFill>
+                  <a:srgbClr val="18354E"/>
+                </a:solidFill>
+                <a:latin typeface="Microsoft YaHei"/>
+                <a:ea typeface="Microsoft YaHei"/>
+                <a:cs typeface="Microsoft YaHei"/>
+              </a:rPr>
+              <a:t>方案陈述</a:t>
+            </a:r>
+          </a:p>
+        </p:txBody>
+      </p:sp>
+      <p:sp>
+        <p:nvSpPr>
+          <p:cNvPr id="8" name="p14-sd0">
+            <a:extLst xmlns:a="http://schemas.openxmlformats.org/drawingml/2006/main">
+              <a:ext uri="{FF2B5EF4-FFF2-40B4-BE49-F238E27FC236}">
+                <a16:creationId xmlns:a16="http://schemas.microsoft.com/office/drawing/2014/main" id="{190CB97D-28D9-4DBB-85FA-4CE99DAE2FAB}"/>
+              </a:ext>
+            </a:extLst>
+          </p:cNvPr>
+          <p:cNvSpPr>
+            <a:spLocks xmlns:a="http://schemas.openxmlformats.org/drawingml/2006/main" noGrp="1"/>
+          </p:cNvSpPr>
+          <p:nvPr/>
+        </p:nvSpPr>
+        <p:spPr>
+          <a:xfrm xmlns:a="http://schemas.openxmlformats.org/drawingml/2006/main">
+            <a:off x="495300" y="1952625"/>
+            <a:ext cx="2638425" cy="1524000"/>
+          </a:xfrm>
+          <a:prstGeom xmlns:a="http://schemas.openxmlformats.org/drawingml/2006/main" prst="roundRect">
+            <a:avLst>
+              <a:gd name="adj" fmla="val 5000"/>
+            </a:avLst>
+          </a:prstGeom>
+          <a:solidFill xmlns:a="http://schemas.openxmlformats.org/drawingml/2006/main">
+            <a:srgbClr val="FFFFFF"/>
+          </a:solidFill>
+          <a:ln xmlns:a="http://schemas.openxmlformats.org/drawingml/2006/main" w="9525">
+            <a:solidFill>
+              <a:srgbClr val="D6DDE2"/>
+            </a:solidFill>
+            <a:prstDash val="solid"/>
+          </a:ln>
+        </p:spPr>
+        <p:txBody>
+          <a:bodyPr xmlns:a="http://schemas.openxmlformats.org/drawingml/2006/main" lIns="76200" tIns="38100" rIns="76200" bIns="38100" anchor="ctr"/>
+          <a:lstStyle xmlns:a="http://schemas.openxmlformats.org/drawingml/2006/main"/>
+          <a:p xmlns:a="http://schemas.openxmlformats.org/drawingml/2006/main">
+            <a:pPr algn="ctr">
+              <a:lnSpc>
+                <a:spcPct val="114000"/>
+              </a:lnSpc>
+              <a:buNone/>
+              <a:defRPr sz="1425" b="1">
+                <a:solidFill>
+                  <a:srgbClr val="263746"/>
+                </a:solidFill>
+              </a:defRPr>
+            </a:pPr>
+            <a:r>
+              <a:rPr sz="1425" b="1">
+                <a:solidFill>
+                  <a:srgbClr val="263746"/>
+                </a:solidFill>
+                <a:latin typeface="Microsoft YaHei"/>
+                <a:ea typeface="Microsoft YaHei"/>
+                <a:cs typeface="Microsoft YaHei"/>
+              </a:rPr>
+              <a:t>用最小结构暴露问题、证据、机制与实验</a:t>
+            </a:r>
+          </a:p>
+        </p:txBody>
+      </p:sp>
+      <p:sp>
+        <p:nvSpPr>
+          <p:cNvPr id="9" name="p14-sn1">
+            <a:extLst xmlns:a="http://schemas.openxmlformats.org/drawingml/2006/main">
+              <a:ext uri="{FF2B5EF4-FFF2-40B4-BE49-F238E27FC236}">
+                <a16:creationId xmlns:a16="http://schemas.microsoft.com/office/drawing/2014/main" id="{2DA24031-F266-456F-B9E3-601B303EEDE1}"/>
+              </a:ext>
+            </a:extLst>
+          </p:cNvPr>
+          <p:cNvSpPr>
+            <a:spLocks xmlns:a="http://schemas.openxmlformats.org/drawingml/2006/main" noGrp="1"/>
+          </p:cNvSpPr>
+          <p:nvPr/>
+        </p:nvSpPr>
+        <p:spPr>
+          <a:xfrm xmlns:a="http://schemas.openxmlformats.org/drawingml/2006/main">
+            <a:off x="3419475" y="1123950"/>
+            <a:ext cx="476250" cy="476250"/>
+          </a:xfrm>
+          <a:prstGeom xmlns:a="http://schemas.openxmlformats.org/drawingml/2006/main" prst="roundRect">
+            <a:avLst>
+              <a:gd name="adj" fmla="val 16000"/>
+            </a:avLst>
+          </a:prstGeom>
+          <a:solidFill xmlns:a="http://schemas.openxmlformats.org/drawingml/2006/main">
+            <a:srgbClr val="2F638A"/>
+          </a:solidFill>
+          <a:ln xmlns:a="http://schemas.openxmlformats.org/drawingml/2006/main" w="0">
+            <a:noFill/>
+            <a:prstDash val="solid"/>
+          </a:ln>
+        </p:spPr>
+        <p:txBody>
+          <a:bodyPr xmlns:a="http://schemas.openxmlformats.org/drawingml/2006/main" lIns="76200" tIns="38100" rIns="76200" bIns="38100" anchor="ctr"/>
+          <a:lstStyle xmlns:a="http://schemas.openxmlformats.org/drawingml/2006/main"/>
+          <a:p xmlns:a="http://schemas.openxmlformats.org/drawingml/2006/main">
+            <a:pPr algn="ctr">
+              <a:defRPr sz="1500" b="1">
+                <a:solidFill>
+                  <a:srgbClr val="FFFFFF"/>
+                </a:solidFill>
+              </a:defRPr>
+            </a:pPr>
+            <a:r>
+              <a:rPr sz="1500" b="1">
+                <a:solidFill>
+                  <a:srgbClr val="FFFFFF"/>
+                </a:solidFill>
+                <a:latin typeface="Arial"/>
+                <a:ea typeface="Arial"/>
+                <a:cs typeface="Arial"/>
+              </a:rPr>
+              <a:t>2</a:t>
+            </a:r>
+          </a:p>
+        </p:txBody>
+      </p:sp>
+      <p:sp>
+        <p:nvSpPr>
+          <p:cNvPr id="10" name="p14-sh1">
+            <a:extLst xmlns:a="http://schemas.openxmlformats.org/drawingml/2006/main">
+              <a:ext uri="{FF2B5EF4-FFF2-40B4-BE49-F238E27FC236}">
+                <a16:creationId xmlns:a16="http://schemas.microsoft.com/office/drawing/2014/main" id="{8391D1D9-352B-4B92-93FB-2DE8F4E494B2}"/>
+              </a:ext>
+            </a:extLst>
+          </p:cNvPr>
+          <p:cNvSpPr>
+            <a:spLocks xmlns:a="http://schemas.openxmlformats.org/drawingml/2006/main" noGrp="1"/>
+          </p:cNvSpPr>
+          <p:nvPr/>
+        </p:nvSpPr>
+        <p:spPr>
+          <a:xfrm xmlns:a="http://schemas.openxmlformats.org/drawingml/2006/main">
+            <a:off x="3990975" y="1066800"/>
+            <a:ext cx="2047875" cy="552450"/>
+          </a:xfrm>
+          <a:prstGeom xmlns:a="http://schemas.openxmlformats.org/drawingml/2006/main" prst="roundRect">
+            <a:avLst>
+              <a:gd name="adj" fmla="val 13793"/>
+            </a:avLst>
+          </a:prstGeom>
+          <a:solidFill xmlns:a="http://schemas.openxmlformats.org/drawingml/2006/main">
+            <a:srgbClr val="E8F0F6"/>
+          </a:solidFill>
+          <a:ln xmlns:a="http://schemas.openxmlformats.org/drawingml/2006/main" w="0">
+            <a:noFill/>
+            <a:prstDash val="solid"/>
+          </a:ln>
+        </p:spPr>
+        <p:txBody>
+          <a:bodyPr xmlns:a="http://schemas.openxmlformats.org/drawingml/2006/main" lIns="76200" tIns="38100" rIns="76200" bIns="38100" anchor="ctr"/>
+          <a:lstStyle xmlns:a="http://schemas.openxmlformats.org/drawingml/2006/main"/>
+          <a:p xmlns:a="http://schemas.openxmlformats.org/drawingml/2006/main">
+            <a:pPr algn="ctr">
+              <a:defRPr sz="1650" b="1">
+                <a:solidFill>
+                  <a:srgbClr val="2F638A"/>
+                </a:solidFill>
+              </a:defRPr>
+            </a:pPr>
+            <a:r>
+              <a:rPr sz="1650" b="1">
+                <a:solidFill>
+                  <a:srgbClr val="2F638A"/>
+                </a:solidFill>
+                <a:latin typeface="Microsoft YaHei"/>
+                <a:ea typeface="Microsoft YaHei"/>
+                <a:cs typeface="Microsoft YaHei"/>
+              </a:rPr>
+              <a:t>同伴质询</a:t>
+            </a:r>
+          </a:p>
+        </p:txBody>
+      </p:sp>
+      <p:sp>
+        <p:nvSpPr>
+          <p:cNvPr id="11" name="p14-sd1">
+            <a:extLst xmlns:a="http://schemas.openxmlformats.org/drawingml/2006/main">
+              <a:ext uri="{FF2B5EF4-FFF2-40B4-BE49-F238E27FC236}">
+                <a16:creationId xmlns:a16="http://schemas.microsoft.com/office/drawing/2014/main" id="{3A2FC06E-4290-4A60-9CCF-38338FE8F3CB}"/>
+              </a:ext>
+            </a:extLst>
+          </p:cNvPr>
+          <p:cNvSpPr>
+            <a:spLocks xmlns:a="http://schemas.openxmlformats.org/drawingml/2006/main" noGrp="1"/>
+          </p:cNvSpPr>
+          <p:nvPr/>
+        </p:nvSpPr>
+        <p:spPr>
+          <a:xfrm xmlns:a="http://schemas.openxmlformats.org/drawingml/2006/main">
+            <a:off x="3419475" y="1952625"/>
+            <a:ext cx="2638425" cy="1524000"/>
+          </a:xfrm>
+          <a:prstGeom xmlns:a="http://schemas.openxmlformats.org/drawingml/2006/main" prst="roundRect">
+            <a:avLst>
+              <a:gd name="adj" fmla="val 5000"/>
+            </a:avLst>
+          </a:prstGeom>
+          <a:solidFill xmlns:a="http://schemas.openxmlformats.org/drawingml/2006/main">
+            <a:srgbClr val="FFFFFF"/>
+          </a:solidFill>
+          <a:ln xmlns:a="http://schemas.openxmlformats.org/drawingml/2006/main" w="9525">
+            <a:solidFill>
+              <a:srgbClr val="D6DDE2"/>
+            </a:solidFill>
+            <a:prstDash val="solid"/>
+          </a:ln>
+        </p:spPr>
+        <p:txBody>
+          <a:bodyPr xmlns:a="http://schemas.openxmlformats.org/drawingml/2006/main" lIns="76200" tIns="38100" rIns="76200" bIns="38100" anchor="ctr"/>
+          <a:lstStyle xmlns:a="http://schemas.openxmlformats.org/drawingml/2006/main"/>
+          <a:p xmlns:a="http://schemas.openxmlformats.org/drawingml/2006/main">
+            <a:pPr algn="ctr">
+              <a:lnSpc>
+                <a:spcPct val="114000"/>
+              </a:lnSpc>
+              <a:buNone/>
+              <a:defRPr sz="1425" b="1">
+                <a:solidFill>
+                  <a:srgbClr val="263746"/>
+                </a:solidFill>
+              </a:defRPr>
+            </a:pPr>
+            <a:r>
+              <a:rPr sz="1425" b="1">
+                <a:solidFill>
+                  <a:srgbClr val="263746"/>
+                </a:solidFill>
+                <a:latin typeface="Microsoft YaHei"/>
+                <a:ea typeface="Microsoft YaHei"/>
+                <a:cs typeface="Microsoft YaHei"/>
+              </a:rPr>
+              <a:t>按诊断维度提出问题，不替作者决定</a:t>
+            </a:r>
+          </a:p>
+        </p:txBody>
+      </p:sp>
+      <p:sp>
+        <p:nvSpPr>
+          <p:cNvPr id="12" name="p14-sn2">
+            <a:extLst xmlns:a="http://schemas.openxmlformats.org/drawingml/2006/main">
+              <a:ext uri="{FF2B5EF4-FFF2-40B4-BE49-F238E27FC236}">
+                <a16:creationId xmlns:a16="http://schemas.microsoft.com/office/drawing/2014/main" id="{AED42F2C-6D7F-4D8A-BFC3-676421020356}"/>
+              </a:ext>
+            </a:extLst>
+          </p:cNvPr>
+          <p:cNvSpPr>
+            <a:spLocks xmlns:a="http://schemas.openxmlformats.org/drawingml/2006/main" noGrp="1"/>
+          </p:cNvSpPr>
+          <p:nvPr/>
+        </p:nvSpPr>
+        <p:spPr>
+          <a:xfrm xmlns:a="http://schemas.openxmlformats.org/drawingml/2006/main">
+            <a:off x="6343650" y="1123950"/>
+            <a:ext cx="476250" cy="476250"/>
+          </a:xfrm>
+          <a:prstGeom xmlns:a="http://schemas.openxmlformats.org/drawingml/2006/main" prst="roundRect">
+            <a:avLst>
+              <a:gd name="adj" fmla="val 16000"/>
+            </a:avLst>
+          </a:prstGeom>
+          <a:solidFill xmlns:a="http://schemas.openxmlformats.org/drawingml/2006/main">
+            <a:srgbClr val="28745A"/>
+          </a:solidFill>
+          <a:ln xmlns:a="http://schemas.openxmlformats.org/drawingml/2006/main" w="0">
+            <a:noFill/>
+            <a:prstDash val="solid"/>
+          </a:ln>
+        </p:spPr>
+        <p:txBody>
+          <a:bodyPr xmlns:a="http://schemas.openxmlformats.org/drawingml/2006/main" lIns="76200" tIns="38100" rIns="76200" bIns="38100" anchor="ctr"/>
+          <a:lstStyle xmlns:a="http://schemas.openxmlformats.org/drawingml/2006/main"/>
+          <a:p xmlns:a="http://schemas.openxmlformats.org/drawingml/2006/main">
+            <a:pPr algn="ctr">
+              <a:defRPr sz="1500" b="1">
+                <a:solidFill>
+                  <a:srgbClr val="FFFFFF"/>
+                </a:solidFill>
+              </a:defRPr>
+            </a:pPr>
+            <a:r>
+              <a:rPr sz="1500" b="1">
+                <a:solidFill>
+                  <a:srgbClr val="FFFFFF"/>
+                </a:solidFill>
+                <a:latin typeface="Arial"/>
+                <a:ea typeface="Arial"/>
+                <a:cs typeface="Arial"/>
+              </a:rPr>
+              <a:t>3</a:t>
+            </a:r>
+          </a:p>
+        </p:txBody>
+      </p:sp>
+      <p:sp>
+        <p:nvSpPr>
+          <p:cNvPr id="13" name="p14-sh2">
+            <a:extLst xmlns:a="http://schemas.openxmlformats.org/drawingml/2006/main">
+              <a:ext uri="{FF2B5EF4-FFF2-40B4-BE49-F238E27FC236}">
+                <a16:creationId xmlns:a16="http://schemas.microsoft.com/office/drawing/2014/main" id="{133D3E4F-8303-463C-AA16-C23D6C4FB93C}"/>
+              </a:ext>
+            </a:extLst>
+          </p:cNvPr>
+          <p:cNvSpPr>
+            <a:spLocks xmlns:a="http://schemas.openxmlformats.org/drawingml/2006/main" noGrp="1"/>
+          </p:cNvSpPr>
+          <p:nvPr/>
+        </p:nvSpPr>
+        <p:spPr>
+          <a:xfrm xmlns:a="http://schemas.openxmlformats.org/drawingml/2006/main">
+            <a:off x="6915150" y="1066800"/>
+            <a:ext cx="2047875" cy="552450"/>
+          </a:xfrm>
+          <a:prstGeom xmlns:a="http://schemas.openxmlformats.org/drawingml/2006/main" prst="roundRect">
+            <a:avLst>
+              <a:gd name="adj" fmla="val 13793"/>
+            </a:avLst>
+          </a:prstGeom>
+          <a:solidFill xmlns:a="http://schemas.openxmlformats.org/drawingml/2006/main">
+            <a:srgbClr val="E7F2ED"/>
+          </a:solidFill>
+          <a:ln xmlns:a="http://schemas.openxmlformats.org/drawingml/2006/main" w="0">
+            <a:noFill/>
+            <a:prstDash val="solid"/>
+          </a:ln>
+        </p:spPr>
+        <p:txBody>
+          <a:bodyPr xmlns:a="http://schemas.openxmlformats.org/drawingml/2006/main" lIns="76200" tIns="38100" rIns="76200" bIns="38100" anchor="ctr"/>
+          <a:lstStyle xmlns:a="http://schemas.openxmlformats.org/drawingml/2006/main"/>
+          <a:p xmlns:a="http://schemas.openxmlformats.org/drawingml/2006/main">
+            <a:pPr algn="ctr">
+              <a:defRPr sz="1650" b="1">
+                <a:solidFill>
+                  <a:srgbClr val="28745A"/>
+                </a:solidFill>
+              </a:defRPr>
+            </a:pPr>
+            <a:r>
+              <a:rPr sz="1650" b="1">
+                <a:solidFill>
+                  <a:srgbClr val="28745A"/>
+                </a:solidFill>
+                <a:latin typeface="Microsoft YaHei"/>
+                <a:ea typeface="Microsoft YaHei"/>
+                <a:cs typeface="Microsoft YaHei"/>
+              </a:rPr>
+              <a:t>作者决策</a:t>
+            </a:r>
+          </a:p>
+        </p:txBody>
+      </p:sp>
+      <p:sp>
+        <p:nvSpPr>
+          <p:cNvPr id="14" name="p14-sd2">
+            <a:extLst xmlns:a="http://schemas.openxmlformats.org/drawingml/2006/main">
+              <a:ext uri="{FF2B5EF4-FFF2-40B4-BE49-F238E27FC236}">
+                <a16:creationId xmlns:a16="http://schemas.microsoft.com/office/drawing/2014/main" id="{A9E2CDE9-6917-412D-95C9-C172983A6549}"/>
+              </a:ext>
+            </a:extLst>
+          </p:cNvPr>
+          <p:cNvSpPr>
+            <a:spLocks xmlns:a="http://schemas.openxmlformats.org/drawingml/2006/main" noGrp="1"/>
+          </p:cNvSpPr>
+          <p:nvPr/>
+        </p:nvSpPr>
+        <p:spPr>
+          <a:xfrm xmlns:a="http://schemas.openxmlformats.org/drawingml/2006/main">
+            <a:off x="6343650" y="1952625"/>
+            <a:ext cx="2638425" cy="1524000"/>
+          </a:xfrm>
+          <a:prstGeom xmlns:a="http://schemas.openxmlformats.org/drawingml/2006/main" prst="roundRect">
+            <a:avLst>
+              <a:gd name="adj" fmla="val 5000"/>
+            </a:avLst>
+          </a:prstGeom>
+          <a:solidFill xmlns:a="http://schemas.openxmlformats.org/drawingml/2006/main">
+            <a:srgbClr val="FFFFFF"/>
+          </a:solidFill>
+          <a:ln xmlns:a="http://schemas.openxmlformats.org/drawingml/2006/main" w="9525">
+            <a:solidFill>
+              <a:srgbClr val="D6DDE2"/>
+            </a:solidFill>
+            <a:prstDash val="solid"/>
+          </a:ln>
+        </p:spPr>
+        <p:txBody>
+          <a:bodyPr xmlns:a="http://schemas.openxmlformats.org/drawingml/2006/main" lIns="76200" tIns="38100" rIns="76200" bIns="38100" anchor="ctr"/>
+          <a:lstStyle xmlns:a="http://schemas.openxmlformats.org/drawingml/2006/main"/>
+          <a:p xmlns:a="http://schemas.openxmlformats.org/drawingml/2006/main">
+            <a:pPr algn="ctr">
+              <a:lnSpc>
+                <a:spcPct val="114000"/>
+              </a:lnSpc>
+              <a:buNone/>
+              <a:defRPr sz="1425" b="1">
+                <a:solidFill>
+                  <a:srgbClr val="263746"/>
+                </a:solidFill>
+              </a:defRPr>
+            </a:pPr>
+            <a:r>
+              <a:rPr sz="1425" b="1">
+                <a:solidFill>
+                  <a:srgbClr val="263746"/>
+                </a:solidFill>
+                <a:latin typeface="Microsoft YaHei"/>
+                <a:ea typeface="Microsoft YaHei"/>
+                <a:cs typeface="Microsoft YaHei"/>
+              </a:rPr>
+              <a:t>逐条记录采纳、拒绝或暂缓及理由</a:t>
+            </a:r>
+          </a:p>
+        </p:txBody>
+      </p:sp>
+      <p:sp>
+        <p:nvSpPr>
+          <p:cNvPr id="15" name="p14-sn3">
+            <a:extLst xmlns:a="http://schemas.openxmlformats.org/drawingml/2006/main">
+              <a:ext uri="{FF2B5EF4-FFF2-40B4-BE49-F238E27FC236}">
+                <a16:creationId xmlns:a16="http://schemas.microsoft.com/office/drawing/2014/main" id="{F2387FE9-CBBE-4236-8DCC-71F0F63F6E6D}"/>
+              </a:ext>
+            </a:extLst>
+          </p:cNvPr>
+          <p:cNvSpPr>
+            <a:spLocks xmlns:a="http://schemas.openxmlformats.org/drawingml/2006/main" noGrp="1"/>
+          </p:cNvSpPr>
+          <p:nvPr/>
+        </p:nvSpPr>
+        <p:spPr>
+          <a:xfrm xmlns:a="http://schemas.openxmlformats.org/drawingml/2006/main">
+            <a:off x="9267825" y="1123950"/>
+            <a:ext cx="476250" cy="476250"/>
+          </a:xfrm>
+          <a:prstGeom xmlns:a="http://schemas.openxmlformats.org/drawingml/2006/main" prst="roundRect">
+            <a:avLst>
+              <a:gd name="adj" fmla="val 16000"/>
+            </a:avLst>
+          </a:prstGeom>
+          <a:solidFill xmlns:a="http://schemas.openxmlformats.org/drawingml/2006/main">
+            <a:srgbClr val="C8161E"/>
+          </a:solidFill>
+          <a:ln xmlns:a="http://schemas.openxmlformats.org/drawingml/2006/main" w="0">
+            <a:noFill/>
+            <a:prstDash val="solid"/>
+          </a:ln>
+        </p:spPr>
+        <p:txBody>
+          <a:bodyPr xmlns:a="http://schemas.openxmlformats.org/drawingml/2006/main" lIns="76200" tIns="38100" rIns="76200" bIns="38100" anchor="ctr"/>
+          <a:lstStyle xmlns:a="http://schemas.openxmlformats.org/drawingml/2006/main"/>
+          <a:p xmlns:a="http://schemas.openxmlformats.org/drawingml/2006/main">
+            <a:pPr algn="ctr">
+              <a:defRPr sz="1500" b="1">
+                <a:solidFill>
+                  <a:srgbClr val="FFFFFF"/>
+                </a:solidFill>
+              </a:defRPr>
+            </a:pPr>
+            <a:r>
+              <a:rPr sz="1500" b="1">
+                <a:solidFill>
+                  <a:srgbClr val="FFFFFF"/>
+                </a:solidFill>
+                <a:latin typeface="Arial"/>
+                <a:ea typeface="Arial"/>
+                <a:cs typeface="Arial"/>
+              </a:rPr>
+              <a:t>4</a:t>
+            </a:r>
+          </a:p>
+        </p:txBody>
+      </p:sp>
+      <p:sp>
+        <p:nvSpPr>
+          <p:cNvPr id="16" name="p14-sh3">
+            <a:extLst xmlns:a="http://schemas.openxmlformats.org/drawingml/2006/main">
+              <a:ext uri="{FF2B5EF4-FFF2-40B4-BE49-F238E27FC236}">
+                <a16:creationId xmlns:a16="http://schemas.microsoft.com/office/drawing/2014/main" id="{E76B528D-5F85-4357-BC29-7E8BD29739C3}"/>
+              </a:ext>
+            </a:extLst>
+          </p:cNvPr>
+          <p:cNvSpPr>
+            <a:spLocks xmlns:a="http://schemas.openxmlformats.org/drawingml/2006/main" noGrp="1"/>
+          </p:cNvSpPr>
+          <p:nvPr/>
+        </p:nvSpPr>
+        <p:spPr>
+          <a:xfrm xmlns:a="http://schemas.openxmlformats.org/drawingml/2006/main">
+            <a:off x="9839325" y="1066800"/>
+            <a:ext cx="2047875" cy="552450"/>
+          </a:xfrm>
+          <a:prstGeom xmlns:a="http://schemas.openxmlformats.org/drawingml/2006/main" prst="roundRect">
+            <a:avLst>
+              <a:gd name="adj" fmla="val 13793"/>
+            </a:avLst>
+          </a:prstGeom>
+          <a:solidFill xmlns:a="http://schemas.openxmlformats.org/drawingml/2006/main">
+            <a:srgbClr val="F8E9EA"/>
+          </a:solidFill>
+          <a:ln xmlns:a="http://schemas.openxmlformats.org/drawingml/2006/main" w="0">
+            <a:noFill/>
+            <a:prstDash val="solid"/>
+          </a:ln>
+        </p:spPr>
+        <p:txBody>
+          <a:bodyPr xmlns:a="http://schemas.openxmlformats.org/drawingml/2006/main" lIns="76200" tIns="38100" rIns="76200" bIns="38100" anchor="ctr"/>
+          <a:lstStyle xmlns:a="http://schemas.openxmlformats.org/drawingml/2006/main"/>
+          <a:p xmlns:a="http://schemas.openxmlformats.org/drawingml/2006/main">
+            <a:pPr algn="ctr">
+              <a:defRPr sz="1650" b="1">
+                <a:solidFill>
+                  <a:srgbClr val="C8161E"/>
+                </a:solidFill>
+              </a:defRPr>
+            </a:pPr>
+            <a:r>
+              <a:rPr sz="1650" b="1">
+                <a:solidFill>
+                  <a:srgbClr val="C8161E"/>
+                </a:solidFill>
+                <a:latin typeface="Microsoft YaHei"/>
+                <a:ea typeface="Microsoft YaHei"/>
+                <a:cs typeface="Microsoft YaHei"/>
+              </a:rPr>
+              <a:t>下一步行动</a:t>
+            </a:r>
+          </a:p>
+        </p:txBody>
+      </p:sp>
+      <p:sp>
+        <p:nvSpPr>
+          <p:cNvPr id="17" name="p14-sd3">
+            <a:extLst xmlns:a="http://schemas.openxmlformats.org/drawingml/2006/main">
+              <a:ext uri="{FF2B5EF4-FFF2-40B4-BE49-F238E27FC236}">
+                <a16:creationId xmlns:a16="http://schemas.microsoft.com/office/drawing/2014/main" id="{6A759539-53DE-4120-AE8C-F233B5577716}"/>
+              </a:ext>
+            </a:extLst>
+          </p:cNvPr>
+          <p:cNvSpPr>
+            <a:spLocks xmlns:a="http://schemas.openxmlformats.org/drawingml/2006/main" noGrp="1"/>
+          </p:cNvSpPr>
+          <p:nvPr/>
+        </p:nvSpPr>
+        <p:spPr>
+          <a:xfrm xmlns:a="http://schemas.openxmlformats.org/drawingml/2006/main">
+            <a:off x="9267825" y="1952625"/>
+            <a:ext cx="2638425" cy="1524000"/>
+          </a:xfrm>
+          <a:prstGeom xmlns:a="http://schemas.openxmlformats.org/drawingml/2006/main" prst="roundRect">
+            <a:avLst>
+              <a:gd name="adj" fmla="val 5000"/>
+            </a:avLst>
+          </a:prstGeom>
+          <a:solidFill xmlns:a="http://schemas.openxmlformats.org/drawingml/2006/main">
+            <a:srgbClr val="FFFFFF"/>
+          </a:solidFill>
+          <a:ln xmlns:a="http://schemas.openxmlformats.org/drawingml/2006/main" w="9525">
+            <a:solidFill>
+              <a:srgbClr val="D6DDE2"/>
+            </a:solidFill>
+            <a:prstDash val="solid"/>
+          </a:ln>
+        </p:spPr>
+        <p:txBody>
+          <a:bodyPr xmlns:a="http://schemas.openxmlformats.org/drawingml/2006/main" lIns="76200" tIns="38100" rIns="76200" bIns="38100" anchor="ctr"/>
+          <a:lstStyle xmlns:a="http://schemas.openxmlformats.org/drawingml/2006/main"/>
+          <a:p xmlns:a="http://schemas.openxmlformats.org/drawingml/2006/main">
+            <a:pPr algn="ctr">
+              <a:lnSpc>
+                <a:spcPct val="114000"/>
+              </a:lnSpc>
+              <a:buNone/>
+              <a:defRPr sz="1425" b="1">
+                <a:solidFill>
+                  <a:srgbClr val="263746"/>
+                </a:solidFill>
+              </a:defRPr>
+            </a:pPr>
+            <a:r>
+              <a:rPr sz="1425" b="1">
+                <a:solidFill>
+                  <a:srgbClr val="263746"/>
+                </a:solidFill>
+                <a:latin typeface="Microsoft YaHei"/>
+                <a:ea typeface="Microsoft YaHei"/>
+                <a:cs typeface="Microsoft YaHei"/>
+              </a:rPr>
+              <a:t>把反馈落到判断门工件与实验计划</a:t>
+            </a:r>
+          </a:p>
+        </p:txBody>
+      </p:sp>
+      <p:sp>
+        <p:nvSpPr>
+          <p:cNvPr id="18" name="p14-boundary">
+            <a:extLst xmlns:a="http://schemas.openxmlformats.org/drawingml/2006/main">
+              <a:ext uri="{FF2B5EF4-FFF2-40B4-BE49-F238E27FC236}">
+                <a16:creationId xmlns:a16="http://schemas.microsoft.com/office/drawing/2014/main" id="{72EBB7E1-7A7D-4BEF-9476-4E2293682739}"/>
+              </a:ext>
+            </a:extLst>
+          </p:cNvPr>
+          <p:cNvSpPr>
+            <a:spLocks xmlns:a="http://schemas.openxmlformats.org/drawingml/2006/main" noGrp="1"/>
+          </p:cNvSpPr>
+          <p:nvPr/>
+        </p:nvSpPr>
+        <p:spPr>
+          <a:xfrm xmlns:a="http://schemas.openxmlformats.org/drawingml/2006/main">
+            <a:off x="1381125" y="4238625"/>
+            <a:ext cx="9429750" cy="781050"/>
+          </a:xfrm>
+          <a:prstGeom xmlns:a="http://schemas.openxmlformats.org/drawingml/2006/main" prst="roundRect">
+            <a:avLst>
+              <a:gd name="adj" fmla="val 9756"/>
+            </a:avLst>
+          </a:prstGeom>
+          <a:solidFill xmlns:a="http://schemas.openxmlformats.org/drawingml/2006/main">
+            <a:srgbClr val="F8E9EA"/>
+          </a:solidFill>
+          <a:ln xmlns:a="http://schemas.openxmlformats.org/drawingml/2006/main" w="0">
+            <a:noFill/>
+            <a:prstDash val="solid"/>
+          </a:ln>
+        </p:spPr>
+        <p:txBody>
+          <a:bodyPr xmlns:a="http://schemas.openxmlformats.org/drawingml/2006/main" lIns="76200" tIns="38100" rIns="76200" bIns="38100" anchor="ctr"/>
+          <a:lstStyle xmlns:a="http://schemas.openxmlformats.org/drawingml/2006/main"/>
+          <a:p xmlns:a="http://schemas.openxmlformats.org/drawingml/2006/main">
+            <a:pPr algn="ctr">
+              <a:defRPr sz="1875" b="1">
+                <a:solidFill>
+                  <a:srgbClr val="C8161E"/>
+                </a:solidFill>
+              </a:defRPr>
+            </a:pPr>
+            <a:r>
+              <a:rPr sz="1875" b="1">
+                <a:solidFill>
+                  <a:srgbClr val="C8161E"/>
+                </a:solidFill>
+                <a:latin typeface="Microsoft YaHei"/>
+                <a:ea typeface="Microsoft YaHei"/>
+                <a:cs typeface="Microsoft YaHei"/>
+              </a:rPr>
+              <a:t>关键边界：反馈是诊断输入；是否采纳以及如何修改，必须由作者记录并承担。</a:t>
+            </a:r>
+          </a:p>
+        </p:txBody>
+      </p:sp>
+    </p:spTree>
+    <p:extLst>
+      <p:ext uri="{BB962C8B-B14F-4D97-AF65-F5344CB8AC3E}">
+        <p14:creationId xmlns:p14="http://schemas.microsoft.com/office/powerpoint/2010/main" val="1443728403"/>
+      </p:ext>
+    </p:extLst>
+  </p:cSld>
+</p:sld>
+</file>
+
+<file path=ppt/slides/slide15.xml><?xml version="1.0" encoding="utf-8"?>
+<p:sld xmlns:p="http://schemas.openxmlformats.org/presentationml/2006/main">
+  <p:cSld>
+    <p:spTree>
+      <p:nvGrpSpPr>
+        <p:cNvPr id="1" name=""/>
+        <p:cNvGrpSpPr/>
+        <p:nvPr/>
+      </p:nvGrpSpPr>
+      <p:grpSpPr>
+        <a:xfrm xmlns:a="http://schemas.openxmlformats.org/drawingml/2006/main"/>
+      </p:grpSpPr>
+      <p:sp>
+        <p:nvSpPr>
+          <p:cNvPr id="4" name="Text Placeholder 3">
+            <a:extLst xmlns:a="http://schemas.openxmlformats.org/drawingml/2006/main">
+              <a:ext uri="{FF2B5EF4-FFF2-40B4-BE49-F238E27FC236}">
+                <a16:creationId xmlns:a16="http://schemas.microsoft.com/office/drawing/2014/main" id="{4D941B40-7A0A-534E-3563-CA11753C8E3F}"/>
+              </a:ext>
+            </a:extLst>
+          </p:cNvPr>
+          <p:cNvSpPr>
+            <a:spLocks xmlns:a="http://schemas.openxmlformats.org/drawingml/2006/main" noGrp="1"/>
+          </p:cNvSpPr>
+          <p:nvPr>
+            <p:ph type="body" idx="14"/>
+          </p:nvPr>
+        </p:nvSpPr>
+        <p:spPr>
+          <a:xfrm xmlns:a="http://schemas.openxmlformats.org/drawingml/2006/main">
+            <a:off x="1028700" y="28575"/>
+            <a:ext cx="10668000" cy="628650"/>
+          </a:xfrm>
+        </p:spPr>
+        <p:txBody>
+          <a:bodyPr xmlns:a="http://schemas.openxmlformats.org/drawingml/2006/main" lIns="76200" tIns="0" rIns="76200" bIns="0" anchor="ctr"/>
+          <a:lstStyle xmlns:a="http://schemas.openxmlformats.org/drawingml/2006/main"/>
+          <a:p xmlns:a="http://schemas.openxmlformats.org/drawingml/2006/main">
+            <a:pPr algn="l">
+              <a:buNone/>
+            </a:pPr>
+            <a:r>
+              <a:rPr sz="2250" b="1">
+                <a:solidFill>
+                  <a:srgbClr val="FFFFFF"/>
+                </a:solidFill>
+                <a:latin typeface="Microsoft YaHei"/>
+                <a:ea typeface="Microsoft YaHei"/>
+                <a:cs typeface="Microsoft YaHei"/>
+              </a:rPr>
+              <a:t>退出卡：把今天的反馈变成第 9 课的最小行动</a:t>
+            </a:r>
+            <a:endParaRPr/>
+          </a:p>
+        </p:txBody>
+      </p:sp>
+      <p:sp>
+        <p:nvSpPr>
+          <p:cNvPr id="5" name="Slide Number Placeholder 4">
+            <a:extLst xmlns:a="http://schemas.openxmlformats.org/drawingml/2006/main">
+              <a:ext uri="{FF2B5EF4-FFF2-40B4-BE49-F238E27FC236}">
+                <a16:creationId xmlns:a16="http://schemas.microsoft.com/office/drawing/2014/main" id="{EBA5909F-738E-F60C-BE8C-B3F1D94548E5}"/>
+              </a:ext>
+            </a:extLst>
+          </p:cNvPr>
+          <p:cNvSpPr>
+            <a:spLocks xmlns:a="http://schemas.openxmlformats.org/drawingml/2006/main" noGrp="1"/>
+          </p:cNvSpPr>
+          <p:nvPr>
+            <p:ph type="sldNum" idx="10"/>
+          </p:nvPr>
+        </p:nvSpPr>
+        <p:spPr/>
+        <p:txBody>
+          <a:bodyPr xmlns:a="http://schemas.openxmlformats.org/drawingml/2006/main"/>
+          <a:lstStyle xmlns:a="http://schemas.openxmlformats.org/drawingml/2006/main"/>
+          <a:p xmlns:a="http://schemas.openxmlformats.org/drawingml/2006/main">
+            <a:fld id="{EA83FA91-883A-0168-8075-96CEB9DCA3C2}" type="slidenum">
+              <a:t>15</a:t>
+            </a:fld>
+            <a:endParaRPr/>
+          </a:p>
+        </p:txBody>
+      </p:sp>
+      <p:sp>
+        <p:nvSpPr>
           <p:cNvPr id="6" name="p14-left-title">
             <a:extLst xmlns:a="http://schemas.openxmlformats.org/drawingml/2006/main">
               <a:ext uri="{FF2B5EF4-FFF2-40B4-BE49-F238E27FC236}">
-                <a16:creationId xmlns:a16="http://schemas.microsoft.com/office/drawing/2014/main" id="{E6A76E1E-C936-4A13-9906-83B1996819FA}"/>
+                <a16:creationId xmlns:a16="http://schemas.microsoft.com/office/drawing/2014/main" id="{37F9695F-6F51-4D8C-9786-14DC2DE0BC22}"/>
               </a:ext>
             </a:extLst>
           </p:cNvPr>
@@ -9362,7 +10203,7 @@
           <p:cNvPr id="7" name="p14-n-0">
             <a:extLst xmlns:a="http://schemas.openxmlformats.org/drawingml/2006/main">
               <a:ext uri="{FF2B5EF4-FFF2-40B4-BE49-F238E27FC236}">
-                <a16:creationId xmlns:a16="http://schemas.microsoft.com/office/drawing/2014/main" id="{D3C7D301-2F60-4476-8FB9-5509014D20F4}"/>
+                <a16:creationId xmlns:a16="http://schemas.microsoft.com/office/drawing/2014/main" id="{A0F6580B-C8F7-417B-B83E-021A4C9C869D}"/>
               </a:ext>
             </a:extLst>
           </p:cNvPr>
@@ -9419,7 +10260,7 @@
           <p:cNvPr id="8" name="p14-q-0">
             <a:extLst xmlns:a="http://schemas.openxmlformats.org/drawingml/2006/main">
               <a:ext uri="{FF2B5EF4-FFF2-40B4-BE49-F238E27FC236}">
-                <a16:creationId xmlns:a16="http://schemas.microsoft.com/office/drawing/2014/main" id="{12FFBD33-05A7-48E0-B755-8453A0310C32}"/>
+                <a16:creationId xmlns:a16="http://schemas.microsoft.com/office/drawing/2014/main" id="{2151F102-E9E3-427A-993F-B7DAEFCF0B75}"/>
               </a:ext>
             </a:extLst>
           </p:cNvPr>
@@ -9474,7 +10315,7 @@
           <p:cNvPr id="9" name="p14-n-1">
             <a:extLst xmlns:a="http://schemas.openxmlformats.org/drawingml/2006/main">
               <a:ext uri="{FF2B5EF4-FFF2-40B4-BE49-F238E27FC236}">
-                <a16:creationId xmlns:a16="http://schemas.microsoft.com/office/drawing/2014/main" id="{BC0C8410-5232-42BB-8423-BF4BDFD035FB}"/>
+                <a16:creationId xmlns:a16="http://schemas.microsoft.com/office/drawing/2014/main" id="{877210D7-973D-404E-BE54-11E0F6CB81D7}"/>
               </a:ext>
             </a:extLst>
           </p:cNvPr>
@@ -9531,7 +10372,7 @@
           <p:cNvPr id="10" name="p14-q-1">
             <a:extLst xmlns:a="http://schemas.openxmlformats.org/drawingml/2006/main">
               <a:ext uri="{FF2B5EF4-FFF2-40B4-BE49-F238E27FC236}">
-                <a16:creationId xmlns:a16="http://schemas.microsoft.com/office/drawing/2014/main" id="{432C1F65-77A4-4D85-8E05-6E74CCB957D8}"/>
+                <a16:creationId xmlns:a16="http://schemas.microsoft.com/office/drawing/2014/main" id="{BE79FBD3-BBA7-46F3-B7F0-29F31C937AE3}"/>
               </a:ext>
             </a:extLst>
           </p:cNvPr>
@@ -9586,7 +10427,7 @@
           <p:cNvPr id="11" name="p14-n-2">
             <a:extLst xmlns:a="http://schemas.openxmlformats.org/drawingml/2006/main">
               <a:ext uri="{FF2B5EF4-FFF2-40B4-BE49-F238E27FC236}">
-                <a16:creationId xmlns:a16="http://schemas.microsoft.com/office/drawing/2014/main" id="{9CD6B26C-5819-462E-990D-7CDCAAC08A00}"/>
+                <a16:creationId xmlns:a16="http://schemas.microsoft.com/office/drawing/2014/main" id="{8D0654CD-FC66-47FA-A324-038FF47504D4}"/>
               </a:ext>
             </a:extLst>
           </p:cNvPr>
@@ -9643,7 +10484,7 @@
           <p:cNvPr id="12" name="p14-q-2">
             <a:extLst xmlns:a="http://schemas.openxmlformats.org/drawingml/2006/main">
               <a:ext uri="{FF2B5EF4-FFF2-40B4-BE49-F238E27FC236}">
-                <a16:creationId xmlns:a16="http://schemas.microsoft.com/office/drawing/2014/main" id="{1C2E3B14-9993-425A-9901-691F83AD8A22}"/>
+                <a16:creationId xmlns:a16="http://schemas.microsoft.com/office/drawing/2014/main" id="{97DCB07A-29C2-468D-9F65-9249F992179A}"/>
               </a:ext>
             </a:extLst>
           </p:cNvPr>
@@ -9698,7 +10539,7 @@
           <p:cNvPr id="13" name="p14-n-3">
             <a:extLst xmlns:a="http://schemas.openxmlformats.org/drawingml/2006/main">
               <a:ext uri="{FF2B5EF4-FFF2-40B4-BE49-F238E27FC236}">
-                <a16:creationId xmlns:a16="http://schemas.microsoft.com/office/drawing/2014/main" id="{F28FF736-BC67-47C7-87B7-2B280A89D615}"/>
+                <a16:creationId xmlns:a16="http://schemas.microsoft.com/office/drawing/2014/main" id="{A4F9390E-E4D3-46F4-B1D7-42439F42A287}"/>
               </a:ext>
             </a:extLst>
           </p:cNvPr>
@@ -9755,7 +10596,7 @@
           <p:cNvPr id="14" name="p14-q-3">
             <a:extLst xmlns:a="http://schemas.openxmlformats.org/drawingml/2006/main">
               <a:ext uri="{FF2B5EF4-FFF2-40B4-BE49-F238E27FC236}">
-                <a16:creationId xmlns:a16="http://schemas.microsoft.com/office/drawing/2014/main" id="{B26953A7-7998-43E4-A2F6-557266B1E106}"/>
+                <a16:creationId xmlns:a16="http://schemas.microsoft.com/office/drawing/2014/main" id="{661300E8-D192-4FEE-A08A-983D11F4C2A6}"/>
               </a:ext>
             </a:extLst>
           </p:cNvPr>
@@ -9810,7 +10651,7 @@
           <p:cNvPr id="15" name="p14-divider">
             <a:extLst xmlns:a="http://schemas.openxmlformats.org/drawingml/2006/main">
               <a:ext uri="{FF2B5EF4-FFF2-40B4-BE49-F238E27FC236}">
-                <a16:creationId xmlns:a16="http://schemas.microsoft.com/office/drawing/2014/main" id="{A210C7B1-7A50-4EC5-8E59-95BAEC47D9A9}"/>
+                <a16:creationId xmlns:a16="http://schemas.microsoft.com/office/drawing/2014/main" id="{66216F34-AC9C-4D4F-AB1A-59E21E5ED8E1}"/>
               </a:ext>
             </a:extLst>
           </p:cNvPr>
@@ -9841,7 +10682,7 @@
           <p:cNvPr id="16" name="p14-right-title">
             <a:extLst xmlns:a="http://schemas.openxmlformats.org/drawingml/2006/main">
               <a:ext uri="{FF2B5EF4-FFF2-40B4-BE49-F238E27FC236}">
-                <a16:creationId xmlns:a16="http://schemas.microsoft.com/office/drawing/2014/main" id="{3CEF255F-B85E-42CB-ACF6-25F1A2603B9D}"/>
+                <a16:creationId xmlns:a16="http://schemas.microsoft.com/office/drawing/2014/main" id="{72F9338C-0F70-4001-B59E-C17A5A2DA587}"/>
               </a:ext>
             </a:extLst>
           </p:cNvPr>
@@ -9894,7 +10735,7 @@
           <p:cNvPr id="17" name="p14-next-label-0">
             <a:extLst xmlns:a="http://schemas.openxmlformats.org/drawingml/2006/main">
               <a:ext uri="{FF2B5EF4-FFF2-40B4-BE49-F238E27FC236}">
-                <a16:creationId xmlns:a16="http://schemas.microsoft.com/office/drawing/2014/main" id="{13560647-539F-440C-AC6F-6E8250CCCCCC}"/>
+                <a16:creationId xmlns:a16="http://schemas.microsoft.com/office/drawing/2014/main" id="{08532895-9B83-416C-B1DC-D7AF0787BDE6}"/>
               </a:ext>
             </a:extLst>
           </p:cNvPr>
@@ -9951,7 +10792,7 @@
           <p:cNvPr id="18" name="p14-next-detail-0">
             <a:extLst xmlns:a="http://schemas.openxmlformats.org/drawingml/2006/main">
               <a:ext uri="{FF2B5EF4-FFF2-40B4-BE49-F238E27FC236}">
-                <a16:creationId xmlns:a16="http://schemas.microsoft.com/office/drawing/2014/main" id="{26D36770-F18E-4F43-BFE3-7DDE761F17A0}"/>
+                <a16:creationId xmlns:a16="http://schemas.microsoft.com/office/drawing/2014/main" id="{2272AE47-B915-4F42-9D6C-89D5E00616AF}"/>
               </a:ext>
             </a:extLst>
           </p:cNvPr>
@@ -10006,7 +10847,7 @@
           <p:cNvPr id="19" name="p14-next-label-1">
             <a:extLst xmlns:a="http://schemas.openxmlformats.org/drawingml/2006/main">
               <a:ext uri="{FF2B5EF4-FFF2-40B4-BE49-F238E27FC236}">
-                <a16:creationId xmlns:a16="http://schemas.microsoft.com/office/drawing/2014/main" id="{5E9074A9-1892-4970-B401-E484DE6FC8F8}"/>
+                <a16:creationId xmlns:a16="http://schemas.microsoft.com/office/drawing/2014/main" id="{A624A153-B576-4C0D-A8D2-F1FF34650F2C}"/>
               </a:ext>
             </a:extLst>
           </p:cNvPr>
@@ -10063,7 +10904,7 @@
           <p:cNvPr id="20" name="p14-next-detail-1">
             <a:extLst xmlns:a="http://schemas.openxmlformats.org/drawingml/2006/main">
               <a:ext uri="{FF2B5EF4-FFF2-40B4-BE49-F238E27FC236}">
-                <a16:creationId xmlns:a16="http://schemas.microsoft.com/office/drawing/2014/main" id="{E4F076B3-0F1B-4DC6-9227-D411F385ED43}"/>
+                <a16:creationId xmlns:a16="http://schemas.microsoft.com/office/drawing/2014/main" id="{06725A8E-3338-40B3-866A-D5BFD4F43BC7}"/>
               </a:ext>
             </a:extLst>
           </p:cNvPr>
@@ -10118,7 +10959,7 @@
           <p:cNvPr id="21" name="p14-next-label-2">
             <a:extLst xmlns:a="http://schemas.openxmlformats.org/drawingml/2006/main">
               <a:ext uri="{FF2B5EF4-FFF2-40B4-BE49-F238E27FC236}">
-                <a16:creationId xmlns:a16="http://schemas.microsoft.com/office/drawing/2014/main" id="{8F93CD68-0716-4C7D-ABF9-ECC73A8B1C64}"/>
+                <a16:creationId xmlns:a16="http://schemas.microsoft.com/office/drawing/2014/main" id="{D75EF928-4432-4AF2-ABCC-E074B7F5E0A0}"/>
               </a:ext>
             </a:extLst>
           </p:cNvPr>
@@ -10175,7 +11016,7 @@
           <p:cNvPr id="22" name="p14-next-detail-2">
             <a:extLst xmlns:a="http://schemas.openxmlformats.org/drawingml/2006/main">
               <a:ext uri="{FF2B5EF4-FFF2-40B4-BE49-F238E27FC236}">
-                <a16:creationId xmlns:a16="http://schemas.microsoft.com/office/drawing/2014/main" id="{D8960E9B-BFC4-4103-80E9-AA213E5844FC}"/>
+                <a16:creationId xmlns:a16="http://schemas.microsoft.com/office/drawing/2014/main" id="{57068F19-A9B7-4B25-8882-DF7286B4B381}"/>
               </a:ext>
             </a:extLst>
           </p:cNvPr>
@@ -10230,7 +11071,7 @@
           <p:cNvPr id="23" name="p14-next-label-3">
             <a:extLst xmlns:a="http://schemas.openxmlformats.org/drawingml/2006/main">
               <a:ext uri="{FF2B5EF4-FFF2-40B4-BE49-F238E27FC236}">
-                <a16:creationId xmlns:a16="http://schemas.microsoft.com/office/drawing/2014/main" id="{1BA4D93C-54D2-431A-B22A-C18EEC12A13F}"/>
+                <a16:creationId xmlns:a16="http://schemas.microsoft.com/office/drawing/2014/main" id="{F67BDF66-C670-441A-81A4-97F3DBD0A794}"/>
               </a:ext>
             </a:extLst>
           </p:cNvPr>
@@ -10287,7 +11128,7 @@
           <p:cNvPr id="24" name="p14-next-detail-3">
             <a:extLst xmlns:a="http://schemas.openxmlformats.org/drawingml/2006/main">
               <a:ext uri="{FF2B5EF4-FFF2-40B4-BE49-F238E27FC236}">
-                <a16:creationId xmlns:a16="http://schemas.microsoft.com/office/drawing/2014/main" id="{2D631101-549B-467F-AD86-CFDD774C442F}"/>
+                <a16:creationId xmlns:a16="http://schemas.microsoft.com/office/drawing/2014/main" id="{AB4E5961-5CF8-4662-AA69-FDC296176FB8}"/>
               </a:ext>
             </a:extLst>
           </p:cNvPr>
@@ -10342,7 +11183,7 @@
           <p:cNvPr id="25" name="p14-bottom">
             <a:extLst xmlns:a="http://schemas.openxmlformats.org/drawingml/2006/main">
               <a:ext uri="{FF2B5EF4-FFF2-40B4-BE49-F238E27FC236}">
-                <a16:creationId xmlns:a16="http://schemas.microsoft.com/office/drawing/2014/main" id="{F6971FE7-E1A6-4C37-B95E-3F7CD8D2F39D}"/>
+                <a16:creationId xmlns:a16="http://schemas.microsoft.com/office/drawing/2014/main" id="{25BE1D6B-2EED-4A42-9E40-64B4539C930E}"/>
               </a:ext>
             </a:extLst>
           </p:cNvPr>
@@ -10489,7 +11330,7 @@
           <p:cNvPr id="6" name="p02-left-title">
             <a:extLst xmlns:a="http://schemas.openxmlformats.org/drawingml/2006/main">
               <a:ext uri="{FF2B5EF4-FFF2-40B4-BE49-F238E27FC236}">
-                <a16:creationId xmlns:a16="http://schemas.microsoft.com/office/drawing/2014/main" id="{FB070E25-D17E-41D5-A977-2FCE50037D6C}"/>
+                <a16:creationId xmlns:a16="http://schemas.microsoft.com/office/drawing/2014/main" id="{C9D1472D-4A43-431E-B8CF-756AFCB77AF2}"/>
               </a:ext>
             </a:extLst>
           </p:cNvPr>
@@ -10542,7 +11383,7 @@
           <p:cNvPr id="7" name="p02-left-0">
             <a:extLst xmlns:a="http://schemas.openxmlformats.org/drawingml/2006/main">
               <a:ext uri="{FF2B5EF4-FFF2-40B4-BE49-F238E27FC236}">
-                <a16:creationId xmlns:a16="http://schemas.microsoft.com/office/drawing/2014/main" id="{CEBB491D-0DDD-40D8-8266-1096D10CF651}"/>
+                <a16:creationId xmlns:a16="http://schemas.microsoft.com/office/drawing/2014/main" id="{09013062-2FF7-4F83-A92A-A56298685E6B}"/>
               </a:ext>
             </a:extLst>
           </p:cNvPr>
@@ -10627,7 +11468,7 @@
           <p:cNvPr id="8" name="p02-left-1">
             <a:extLst xmlns:a="http://schemas.openxmlformats.org/drawingml/2006/main">
               <a:ext uri="{FF2B5EF4-FFF2-40B4-BE49-F238E27FC236}">
-                <a16:creationId xmlns:a16="http://schemas.microsoft.com/office/drawing/2014/main" id="{1C4C1EED-0A87-4E41-8800-EA8DC3A8FBB2}"/>
+                <a16:creationId xmlns:a16="http://schemas.microsoft.com/office/drawing/2014/main" id="{791D0AA0-6FFF-47E6-9714-AE7F518423C7}"/>
               </a:ext>
             </a:extLst>
           </p:cNvPr>
@@ -10712,7 +11553,7 @@
           <p:cNvPr id="9" name="p02-left-2">
             <a:extLst xmlns:a="http://schemas.openxmlformats.org/drawingml/2006/main">
               <a:ext uri="{FF2B5EF4-FFF2-40B4-BE49-F238E27FC236}">
-                <a16:creationId xmlns:a16="http://schemas.microsoft.com/office/drawing/2014/main" id="{24EA5068-1C10-46A7-9917-F2E777665565}"/>
+                <a16:creationId xmlns:a16="http://schemas.microsoft.com/office/drawing/2014/main" id="{F48177FE-A349-4B44-A420-0F1734BAFE47}"/>
               </a:ext>
             </a:extLst>
           </p:cNvPr>
@@ -10797,7 +11638,7 @@
           <p:cNvPr id="10" name="p02-separator">
             <a:extLst xmlns:a="http://schemas.openxmlformats.org/drawingml/2006/main">
               <a:ext uri="{FF2B5EF4-FFF2-40B4-BE49-F238E27FC236}">
-                <a16:creationId xmlns:a16="http://schemas.microsoft.com/office/drawing/2014/main" id="{F7E9E459-E912-4340-9051-6B1D2874BC9F}"/>
+                <a16:creationId xmlns:a16="http://schemas.microsoft.com/office/drawing/2014/main" id="{00473310-424D-474B-B179-E28409505219}"/>
               </a:ext>
             </a:extLst>
           </p:cNvPr>
@@ -10828,7 +11669,7 @@
           <p:cNvPr id="11" name="p02-ne">
             <a:extLst xmlns:a="http://schemas.openxmlformats.org/drawingml/2006/main">
               <a:ext uri="{FF2B5EF4-FFF2-40B4-BE49-F238E27FC236}">
-                <a16:creationId xmlns:a16="http://schemas.microsoft.com/office/drawing/2014/main" id="{E3154551-0300-4A1F-95C9-F4DEE077E876}"/>
+                <a16:creationId xmlns:a16="http://schemas.microsoft.com/office/drawing/2014/main" id="{6FCC8F30-8F35-452E-9F81-5744F363D8A4}"/>
               </a:ext>
             </a:extLst>
           </p:cNvPr>
@@ -10881,7 +11722,7 @@
           <p:cNvPr id="12" name="p02-right-title">
             <a:extLst xmlns:a="http://schemas.openxmlformats.org/drawingml/2006/main">
               <a:ext uri="{FF2B5EF4-FFF2-40B4-BE49-F238E27FC236}">
-                <a16:creationId xmlns:a16="http://schemas.microsoft.com/office/drawing/2014/main" id="{4E486997-DDCC-4730-AA3A-14917207DE06}"/>
+                <a16:creationId xmlns:a16="http://schemas.microsoft.com/office/drawing/2014/main" id="{1191D9D9-966B-48B0-B075-F36996CAFFFC}"/>
               </a:ext>
             </a:extLst>
           </p:cNvPr>
@@ -10934,7 +11775,7 @@
           <p:cNvPr id="13" name="p02-right-0">
             <a:extLst xmlns:a="http://schemas.openxmlformats.org/drawingml/2006/main">
               <a:ext uri="{FF2B5EF4-FFF2-40B4-BE49-F238E27FC236}">
-                <a16:creationId xmlns:a16="http://schemas.microsoft.com/office/drawing/2014/main" id="{45C027F7-51E6-4B91-B91F-C39D4DE0F960}"/>
+                <a16:creationId xmlns:a16="http://schemas.microsoft.com/office/drawing/2014/main" id="{BF386A89-421C-47FD-B583-AA515997A8A8}"/>
               </a:ext>
             </a:extLst>
           </p:cNvPr>
@@ -11019,7 +11860,7 @@
           <p:cNvPr id="14" name="p02-right-1">
             <a:extLst xmlns:a="http://schemas.openxmlformats.org/drawingml/2006/main">
               <a:ext uri="{FF2B5EF4-FFF2-40B4-BE49-F238E27FC236}">
-                <a16:creationId xmlns:a16="http://schemas.microsoft.com/office/drawing/2014/main" id="{FA0654CD-7626-4F3C-AD63-083299F975D6}"/>
+                <a16:creationId xmlns:a16="http://schemas.microsoft.com/office/drawing/2014/main" id="{B3137B3B-C1D6-472D-A1AD-E6239F02AC25}"/>
               </a:ext>
             </a:extLst>
           </p:cNvPr>
@@ -11104,7 +11945,7 @@
           <p:cNvPr id="15" name="p02-right-2">
             <a:extLst xmlns:a="http://schemas.openxmlformats.org/drawingml/2006/main">
               <a:ext uri="{FF2B5EF4-FFF2-40B4-BE49-F238E27FC236}">
-                <a16:creationId xmlns:a16="http://schemas.microsoft.com/office/drawing/2014/main" id="{B5118396-53F0-4D6A-9717-EBC37ACDE73F}"/>
+                <a16:creationId xmlns:a16="http://schemas.microsoft.com/office/drawing/2014/main" id="{9DA6516B-6989-4EED-8D3E-CE80C9A27B0E}"/>
               </a:ext>
             </a:extLst>
           </p:cNvPr>
@@ -11189,7 +12030,7 @@
           <p:cNvPr id="16" name="p02-bottom">
             <a:extLst xmlns:a="http://schemas.openxmlformats.org/drawingml/2006/main">
               <a:ext uri="{FF2B5EF4-FFF2-40B4-BE49-F238E27FC236}">
-                <a16:creationId xmlns:a16="http://schemas.microsoft.com/office/drawing/2014/main" id="{0446E276-CF31-473B-97A8-8CEA96445FE5}"/>
+                <a16:creationId xmlns:a16="http://schemas.microsoft.com/office/drawing/2014/main" id="{7F89EB5E-BAEA-4037-9FC6-8AE821BABF06}"/>
               </a:ext>
             </a:extLst>
           </p:cNvPr>
@@ -11336,7 +12177,7 @@
           <p:cNvPr id="6" name="p03-link-0">
             <a:extLst xmlns:a="http://schemas.openxmlformats.org/drawingml/2006/main">
               <a:ext uri="{FF2B5EF4-FFF2-40B4-BE49-F238E27FC236}">
-                <a16:creationId xmlns:a16="http://schemas.microsoft.com/office/drawing/2014/main" id="{651EF755-7DE7-4116-8511-4422211ABAD0}"/>
+                <a16:creationId xmlns:a16="http://schemas.microsoft.com/office/drawing/2014/main" id="{24380694-D0BB-44A9-BCD1-F0FFB502513D}"/>
               </a:ext>
             </a:extLst>
           </p:cNvPr>
@@ -11367,7 +12208,7 @@
           <p:cNvPr id="7" name="p03-link-1">
             <a:extLst xmlns:a="http://schemas.openxmlformats.org/drawingml/2006/main">
               <a:ext uri="{FF2B5EF4-FFF2-40B4-BE49-F238E27FC236}">
-                <a16:creationId xmlns:a16="http://schemas.microsoft.com/office/drawing/2014/main" id="{0807AF16-B910-42F1-9E32-95F4FDA8A0DE}"/>
+                <a16:creationId xmlns:a16="http://schemas.microsoft.com/office/drawing/2014/main" id="{FE942E37-D0EE-4642-B51D-5C75AB00B636}"/>
               </a:ext>
             </a:extLst>
           </p:cNvPr>
@@ -11398,7 +12239,7 @@
           <p:cNvPr id="8" name="p03-link-2">
             <a:extLst xmlns:a="http://schemas.openxmlformats.org/drawingml/2006/main">
               <a:ext uri="{FF2B5EF4-FFF2-40B4-BE49-F238E27FC236}">
-                <a16:creationId xmlns:a16="http://schemas.microsoft.com/office/drawing/2014/main" id="{55775009-A0C9-4308-8832-5799AC26A8A6}"/>
+                <a16:creationId xmlns:a16="http://schemas.microsoft.com/office/drawing/2014/main" id="{7AB55521-1607-4F01-9991-4AA8C98528ED}"/>
               </a:ext>
             </a:extLst>
           </p:cNvPr>
@@ -11429,7 +12270,7 @@
           <p:cNvPr id="9" name="p03-n-0">
             <a:extLst xmlns:a="http://schemas.openxmlformats.org/drawingml/2006/main">
               <a:ext uri="{FF2B5EF4-FFF2-40B4-BE49-F238E27FC236}">
-                <a16:creationId xmlns:a16="http://schemas.microsoft.com/office/drawing/2014/main" id="{74295398-71F4-4DA7-AE7B-B48CE800D08C}"/>
+                <a16:creationId xmlns:a16="http://schemas.microsoft.com/office/drawing/2014/main" id="{D56AB06A-60A1-4F2E-903C-B675B5D29F66}"/>
               </a:ext>
             </a:extLst>
           </p:cNvPr>
@@ -11486,7 +12327,7 @@
           <p:cNvPr id="10" name="p03-chain-0">
             <a:extLst xmlns:a="http://schemas.openxmlformats.org/drawingml/2006/main">
               <a:ext uri="{FF2B5EF4-FFF2-40B4-BE49-F238E27FC236}">
-                <a16:creationId xmlns:a16="http://schemas.microsoft.com/office/drawing/2014/main" id="{96BA0947-0E49-4808-AF9F-C89E230B4BF4}"/>
+                <a16:creationId xmlns:a16="http://schemas.microsoft.com/office/drawing/2014/main" id="{A4C6E893-86A8-4FA9-8427-4415770C820D}"/>
               </a:ext>
             </a:extLst>
           </p:cNvPr>
@@ -11547,7 +12388,7 @@
           <p:cNvPr id="11" name="p03-n-1">
             <a:extLst xmlns:a="http://schemas.openxmlformats.org/drawingml/2006/main">
               <a:ext uri="{FF2B5EF4-FFF2-40B4-BE49-F238E27FC236}">
-                <a16:creationId xmlns:a16="http://schemas.microsoft.com/office/drawing/2014/main" id="{E2009BE8-989A-4D6B-9A9B-F2EBD3E9192C}"/>
+                <a16:creationId xmlns:a16="http://schemas.microsoft.com/office/drawing/2014/main" id="{08095D34-F7B9-4FD6-8336-9F95E850DCAE}"/>
               </a:ext>
             </a:extLst>
           </p:cNvPr>
@@ -11604,7 +12445,7 @@
           <p:cNvPr id="12" name="p03-chain-1">
             <a:extLst xmlns:a="http://schemas.openxmlformats.org/drawingml/2006/main">
               <a:ext uri="{FF2B5EF4-FFF2-40B4-BE49-F238E27FC236}">
-                <a16:creationId xmlns:a16="http://schemas.microsoft.com/office/drawing/2014/main" id="{641442AB-E137-419A-BA50-5D1D40893F71}"/>
+                <a16:creationId xmlns:a16="http://schemas.microsoft.com/office/drawing/2014/main" id="{F442FB10-3F6A-4A92-A49E-7991FC0354AD}"/>
               </a:ext>
             </a:extLst>
           </p:cNvPr>
@@ -11665,7 +12506,7 @@
           <p:cNvPr id="13" name="p03-n-2">
             <a:extLst xmlns:a="http://schemas.openxmlformats.org/drawingml/2006/main">
               <a:ext uri="{FF2B5EF4-FFF2-40B4-BE49-F238E27FC236}">
-                <a16:creationId xmlns:a16="http://schemas.microsoft.com/office/drawing/2014/main" id="{96E1F713-9527-40AC-AFB5-96145610F516}"/>
+                <a16:creationId xmlns:a16="http://schemas.microsoft.com/office/drawing/2014/main" id="{2B36BA93-BE61-4F7A-BD5D-9337CD2475B8}"/>
               </a:ext>
             </a:extLst>
           </p:cNvPr>
@@ -11722,7 +12563,7 @@
           <p:cNvPr id="14" name="p03-chain-2">
             <a:extLst xmlns:a="http://schemas.openxmlformats.org/drawingml/2006/main">
               <a:ext uri="{FF2B5EF4-FFF2-40B4-BE49-F238E27FC236}">
-                <a16:creationId xmlns:a16="http://schemas.microsoft.com/office/drawing/2014/main" id="{163728A0-E340-42AF-8741-298C4595251A}"/>
+                <a16:creationId xmlns:a16="http://schemas.microsoft.com/office/drawing/2014/main" id="{9654433B-6FB9-4C6A-96A8-3BE0F8641540}"/>
               </a:ext>
             </a:extLst>
           </p:cNvPr>
@@ -11783,7 +12624,7 @@
           <p:cNvPr id="15" name="p03-n-3">
             <a:extLst xmlns:a="http://schemas.openxmlformats.org/drawingml/2006/main">
               <a:ext uri="{FF2B5EF4-FFF2-40B4-BE49-F238E27FC236}">
-                <a16:creationId xmlns:a16="http://schemas.microsoft.com/office/drawing/2014/main" id="{C5B5E15E-710B-4E67-A789-CC8803BD685B}"/>
+                <a16:creationId xmlns:a16="http://schemas.microsoft.com/office/drawing/2014/main" id="{8656FFB7-D215-49BD-B1CC-B103F66B66D4}"/>
               </a:ext>
             </a:extLst>
           </p:cNvPr>
@@ -11840,7 +12681,7 @@
           <p:cNvPr id="16" name="p03-chain-3">
             <a:extLst xmlns:a="http://schemas.openxmlformats.org/drawingml/2006/main">
               <a:ext uri="{FF2B5EF4-FFF2-40B4-BE49-F238E27FC236}">
-                <a16:creationId xmlns:a16="http://schemas.microsoft.com/office/drawing/2014/main" id="{FD8FFCB0-4FB7-449E-94E9-1E0FD2E5AC22}"/>
+                <a16:creationId xmlns:a16="http://schemas.microsoft.com/office/drawing/2014/main" id="{07A2C90F-8C5A-4B50-AD4F-2EDB6C5E470E}"/>
               </a:ext>
             </a:extLst>
           </p:cNvPr>
@@ -11901,7 +12742,7 @@
           <p:cNvPr id="17" name="p03-output-title">
             <a:extLst xmlns:a="http://schemas.openxmlformats.org/drawingml/2006/main">
               <a:ext uri="{FF2B5EF4-FFF2-40B4-BE49-F238E27FC236}">
-                <a16:creationId xmlns:a16="http://schemas.microsoft.com/office/drawing/2014/main" id="{C5B1024D-F6C0-4D4D-B644-90581E350D8D}"/>
+                <a16:creationId xmlns:a16="http://schemas.microsoft.com/office/drawing/2014/main" id="{E9255B38-E1EC-4A06-A38A-649AF31B51A5}"/>
               </a:ext>
             </a:extLst>
           </p:cNvPr>
@@ -11954,7 +12795,7 @@
           <p:cNvPr id="18" name="p03-out-label-0">
             <a:extLst xmlns:a="http://schemas.openxmlformats.org/drawingml/2006/main">
               <a:ext uri="{FF2B5EF4-FFF2-40B4-BE49-F238E27FC236}">
-                <a16:creationId xmlns:a16="http://schemas.microsoft.com/office/drawing/2014/main" id="{C3247617-A5AA-4496-A94A-CDE9325C57F1}"/>
+                <a16:creationId xmlns:a16="http://schemas.microsoft.com/office/drawing/2014/main" id="{EDEB564C-8817-4834-B478-507D61390C5D}"/>
               </a:ext>
             </a:extLst>
           </p:cNvPr>
@@ -12009,7 +12850,7 @@
           <p:cNvPr id="19" name="p03-out-detail-0">
             <a:extLst xmlns:a="http://schemas.openxmlformats.org/drawingml/2006/main">
               <a:ext uri="{FF2B5EF4-FFF2-40B4-BE49-F238E27FC236}">
-                <a16:creationId xmlns:a16="http://schemas.microsoft.com/office/drawing/2014/main" id="{BB37BE63-F7B9-4EF1-A353-A3D65BCF8837}"/>
+                <a16:creationId xmlns:a16="http://schemas.microsoft.com/office/drawing/2014/main" id="{003839A6-3C8C-41C1-8EBF-77942C79D369}"/>
               </a:ext>
             </a:extLst>
           </p:cNvPr>
@@ -12068,7 +12909,7 @@
           <p:cNvPr id="20" name="p03-out-label-1">
             <a:extLst xmlns:a="http://schemas.openxmlformats.org/drawingml/2006/main">
               <a:ext uri="{FF2B5EF4-FFF2-40B4-BE49-F238E27FC236}">
-                <a16:creationId xmlns:a16="http://schemas.microsoft.com/office/drawing/2014/main" id="{C32F9EB4-B0A8-4B4D-9D11-BC9A2DFC9243}"/>
+                <a16:creationId xmlns:a16="http://schemas.microsoft.com/office/drawing/2014/main" id="{F92C2AB7-DBC8-49C2-B632-26260419CAD1}"/>
               </a:ext>
             </a:extLst>
           </p:cNvPr>
@@ -12123,7 +12964,7 @@
           <p:cNvPr id="21" name="p03-out-detail-1">
             <a:extLst xmlns:a="http://schemas.openxmlformats.org/drawingml/2006/main">
               <a:ext uri="{FF2B5EF4-FFF2-40B4-BE49-F238E27FC236}">
-                <a16:creationId xmlns:a16="http://schemas.microsoft.com/office/drawing/2014/main" id="{AAE87C8B-121C-4D04-995A-B71B2E85D6CE}"/>
+                <a16:creationId xmlns:a16="http://schemas.microsoft.com/office/drawing/2014/main" id="{9A2A621E-60CE-4781-AE31-5A3E0EAC394B}"/>
               </a:ext>
             </a:extLst>
           </p:cNvPr>
@@ -12182,7 +13023,7 @@
           <p:cNvPr id="22" name="p03-out-label-2">
             <a:extLst xmlns:a="http://schemas.openxmlformats.org/drawingml/2006/main">
               <a:ext uri="{FF2B5EF4-FFF2-40B4-BE49-F238E27FC236}">
-                <a16:creationId xmlns:a16="http://schemas.microsoft.com/office/drawing/2014/main" id="{444B94A7-7DFF-421D-B09E-5F9FA3C681A5}"/>
+                <a16:creationId xmlns:a16="http://schemas.microsoft.com/office/drawing/2014/main" id="{FB8541C3-187B-4E60-B130-92076EC23E18}"/>
               </a:ext>
             </a:extLst>
           </p:cNvPr>
@@ -12237,7 +13078,7 @@
           <p:cNvPr id="23" name="p03-out-detail-2">
             <a:extLst xmlns:a="http://schemas.openxmlformats.org/drawingml/2006/main">
               <a:ext uri="{FF2B5EF4-FFF2-40B4-BE49-F238E27FC236}">
-                <a16:creationId xmlns:a16="http://schemas.microsoft.com/office/drawing/2014/main" id="{D28BEC7E-5070-45BC-ABE6-445F891AA67D}"/>
+                <a16:creationId xmlns:a16="http://schemas.microsoft.com/office/drawing/2014/main" id="{EBAA774E-B4AB-4AB5-B33D-F412E84D90A9}"/>
               </a:ext>
             </a:extLst>
           </p:cNvPr>
@@ -12296,7 +13137,7 @@
           <p:cNvPr id="24" name="p03-out-label-3">
             <a:extLst xmlns:a="http://schemas.openxmlformats.org/drawingml/2006/main">
               <a:ext uri="{FF2B5EF4-FFF2-40B4-BE49-F238E27FC236}">
-                <a16:creationId xmlns:a16="http://schemas.microsoft.com/office/drawing/2014/main" id="{8543D8E8-2BE7-4C13-9826-501C34FAEFD8}"/>
+                <a16:creationId xmlns:a16="http://schemas.microsoft.com/office/drawing/2014/main" id="{4A90A5A3-F325-4E12-ABD6-0DEE388464B0}"/>
               </a:ext>
             </a:extLst>
           </p:cNvPr>
@@ -12351,7 +13192,7 @@
           <p:cNvPr id="25" name="p03-out-detail-3">
             <a:extLst xmlns:a="http://schemas.openxmlformats.org/drawingml/2006/main">
               <a:ext uri="{FF2B5EF4-FFF2-40B4-BE49-F238E27FC236}">
-                <a16:creationId xmlns:a16="http://schemas.microsoft.com/office/drawing/2014/main" id="{97AFAEC4-DA7F-4D66-A663-2D3BE9A97C9D}"/>
+                <a16:creationId xmlns:a16="http://schemas.microsoft.com/office/drawing/2014/main" id="{726B84EA-C9AF-4843-9A40-BB59606BB1E5}"/>
               </a:ext>
             </a:extLst>
           </p:cNvPr>
@@ -12410,7 +13251,7 @@
           <p:cNvPr id="26" name="p03-bottom">
             <a:extLst xmlns:a="http://schemas.openxmlformats.org/drawingml/2006/main">
               <a:ext uri="{FF2B5EF4-FFF2-40B4-BE49-F238E27FC236}">
-                <a16:creationId xmlns:a16="http://schemas.microsoft.com/office/drawing/2014/main" id="{25AC0FAC-5F79-4A1E-B3DF-8492B68877E2}"/>
+                <a16:creationId xmlns:a16="http://schemas.microsoft.com/office/drawing/2014/main" id="{E3D64709-4965-47DB-987D-13B83A7B561B}"/>
               </a:ext>
             </a:extLst>
           </p:cNvPr>
@@ -12557,7 +13398,7 @@
           <p:cNvPr id="6" name="p04-part-0">
             <a:extLst xmlns:a="http://schemas.openxmlformats.org/drawingml/2006/main">
               <a:ext uri="{FF2B5EF4-FFF2-40B4-BE49-F238E27FC236}">
-                <a16:creationId xmlns:a16="http://schemas.microsoft.com/office/drawing/2014/main" id="{A296C42E-62F2-4028-84B7-5421B27CAB6F}"/>
+                <a16:creationId xmlns:a16="http://schemas.microsoft.com/office/drawing/2014/main" id="{E8CF715C-291C-43C4-8F6E-041AD61E7EF0}"/>
               </a:ext>
             </a:extLst>
           </p:cNvPr>
@@ -12644,7 +13485,7 @@
           <p:cNvPr id="7" name="p04-time-0">
             <a:extLst xmlns:a="http://schemas.openxmlformats.org/drawingml/2006/main">
               <a:ext uri="{FF2B5EF4-FFF2-40B4-BE49-F238E27FC236}">
-                <a16:creationId xmlns:a16="http://schemas.microsoft.com/office/drawing/2014/main" id="{43019E4A-3E38-4887-892C-9A85FC45E02F}"/>
+                <a16:creationId xmlns:a16="http://schemas.microsoft.com/office/drawing/2014/main" id="{3D4E0B61-F21E-4BD8-9FB9-42B7BFF0569D}"/>
               </a:ext>
             </a:extLst>
           </p:cNvPr>
@@ -12697,7 +13538,7 @@
           <p:cNvPr id="8" name="p04-part-1">
             <a:extLst xmlns:a="http://schemas.openxmlformats.org/drawingml/2006/main">
               <a:ext uri="{FF2B5EF4-FFF2-40B4-BE49-F238E27FC236}">
-                <a16:creationId xmlns:a16="http://schemas.microsoft.com/office/drawing/2014/main" id="{BB4C9A24-E58D-4E0F-8865-8336BDF4F89F}"/>
+                <a16:creationId xmlns:a16="http://schemas.microsoft.com/office/drawing/2014/main" id="{F715DDF4-889A-48FD-A413-381A26CACF38}"/>
               </a:ext>
             </a:extLst>
           </p:cNvPr>
@@ -12784,7 +13625,7 @@
           <p:cNvPr id="9" name="p04-time-1">
             <a:extLst xmlns:a="http://schemas.openxmlformats.org/drawingml/2006/main">
               <a:ext uri="{FF2B5EF4-FFF2-40B4-BE49-F238E27FC236}">
-                <a16:creationId xmlns:a16="http://schemas.microsoft.com/office/drawing/2014/main" id="{EEA02290-2A03-4141-BA1C-471433E5BA45}"/>
+                <a16:creationId xmlns:a16="http://schemas.microsoft.com/office/drawing/2014/main" id="{0D8B82E8-61D0-419D-8F2D-87270E1D04AD}"/>
               </a:ext>
             </a:extLst>
           </p:cNvPr>
@@ -12837,7 +13678,7 @@
           <p:cNvPr id="10" name="p04-part-2">
             <a:extLst xmlns:a="http://schemas.openxmlformats.org/drawingml/2006/main">
               <a:ext uri="{FF2B5EF4-FFF2-40B4-BE49-F238E27FC236}">
-                <a16:creationId xmlns:a16="http://schemas.microsoft.com/office/drawing/2014/main" id="{59B9681C-A0E9-4EBF-91A7-7A6AFB3C5B0E}"/>
+                <a16:creationId xmlns:a16="http://schemas.microsoft.com/office/drawing/2014/main" id="{02C706CE-5A9E-40E4-A268-CABA0D19D87B}"/>
               </a:ext>
             </a:extLst>
           </p:cNvPr>
@@ -12924,7 +13765,7 @@
           <p:cNvPr id="11" name="p04-time-2">
             <a:extLst xmlns:a="http://schemas.openxmlformats.org/drawingml/2006/main">
               <a:ext uri="{FF2B5EF4-FFF2-40B4-BE49-F238E27FC236}">
-                <a16:creationId xmlns:a16="http://schemas.microsoft.com/office/drawing/2014/main" id="{B429DB71-0DE0-4B5C-A417-739575EA7669}"/>
+                <a16:creationId xmlns:a16="http://schemas.microsoft.com/office/drawing/2014/main" id="{7F026593-040B-450A-87BC-F3A9A1711299}"/>
               </a:ext>
             </a:extLst>
           </p:cNvPr>
@@ -12977,7 +13818,7 @@
           <p:cNvPr id="12" name="p04-part-3">
             <a:extLst xmlns:a="http://schemas.openxmlformats.org/drawingml/2006/main">
               <a:ext uri="{FF2B5EF4-FFF2-40B4-BE49-F238E27FC236}">
-                <a16:creationId xmlns:a16="http://schemas.microsoft.com/office/drawing/2014/main" id="{D8D828FA-1E35-4BEB-AFF8-E9503C4BF495}"/>
+                <a16:creationId xmlns:a16="http://schemas.microsoft.com/office/drawing/2014/main" id="{7A3FAFF3-CE6F-44DB-865C-1D50E40BEBDB}"/>
               </a:ext>
             </a:extLst>
           </p:cNvPr>
@@ -13064,7 +13905,7 @@
           <p:cNvPr id="13" name="p04-time-3">
             <a:extLst xmlns:a="http://schemas.openxmlformats.org/drawingml/2006/main">
               <a:ext uri="{FF2B5EF4-FFF2-40B4-BE49-F238E27FC236}">
-                <a16:creationId xmlns:a16="http://schemas.microsoft.com/office/drawing/2014/main" id="{316826FF-1B88-4F70-BC59-4EA7EED662BE}"/>
+                <a16:creationId xmlns:a16="http://schemas.microsoft.com/office/drawing/2014/main" id="{2EAEE34F-A8D2-4E1F-BDE5-C1637CE49DDC}"/>
               </a:ext>
             </a:extLst>
           </p:cNvPr>
@@ -13117,7 +13958,7 @@
           <p:cNvPr id="14" name="p04-part-4">
             <a:extLst xmlns:a="http://schemas.openxmlformats.org/drawingml/2006/main">
               <a:ext uri="{FF2B5EF4-FFF2-40B4-BE49-F238E27FC236}">
-                <a16:creationId xmlns:a16="http://schemas.microsoft.com/office/drawing/2014/main" id="{1C3CEACD-BBC4-4E11-B969-739B7B5DCE63}"/>
+                <a16:creationId xmlns:a16="http://schemas.microsoft.com/office/drawing/2014/main" id="{55B7ED05-11F1-4F9D-A176-9F1C714E08B7}"/>
               </a:ext>
             </a:extLst>
           </p:cNvPr>
@@ -13204,7 +14045,7 @@
           <p:cNvPr id="15" name="p04-time-4">
             <a:extLst xmlns:a="http://schemas.openxmlformats.org/drawingml/2006/main">
               <a:ext uri="{FF2B5EF4-FFF2-40B4-BE49-F238E27FC236}">
-                <a16:creationId xmlns:a16="http://schemas.microsoft.com/office/drawing/2014/main" id="{6FFAA392-A319-45B5-A0F6-D0CE73085F1D}"/>
+                <a16:creationId xmlns:a16="http://schemas.microsoft.com/office/drawing/2014/main" id="{275969FD-5D21-4CD3-84E8-1C2887CE2E5B}"/>
               </a:ext>
             </a:extLst>
           </p:cNvPr>
@@ -13257,7 +14098,7 @@
           <p:cNvPr id="16" name="p04-example-label">
             <a:extLst xmlns:a="http://schemas.openxmlformats.org/drawingml/2006/main">
               <a:ext uri="{FF2B5EF4-FFF2-40B4-BE49-F238E27FC236}">
-                <a16:creationId xmlns:a16="http://schemas.microsoft.com/office/drawing/2014/main" id="{3D581988-D2E2-4AF2-A259-0B29B3C99559}"/>
+                <a16:creationId xmlns:a16="http://schemas.microsoft.com/office/drawing/2014/main" id="{150025CD-276D-4FE5-9CA0-E5082A1704A9}"/>
               </a:ext>
             </a:extLst>
           </p:cNvPr>
@@ -13312,7 +14153,7 @@
           <p:cNvPr id="17" name="p04-example">
             <a:extLst xmlns:a="http://schemas.openxmlformats.org/drawingml/2006/main">
               <a:ext uri="{FF2B5EF4-FFF2-40B4-BE49-F238E27FC236}">
-                <a16:creationId xmlns:a16="http://schemas.microsoft.com/office/drawing/2014/main" id="{734FA1FE-BEB3-44D2-BD17-EA03758A84CC}"/>
+                <a16:creationId xmlns:a16="http://schemas.microsoft.com/office/drawing/2014/main" id="{4F82E81E-9419-436A-961F-0EE6B289E50B}"/>
               </a:ext>
             </a:extLst>
           </p:cNvPr>
@@ -13367,7 +14208,7 @@
           <p:cNvPr id="18" name="p04-bottom">
             <a:extLst xmlns:a="http://schemas.openxmlformats.org/drawingml/2006/main">
               <a:ext uri="{FF2B5EF4-FFF2-40B4-BE49-F238E27FC236}">
-                <a16:creationId xmlns:a16="http://schemas.microsoft.com/office/drawing/2014/main" id="{81604BEC-8BFA-4416-B3AF-DA42BE6B749B}"/>
+                <a16:creationId xmlns:a16="http://schemas.microsoft.com/office/drawing/2014/main" id="{20E6BA2B-C3D8-43F3-B9C7-C1CEF12588C7}"/>
               </a:ext>
             </a:extLst>
           </p:cNvPr>
@@ -13514,7 +14355,7 @@
           <p:cNvPr id="6" name="p05-label-0">
             <a:extLst xmlns:a="http://schemas.openxmlformats.org/drawingml/2006/main">
               <a:ext uri="{FF2B5EF4-FFF2-40B4-BE49-F238E27FC236}">
-                <a16:creationId xmlns:a16="http://schemas.microsoft.com/office/drawing/2014/main" id="{BE18CFB8-D68C-4B54-BBFD-420C6C31AB79}"/>
+                <a16:creationId xmlns:a16="http://schemas.microsoft.com/office/drawing/2014/main" id="{46D5D89E-CCC2-4D58-A670-03AA37A21D39}"/>
               </a:ext>
             </a:extLst>
           </p:cNvPr>
@@ -13571,7 +14412,7 @@
           <p:cNvPr id="7" name="p05-q-0">
             <a:extLst xmlns:a="http://schemas.openxmlformats.org/drawingml/2006/main">
               <a:ext uri="{FF2B5EF4-FFF2-40B4-BE49-F238E27FC236}">
-                <a16:creationId xmlns:a16="http://schemas.microsoft.com/office/drawing/2014/main" id="{623D1A34-0DBB-4F6B-8D83-28A41E6848A4}"/>
+                <a16:creationId xmlns:a16="http://schemas.microsoft.com/office/drawing/2014/main" id="{DED6E80D-CB49-4044-944F-3A8D50EE4B8E}"/>
               </a:ext>
             </a:extLst>
           </p:cNvPr>
@@ -13626,7 +14467,7 @@
           <p:cNvPr id="8" name="p05-label-1">
             <a:extLst xmlns:a="http://schemas.openxmlformats.org/drawingml/2006/main">
               <a:ext uri="{FF2B5EF4-FFF2-40B4-BE49-F238E27FC236}">
-                <a16:creationId xmlns:a16="http://schemas.microsoft.com/office/drawing/2014/main" id="{5327CEDD-3559-422B-B8B6-BE32B036B4A8}"/>
+                <a16:creationId xmlns:a16="http://schemas.microsoft.com/office/drawing/2014/main" id="{B20C2E51-7E8D-4F90-A53D-2AED1EC560BD}"/>
               </a:ext>
             </a:extLst>
           </p:cNvPr>
@@ -13683,7 +14524,7 @@
           <p:cNvPr id="9" name="p05-q-1">
             <a:extLst xmlns:a="http://schemas.openxmlformats.org/drawingml/2006/main">
               <a:ext uri="{FF2B5EF4-FFF2-40B4-BE49-F238E27FC236}">
-                <a16:creationId xmlns:a16="http://schemas.microsoft.com/office/drawing/2014/main" id="{BC7FDC89-0AE2-45F5-81E5-C7F2BF3A138B}"/>
+                <a16:creationId xmlns:a16="http://schemas.microsoft.com/office/drawing/2014/main" id="{CF33D40D-B505-4B5B-B1F3-EA4BD15C7E4A}"/>
               </a:ext>
             </a:extLst>
           </p:cNvPr>
@@ -13738,7 +14579,7 @@
           <p:cNvPr id="10" name="p05-label-2">
             <a:extLst xmlns:a="http://schemas.openxmlformats.org/drawingml/2006/main">
               <a:ext uri="{FF2B5EF4-FFF2-40B4-BE49-F238E27FC236}">
-                <a16:creationId xmlns:a16="http://schemas.microsoft.com/office/drawing/2014/main" id="{B0F162BF-FDAA-43A0-9586-1D8CA52DFF58}"/>
+                <a16:creationId xmlns:a16="http://schemas.microsoft.com/office/drawing/2014/main" id="{DC0A0B48-4C76-460A-B26D-9E1A91EF81EE}"/>
               </a:ext>
             </a:extLst>
           </p:cNvPr>
@@ -13795,7 +14636,7 @@
           <p:cNvPr id="11" name="p05-q-2">
             <a:extLst xmlns:a="http://schemas.openxmlformats.org/drawingml/2006/main">
               <a:ext uri="{FF2B5EF4-FFF2-40B4-BE49-F238E27FC236}">
-                <a16:creationId xmlns:a16="http://schemas.microsoft.com/office/drawing/2014/main" id="{5D8421D6-85D5-4994-8BE1-B9C6125BBCFC}"/>
+                <a16:creationId xmlns:a16="http://schemas.microsoft.com/office/drawing/2014/main" id="{D3E43E23-5818-4960-B5A2-C9DAE86D8F4A}"/>
               </a:ext>
             </a:extLst>
           </p:cNvPr>
@@ -13850,7 +14691,7 @@
           <p:cNvPr id="12" name="p05-label-3">
             <a:extLst xmlns:a="http://schemas.openxmlformats.org/drawingml/2006/main">
               <a:ext uri="{FF2B5EF4-FFF2-40B4-BE49-F238E27FC236}">
-                <a16:creationId xmlns:a16="http://schemas.microsoft.com/office/drawing/2014/main" id="{DF89AE2F-1F6A-4E2F-9DE4-639E40AB7319}"/>
+                <a16:creationId xmlns:a16="http://schemas.microsoft.com/office/drawing/2014/main" id="{20000BEC-F55C-45D0-BFC1-7179F9B0822B}"/>
               </a:ext>
             </a:extLst>
           </p:cNvPr>
@@ -13907,7 +14748,7 @@
           <p:cNvPr id="13" name="p05-q-3">
             <a:extLst xmlns:a="http://schemas.openxmlformats.org/drawingml/2006/main">
               <a:ext uri="{FF2B5EF4-FFF2-40B4-BE49-F238E27FC236}">
-                <a16:creationId xmlns:a16="http://schemas.microsoft.com/office/drawing/2014/main" id="{C30F2D89-31B9-44DC-87F2-379348209823}"/>
+                <a16:creationId xmlns:a16="http://schemas.microsoft.com/office/drawing/2014/main" id="{17DAB28E-F2F3-48D3-8E22-2D6BA2BFBB8E}"/>
               </a:ext>
             </a:extLst>
           </p:cNvPr>
@@ -13962,7 +14803,7 @@
           <p:cNvPr id="14" name="p05-action">
             <a:extLst xmlns:a="http://schemas.openxmlformats.org/drawingml/2006/main">
               <a:ext uri="{FF2B5EF4-FFF2-40B4-BE49-F238E27FC236}">
-                <a16:creationId xmlns:a16="http://schemas.microsoft.com/office/drawing/2014/main" id="{4B32538E-71E0-4301-BFBF-4AFA0E7D1F8E}"/>
+                <a16:creationId xmlns:a16="http://schemas.microsoft.com/office/drawing/2014/main" id="{F6B3AE9D-EAA1-4389-A016-9117CC738829}"/>
               </a:ext>
             </a:extLst>
           </p:cNvPr>
@@ -14019,7 +14860,7 @@
           <p:cNvPr id="15" name="p05-boundary">
             <a:extLst xmlns:a="http://schemas.openxmlformats.org/drawingml/2006/main">
               <a:ext uri="{FF2B5EF4-FFF2-40B4-BE49-F238E27FC236}">
-                <a16:creationId xmlns:a16="http://schemas.microsoft.com/office/drawing/2014/main" id="{C9238A1F-E686-4D6B-8865-B3141F2BC552}"/>
+                <a16:creationId xmlns:a16="http://schemas.microsoft.com/office/drawing/2014/main" id="{A9998531-462B-4C31-A8ED-8A3CC8D55DD1}"/>
               </a:ext>
             </a:extLst>
           </p:cNvPr>
@@ -14166,7 +15007,7 @@
           <p:cNvPr id="6" name="p06-n-0">
             <a:extLst xmlns:a="http://schemas.openxmlformats.org/drawingml/2006/main">
               <a:ext uri="{FF2B5EF4-FFF2-40B4-BE49-F238E27FC236}">
-                <a16:creationId xmlns:a16="http://schemas.microsoft.com/office/drawing/2014/main" id="{607AEB36-6F77-4E72-A0AD-2131223A3F82}"/>
+                <a16:creationId xmlns:a16="http://schemas.microsoft.com/office/drawing/2014/main" id="{B843D248-97A3-4DF7-BD01-C0AD22860B73}"/>
               </a:ext>
             </a:extLst>
           </p:cNvPr>
@@ -14223,7 +15064,7 @@
           <p:cNvPr id="7" name="p06-label-0">
             <a:extLst xmlns:a="http://schemas.openxmlformats.org/drawingml/2006/main">
               <a:ext uri="{FF2B5EF4-FFF2-40B4-BE49-F238E27FC236}">
-                <a16:creationId xmlns:a16="http://schemas.microsoft.com/office/drawing/2014/main" id="{8804BE2F-D0EC-4AE0-B7C3-EB1407EE3BBD}"/>
+                <a16:creationId xmlns:a16="http://schemas.microsoft.com/office/drawing/2014/main" id="{AC496253-633D-4088-B690-A04093F7E1E8}"/>
               </a:ext>
             </a:extLst>
           </p:cNvPr>
@@ -14278,7 +15119,7 @@
           <p:cNvPr id="8" name="p06-q-0">
             <a:extLst xmlns:a="http://schemas.openxmlformats.org/drawingml/2006/main">
               <a:ext uri="{FF2B5EF4-FFF2-40B4-BE49-F238E27FC236}">
-                <a16:creationId xmlns:a16="http://schemas.microsoft.com/office/drawing/2014/main" id="{8B45ECFA-AAD8-490F-B83E-D33F527D3D97}"/>
+                <a16:creationId xmlns:a16="http://schemas.microsoft.com/office/drawing/2014/main" id="{EB526078-138A-4C1A-8D9C-35AE05ACA459}"/>
               </a:ext>
             </a:extLst>
           </p:cNvPr>
@@ -14333,7 +15174,7 @@
           <p:cNvPr id="9" name="p06-n-1">
             <a:extLst xmlns:a="http://schemas.openxmlformats.org/drawingml/2006/main">
               <a:ext uri="{FF2B5EF4-FFF2-40B4-BE49-F238E27FC236}">
-                <a16:creationId xmlns:a16="http://schemas.microsoft.com/office/drawing/2014/main" id="{E4FED3CF-301A-4409-B362-A4CBBBC4D608}"/>
+                <a16:creationId xmlns:a16="http://schemas.microsoft.com/office/drawing/2014/main" id="{FDC9326A-1D2E-4BA0-9B04-009E60B9ED3E}"/>
               </a:ext>
             </a:extLst>
           </p:cNvPr>
@@ -14390,7 +15231,7 @@
           <p:cNvPr id="10" name="p06-label-1">
             <a:extLst xmlns:a="http://schemas.openxmlformats.org/drawingml/2006/main">
               <a:ext uri="{FF2B5EF4-FFF2-40B4-BE49-F238E27FC236}">
-                <a16:creationId xmlns:a16="http://schemas.microsoft.com/office/drawing/2014/main" id="{08C4B869-754D-4283-9C1E-45FF7907E1E2}"/>
+                <a16:creationId xmlns:a16="http://schemas.microsoft.com/office/drawing/2014/main" id="{31DBF01E-5175-46B1-A1CE-4AD91A7DA1EB}"/>
               </a:ext>
             </a:extLst>
           </p:cNvPr>
@@ -14445,7 +15286,7 @@
           <p:cNvPr id="11" name="p06-q-1">
             <a:extLst xmlns:a="http://schemas.openxmlformats.org/drawingml/2006/main">
               <a:ext uri="{FF2B5EF4-FFF2-40B4-BE49-F238E27FC236}">
-                <a16:creationId xmlns:a16="http://schemas.microsoft.com/office/drawing/2014/main" id="{F1E2B3A6-020F-465E-B46F-4D6FFA15B272}"/>
+                <a16:creationId xmlns:a16="http://schemas.microsoft.com/office/drawing/2014/main" id="{6CFE20BA-C682-4CF0-B211-8564927CCB38}"/>
               </a:ext>
             </a:extLst>
           </p:cNvPr>
@@ -14500,7 +15341,7 @@
           <p:cNvPr id="12" name="p06-n-2">
             <a:extLst xmlns:a="http://schemas.openxmlformats.org/drawingml/2006/main">
               <a:ext uri="{FF2B5EF4-FFF2-40B4-BE49-F238E27FC236}">
-                <a16:creationId xmlns:a16="http://schemas.microsoft.com/office/drawing/2014/main" id="{2B6BB146-81B5-4C7F-A353-450B4C664A3C}"/>
+                <a16:creationId xmlns:a16="http://schemas.microsoft.com/office/drawing/2014/main" id="{BBB632EB-77AC-4C38-A073-22CD6F4788B9}"/>
               </a:ext>
             </a:extLst>
           </p:cNvPr>
@@ -14557,7 +15398,7 @@
           <p:cNvPr id="13" name="p06-label-2">
             <a:extLst xmlns:a="http://schemas.openxmlformats.org/drawingml/2006/main">
               <a:ext uri="{FF2B5EF4-FFF2-40B4-BE49-F238E27FC236}">
-                <a16:creationId xmlns:a16="http://schemas.microsoft.com/office/drawing/2014/main" id="{A10A4336-B958-4C97-9229-A699203D477B}"/>
+                <a16:creationId xmlns:a16="http://schemas.microsoft.com/office/drawing/2014/main" id="{BBAED215-C41B-49E6-8235-AE4B9810DEA3}"/>
               </a:ext>
             </a:extLst>
           </p:cNvPr>
@@ -14612,7 +15453,7 @@
           <p:cNvPr id="14" name="p06-q-2">
             <a:extLst xmlns:a="http://schemas.openxmlformats.org/drawingml/2006/main">
               <a:ext uri="{FF2B5EF4-FFF2-40B4-BE49-F238E27FC236}">
-                <a16:creationId xmlns:a16="http://schemas.microsoft.com/office/drawing/2014/main" id="{422EB807-22DB-418C-A53A-463D2101DD42}"/>
+                <a16:creationId xmlns:a16="http://schemas.microsoft.com/office/drawing/2014/main" id="{C5BD2E0E-7057-4A28-80BC-56B78337DFD0}"/>
               </a:ext>
             </a:extLst>
           </p:cNvPr>
@@ -14667,7 +15508,7 @@
           <p:cNvPr id="15" name="p06-bottom">
             <a:extLst xmlns:a="http://schemas.openxmlformats.org/drawingml/2006/main">
               <a:ext uri="{FF2B5EF4-FFF2-40B4-BE49-F238E27FC236}">
-                <a16:creationId xmlns:a16="http://schemas.microsoft.com/office/drawing/2014/main" id="{DB4B7F3B-17AB-471C-8F81-A1B470D7A8FA}"/>
+                <a16:creationId xmlns:a16="http://schemas.microsoft.com/office/drawing/2014/main" id="{0DF13E99-A9E1-4410-BC8C-9FCB224EEC84}"/>
               </a:ext>
             </a:extLst>
           </p:cNvPr>
@@ -14814,7 +15655,7 @@
           <p:cNvPr id="6" name="p07-left-title">
             <a:extLst xmlns:a="http://schemas.openxmlformats.org/drawingml/2006/main">
               <a:ext uri="{FF2B5EF4-FFF2-40B4-BE49-F238E27FC236}">
-                <a16:creationId xmlns:a16="http://schemas.microsoft.com/office/drawing/2014/main" id="{22391924-CE14-4286-AA4D-2B4B5A01D8A6}"/>
+                <a16:creationId xmlns:a16="http://schemas.microsoft.com/office/drawing/2014/main" id="{04ECD905-0D01-49B3-9FF0-9B3E59EC2029}"/>
               </a:ext>
             </a:extLst>
           </p:cNvPr>
@@ -14867,7 +15708,7 @@
           <p:cNvPr id="7" name="p07-ln-0">
             <a:extLst xmlns:a="http://schemas.openxmlformats.org/drawingml/2006/main">
               <a:ext uri="{FF2B5EF4-FFF2-40B4-BE49-F238E27FC236}">
-                <a16:creationId xmlns:a16="http://schemas.microsoft.com/office/drawing/2014/main" id="{87028D9F-D351-4977-8CCD-6996ABA2A241}"/>
+                <a16:creationId xmlns:a16="http://schemas.microsoft.com/office/drawing/2014/main" id="{9EDAA0C1-2F9A-40E0-8217-D2D7C8313E5F}"/>
               </a:ext>
             </a:extLst>
           </p:cNvPr>
@@ -14924,7 +15765,7 @@
           <p:cNvPr id="8" name="p07-l-0">
             <a:extLst xmlns:a="http://schemas.openxmlformats.org/drawingml/2006/main">
               <a:ext uri="{FF2B5EF4-FFF2-40B4-BE49-F238E27FC236}">
-                <a16:creationId xmlns:a16="http://schemas.microsoft.com/office/drawing/2014/main" id="{B9DCC3D1-3F57-4990-BD79-29F34E8419E3}"/>
+                <a16:creationId xmlns:a16="http://schemas.microsoft.com/office/drawing/2014/main" id="{5E792290-A0FC-48E0-809D-ADC9E7E3F16C}"/>
               </a:ext>
             </a:extLst>
           </p:cNvPr>
@@ -14979,7 +15820,7 @@
           <p:cNvPr id="9" name="p07-ln-1">
             <a:extLst xmlns:a="http://schemas.openxmlformats.org/drawingml/2006/main">
               <a:ext uri="{FF2B5EF4-FFF2-40B4-BE49-F238E27FC236}">
-                <a16:creationId xmlns:a16="http://schemas.microsoft.com/office/drawing/2014/main" id="{1C7CD8E0-BB2F-4CB7-8277-75A137B1F1D3}"/>
+                <a16:creationId xmlns:a16="http://schemas.microsoft.com/office/drawing/2014/main" id="{ABC96993-D68D-43DD-94E0-2CDA22C342C1}"/>
               </a:ext>
             </a:extLst>
           </p:cNvPr>
@@ -15036,7 +15877,7 @@
           <p:cNvPr id="10" name="p07-l-1">
             <a:extLst xmlns:a="http://schemas.openxmlformats.org/drawingml/2006/main">
               <a:ext uri="{FF2B5EF4-FFF2-40B4-BE49-F238E27FC236}">
-                <a16:creationId xmlns:a16="http://schemas.microsoft.com/office/drawing/2014/main" id="{8F087986-8B9A-4B40-BEF4-926A5F6C039A}"/>
+                <a16:creationId xmlns:a16="http://schemas.microsoft.com/office/drawing/2014/main" id="{CB5FEC0B-A630-4F82-AEBF-F20436509615}"/>
               </a:ext>
             </a:extLst>
           </p:cNvPr>
@@ -15091,7 +15932,7 @@
           <p:cNvPr id="11" name="p07-ln-2">
             <a:extLst xmlns:a="http://schemas.openxmlformats.org/drawingml/2006/main">
               <a:ext uri="{FF2B5EF4-FFF2-40B4-BE49-F238E27FC236}">
-                <a16:creationId xmlns:a16="http://schemas.microsoft.com/office/drawing/2014/main" id="{B9C20113-3FE4-4ACB-84A1-79C58DB51E77}"/>
+                <a16:creationId xmlns:a16="http://schemas.microsoft.com/office/drawing/2014/main" id="{7CF29D76-59A5-4A18-88B3-082DF3560EC8}"/>
               </a:ext>
             </a:extLst>
           </p:cNvPr>
@@ -15148,7 +15989,7 @@
           <p:cNvPr id="12" name="p07-l-2">
             <a:extLst xmlns:a="http://schemas.openxmlformats.org/drawingml/2006/main">
               <a:ext uri="{FF2B5EF4-FFF2-40B4-BE49-F238E27FC236}">
-                <a16:creationId xmlns:a16="http://schemas.microsoft.com/office/drawing/2014/main" id="{7FD839FC-B33A-4416-ACBD-EC7B2B6A98A9}"/>
+                <a16:creationId xmlns:a16="http://schemas.microsoft.com/office/drawing/2014/main" id="{14633858-1494-4905-A75C-AA498AF06604}"/>
               </a:ext>
             </a:extLst>
           </p:cNvPr>
@@ -15203,7 +16044,7 @@
           <p:cNvPr id="13" name="p07-ln-3">
             <a:extLst xmlns:a="http://schemas.openxmlformats.org/drawingml/2006/main">
               <a:ext uri="{FF2B5EF4-FFF2-40B4-BE49-F238E27FC236}">
-                <a16:creationId xmlns:a16="http://schemas.microsoft.com/office/drawing/2014/main" id="{C11112F8-F575-41B3-8558-BB788CEABD6E}"/>
+                <a16:creationId xmlns:a16="http://schemas.microsoft.com/office/drawing/2014/main" id="{A7D75089-EC4B-414E-80B2-091643DB0C91}"/>
               </a:ext>
             </a:extLst>
           </p:cNvPr>
@@ -15260,7 +16101,7 @@
           <p:cNvPr id="14" name="p07-l-3">
             <a:extLst xmlns:a="http://schemas.openxmlformats.org/drawingml/2006/main">
               <a:ext uri="{FF2B5EF4-FFF2-40B4-BE49-F238E27FC236}">
-                <a16:creationId xmlns:a16="http://schemas.microsoft.com/office/drawing/2014/main" id="{46ACB6D5-108C-4D7A-9830-286A7679C575}"/>
+                <a16:creationId xmlns:a16="http://schemas.microsoft.com/office/drawing/2014/main" id="{76E2F101-5BDC-4168-918B-797A6DDE7A2C}"/>
               </a:ext>
             </a:extLst>
           </p:cNvPr>
@@ -15315,7 +16156,7 @@
           <p:cNvPr id="15" name="p07-divider">
             <a:extLst xmlns:a="http://schemas.openxmlformats.org/drawingml/2006/main">
               <a:ext uri="{FF2B5EF4-FFF2-40B4-BE49-F238E27FC236}">
-                <a16:creationId xmlns:a16="http://schemas.microsoft.com/office/drawing/2014/main" id="{B5D0E4D6-5A13-43BE-971B-9CC18E97864D}"/>
+                <a16:creationId xmlns:a16="http://schemas.microsoft.com/office/drawing/2014/main" id="{B538C8C4-2713-428F-B545-846EF13B2118}"/>
               </a:ext>
             </a:extLst>
           </p:cNvPr>
@@ -15346,7 +16187,7 @@
           <p:cNvPr id="16" name="p07-right-title">
             <a:extLst xmlns:a="http://schemas.openxmlformats.org/drawingml/2006/main">
               <a:ext uri="{FF2B5EF4-FFF2-40B4-BE49-F238E27FC236}">
-                <a16:creationId xmlns:a16="http://schemas.microsoft.com/office/drawing/2014/main" id="{3309B318-6054-455C-B1D6-19805D6C86F3}"/>
+                <a16:creationId xmlns:a16="http://schemas.microsoft.com/office/drawing/2014/main" id="{5705DAED-F795-4911-A702-9C04CFF9D02D}"/>
               </a:ext>
             </a:extLst>
           </p:cNvPr>
@@ -15399,7 +16240,7 @@
           <p:cNvPr id="17" name="p07-rn-0">
             <a:extLst xmlns:a="http://schemas.openxmlformats.org/drawingml/2006/main">
               <a:ext uri="{FF2B5EF4-FFF2-40B4-BE49-F238E27FC236}">
-                <a16:creationId xmlns:a16="http://schemas.microsoft.com/office/drawing/2014/main" id="{8AA78B86-F559-400D-BFE9-4A35F70ADC70}"/>
+                <a16:creationId xmlns:a16="http://schemas.microsoft.com/office/drawing/2014/main" id="{802521AE-3DE9-4AFE-B2B7-7B8D374D4F22}"/>
               </a:ext>
             </a:extLst>
           </p:cNvPr>
@@ -15456,7 +16297,7 @@
           <p:cNvPr id="18" name="p07-r-0">
             <a:extLst xmlns:a="http://schemas.openxmlformats.org/drawingml/2006/main">
               <a:ext uri="{FF2B5EF4-FFF2-40B4-BE49-F238E27FC236}">
-                <a16:creationId xmlns:a16="http://schemas.microsoft.com/office/drawing/2014/main" id="{32CFFF54-E9EF-4944-9F54-732C206AB1B5}"/>
+                <a16:creationId xmlns:a16="http://schemas.microsoft.com/office/drawing/2014/main" id="{85A77C97-54B3-430E-AA27-097E51E9B150}"/>
               </a:ext>
             </a:extLst>
           </p:cNvPr>
@@ -15511,7 +16352,7 @@
           <p:cNvPr id="19" name="p07-rn-1">
             <a:extLst xmlns:a="http://schemas.openxmlformats.org/drawingml/2006/main">
               <a:ext uri="{FF2B5EF4-FFF2-40B4-BE49-F238E27FC236}">
-                <a16:creationId xmlns:a16="http://schemas.microsoft.com/office/drawing/2014/main" id="{97502602-CD04-4E46-BB2C-4CD0C892021B}"/>
+                <a16:creationId xmlns:a16="http://schemas.microsoft.com/office/drawing/2014/main" id="{A33E8F52-CB45-4E54-8E01-67EC7149548B}"/>
               </a:ext>
             </a:extLst>
           </p:cNvPr>
@@ -15568,7 +16409,7 @@
           <p:cNvPr id="20" name="p07-r-1">
             <a:extLst xmlns:a="http://schemas.openxmlformats.org/drawingml/2006/main">
               <a:ext uri="{FF2B5EF4-FFF2-40B4-BE49-F238E27FC236}">
-                <a16:creationId xmlns:a16="http://schemas.microsoft.com/office/drawing/2014/main" id="{04CD1A90-5E8E-42B0-B272-FB8F2DF7E85F}"/>
+                <a16:creationId xmlns:a16="http://schemas.microsoft.com/office/drawing/2014/main" id="{58507A3A-7B58-4221-8435-3B1E1F6928F3}"/>
               </a:ext>
             </a:extLst>
           </p:cNvPr>
@@ -15623,7 +16464,7 @@
           <p:cNvPr id="21" name="p07-rn-2">
             <a:extLst xmlns:a="http://schemas.openxmlformats.org/drawingml/2006/main">
               <a:ext uri="{FF2B5EF4-FFF2-40B4-BE49-F238E27FC236}">
-                <a16:creationId xmlns:a16="http://schemas.microsoft.com/office/drawing/2014/main" id="{13076C74-866A-4669-8240-59848E17D1C6}"/>
+                <a16:creationId xmlns:a16="http://schemas.microsoft.com/office/drawing/2014/main" id="{0137DC90-F15C-43EC-80EE-B2285DCE980B}"/>
               </a:ext>
             </a:extLst>
           </p:cNvPr>
@@ -15680,7 +16521,7 @@
           <p:cNvPr id="22" name="p07-r-2">
             <a:extLst xmlns:a="http://schemas.openxmlformats.org/drawingml/2006/main">
               <a:ext uri="{FF2B5EF4-FFF2-40B4-BE49-F238E27FC236}">
-                <a16:creationId xmlns:a16="http://schemas.microsoft.com/office/drawing/2014/main" id="{C5DF614C-E890-4339-8C49-A5B50D6AA63D}"/>
+                <a16:creationId xmlns:a16="http://schemas.microsoft.com/office/drawing/2014/main" id="{08B6D111-412D-4B04-9D84-CE192687F33B}"/>
               </a:ext>
             </a:extLst>
           </p:cNvPr>
@@ -15735,7 +16576,7 @@
           <p:cNvPr id="23" name="p07-round">
             <a:extLst xmlns:a="http://schemas.openxmlformats.org/drawingml/2006/main">
               <a:ext uri="{FF2B5EF4-FFF2-40B4-BE49-F238E27FC236}">
-                <a16:creationId xmlns:a16="http://schemas.microsoft.com/office/drawing/2014/main" id="{5028815D-A386-4422-B2F9-E6551980148F}"/>
+                <a16:creationId xmlns:a16="http://schemas.microsoft.com/office/drawing/2014/main" id="{FE93FFE4-C968-4E2A-8EEE-9E380559F24A}"/>
               </a:ext>
             </a:extLst>
           </p:cNvPr>
@@ -15792,7 +16633,7 @@
           <p:cNvPr id="24" name="p07-bottom">
             <a:extLst xmlns:a="http://schemas.openxmlformats.org/drawingml/2006/main">
               <a:ext uri="{FF2B5EF4-FFF2-40B4-BE49-F238E27FC236}">
-                <a16:creationId xmlns:a16="http://schemas.microsoft.com/office/drawing/2014/main" id="{2D917DE8-7AFD-450F-BCAE-F1AC95DE6946}"/>
+                <a16:creationId xmlns:a16="http://schemas.microsoft.com/office/drawing/2014/main" id="{EBE622A4-3EF7-403F-876F-334E973CA758}"/>
               </a:ext>
             </a:extLst>
           </p:cNvPr>
@@ -15939,7 +16780,7 @@
           <p:cNvPr id="6" name="p08-left-title">
             <a:extLst xmlns:a="http://schemas.openxmlformats.org/drawingml/2006/main">
               <a:ext uri="{FF2B5EF4-FFF2-40B4-BE49-F238E27FC236}">
-                <a16:creationId xmlns:a16="http://schemas.microsoft.com/office/drawing/2014/main" id="{2786C235-E609-4403-A08D-86329DF2F6E9}"/>
+                <a16:creationId xmlns:a16="http://schemas.microsoft.com/office/drawing/2014/main" id="{47E00A4B-6D03-454B-8070-5A8504F5430B}"/>
               </a:ext>
             </a:extLst>
           </p:cNvPr>
@@ -15992,7 +16833,7 @@
           <p:cNvPr id="7" name="p08-d-0">
             <a:extLst xmlns:a="http://schemas.openxmlformats.org/drawingml/2006/main">
               <a:ext uri="{FF2B5EF4-FFF2-40B4-BE49-F238E27FC236}">
-                <a16:creationId xmlns:a16="http://schemas.microsoft.com/office/drawing/2014/main" id="{78D4690C-3BB6-4270-AAB0-ED697A0387E3}"/>
+                <a16:creationId xmlns:a16="http://schemas.microsoft.com/office/drawing/2014/main" id="{062DA387-48DE-44A6-80DA-B5A9774F4D0B}"/>
               </a:ext>
             </a:extLst>
           </p:cNvPr>
@@ -16049,7 +16890,7 @@
           <p:cNvPr id="8" name="p08-detail-0">
             <a:extLst xmlns:a="http://schemas.openxmlformats.org/drawingml/2006/main">
               <a:ext uri="{FF2B5EF4-FFF2-40B4-BE49-F238E27FC236}">
-                <a16:creationId xmlns:a16="http://schemas.microsoft.com/office/drawing/2014/main" id="{05DBF44F-B376-43E7-9373-F7B5FC1BEE0F}"/>
+                <a16:creationId xmlns:a16="http://schemas.microsoft.com/office/drawing/2014/main" id="{26B6BAAB-4BA5-448F-A34C-F661561CA77C}"/>
               </a:ext>
             </a:extLst>
           </p:cNvPr>
@@ -16132,7 +16973,7 @@
           <p:cNvPr id="9" name="p08-d-1">
             <a:extLst xmlns:a="http://schemas.openxmlformats.org/drawingml/2006/main">
               <a:ext uri="{FF2B5EF4-FFF2-40B4-BE49-F238E27FC236}">
-                <a16:creationId xmlns:a16="http://schemas.microsoft.com/office/drawing/2014/main" id="{FD3C09F9-5263-4027-B18E-3F12AFB09EA3}"/>
+                <a16:creationId xmlns:a16="http://schemas.microsoft.com/office/drawing/2014/main" id="{2351B522-4AB7-48FA-9A2C-32BA82696A33}"/>
               </a:ext>
             </a:extLst>
           </p:cNvPr>
@@ -16189,7 +17030,7 @@
           <p:cNvPr id="10" name="p08-detail-1">
             <a:extLst xmlns:a="http://schemas.openxmlformats.org/drawingml/2006/main">
               <a:ext uri="{FF2B5EF4-FFF2-40B4-BE49-F238E27FC236}">
-                <a16:creationId xmlns:a16="http://schemas.microsoft.com/office/drawing/2014/main" id="{F5DDE5A7-9033-4DFF-AD9F-5E0E5E1D09FD}"/>
+                <a16:creationId xmlns:a16="http://schemas.microsoft.com/office/drawing/2014/main" id="{AE97DFE9-5A51-433E-B618-D823E6649111}"/>
               </a:ext>
             </a:extLst>
           </p:cNvPr>
@@ -16272,7 +17113,7 @@
           <p:cNvPr id="11" name="p08-d-2">
             <a:extLst xmlns:a="http://schemas.openxmlformats.org/drawingml/2006/main">
               <a:ext uri="{FF2B5EF4-FFF2-40B4-BE49-F238E27FC236}">
-                <a16:creationId xmlns:a16="http://schemas.microsoft.com/office/drawing/2014/main" id="{72751181-C888-4839-9E9D-D10AC6D3A08B}"/>
+                <a16:creationId xmlns:a16="http://schemas.microsoft.com/office/drawing/2014/main" id="{4860A28C-811A-4FF9-8680-F3ACBD78AA84}"/>
               </a:ext>
             </a:extLst>
           </p:cNvPr>
@@ -16329,7 +17170,7 @@
           <p:cNvPr id="12" name="p08-detail-2">
             <a:extLst xmlns:a="http://schemas.openxmlformats.org/drawingml/2006/main">
               <a:ext uri="{FF2B5EF4-FFF2-40B4-BE49-F238E27FC236}">
-                <a16:creationId xmlns:a16="http://schemas.microsoft.com/office/drawing/2014/main" id="{059146EE-91DB-42A9-97D8-8369746DD1AC}"/>
+                <a16:creationId xmlns:a16="http://schemas.microsoft.com/office/drawing/2014/main" id="{B47CE388-1950-4288-8A78-61EFB6E99C4C}"/>
               </a:ext>
             </a:extLst>
           </p:cNvPr>
@@ -16412,7 +17253,7 @@
           <p:cNvPr id="13" name="p08-divider">
             <a:extLst xmlns:a="http://schemas.openxmlformats.org/drawingml/2006/main">
               <a:ext uri="{FF2B5EF4-FFF2-40B4-BE49-F238E27FC236}">
-                <a16:creationId xmlns:a16="http://schemas.microsoft.com/office/drawing/2014/main" id="{42C4D3D9-0F0A-4E9C-9897-47D87C1B08DF}"/>
+                <a16:creationId xmlns:a16="http://schemas.microsoft.com/office/drawing/2014/main" id="{BF1ABE34-7F0E-44DC-B488-2F6771094322}"/>
               </a:ext>
             </a:extLst>
           </p:cNvPr>
@@ -16443,7 +17284,7 @@
           <p:cNvPr id="14" name="p08-right-title">
             <a:extLst xmlns:a="http://schemas.openxmlformats.org/drawingml/2006/main">
               <a:ext uri="{FF2B5EF4-FFF2-40B4-BE49-F238E27FC236}">
-                <a16:creationId xmlns:a16="http://schemas.microsoft.com/office/drawing/2014/main" id="{C02118CE-678E-48E5-ACA4-5BFC9964C0C7}"/>
+                <a16:creationId xmlns:a16="http://schemas.microsoft.com/office/drawing/2014/main" id="{2F37DB1C-CFC0-4D8B-8039-F27969BA8C4F}"/>
               </a:ext>
             </a:extLst>
           </p:cNvPr>
@@ -16496,7 +17337,7 @@
           <p:cNvPr id="15" name="p08-fl-0">
             <a:extLst xmlns:a="http://schemas.openxmlformats.org/drawingml/2006/main">
               <a:ext uri="{FF2B5EF4-FFF2-40B4-BE49-F238E27FC236}">
-                <a16:creationId xmlns:a16="http://schemas.microsoft.com/office/drawing/2014/main" id="{ADB926A0-D4FD-458F-9869-D67886C2185B}"/>
+                <a16:creationId xmlns:a16="http://schemas.microsoft.com/office/drawing/2014/main" id="{A009F711-A360-42AD-8569-012A340A8500}"/>
               </a:ext>
             </a:extLst>
           </p:cNvPr>
@@ -16551,7 +17392,7 @@
           <p:cNvPr id="16" name="p08-fd-0">
             <a:extLst xmlns:a="http://schemas.openxmlformats.org/drawingml/2006/main">
               <a:ext uri="{FF2B5EF4-FFF2-40B4-BE49-F238E27FC236}">
-                <a16:creationId xmlns:a16="http://schemas.microsoft.com/office/drawing/2014/main" id="{E8D31DD1-E10D-4B7B-BE37-A22EFEB97F7D}"/>
+                <a16:creationId xmlns:a16="http://schemas.microsoft.com/office/drawing/2014/main" id="{5C320839-F1F4-4ABC-BA17-2145FE9B8B3F}"/>
               </a:ext>
             </a:extLst>
           </p:cNvPr>
@@ -16606,7 +17447,7 @@
           <p:cNvPr id="17" name="p08-fl-1">
             <a:extLst xmlns:a="http://schemas.openxmlformats.org/drawingml/2006/main">
               <a:ext uri="{FF2B5EF4-FFF2-40B4-BE49-F238E27FC236}">
-                <a16:creationId xmlns:a16="http://schemas.microsoft.com/office/drawing/2014/main" id="{FAA8B50D-B95F-491C-8FDC-FD71D8FFA1B0}"/>
+                <a16:creationId xmlns:a16="http://schemas.microsoft.com/office/drawing/2014/main" id="{A409A673-731E-475E-9631-7961015B6FBC}"/>
               </a:ext>
             </a:extLst>
           </p:cNvPr>
@@ -16661,7 +17502,7 @@
           <p:cNvPr id="18" name="p08-fd-1">
             <a:extLst xmlns:a="http://schemas.openxmlformats.org/drawingml/2006/main">
               <a:ext uri="{FF2B5EF4-FFF2-40B4-BE49-F238E27FC236}">
-                <a16:creationId xmlns:a16="http://schemas.microsoft.com/office/drawing/2014/main" id="{87012FEC-B49A-46B1-B925-586E5C94ECCF}"/>
+                <a16:creationId xmlns:a16="http://schemas.microsoft.com/office/drawing/2014/main" id="{006051C9-6C75-4EE9-9A2C-B6B4C0FE8258}"/>
               </a:ext>
             </a:extLst>
           </p:cNvPr>
@@ -16716,7 +17557,7 @@
           <p:cNvPr id="19" name="p08-fl-2">
             <a:extLst xmlns:a="http://schemas.openxmlformats.org/drawingml/2006/main">
               <a:ext uri="{FF2B5EF4-FFF2-40B4-BE49-F238E27FC236}">
-                <a16:creationId xmlns:a16="http://schemas.microsoft.com/office/drawing/2014/main" id="{5E3A3064-33D9-4916-9E6F-0D4D6D64BB48}"/>
+                <a16:creationId xmlns:a16="http://schemas.microsoft.com/office/drawing/2014/main" id="{340D676A-1650-444C-8FE0-518F237F7B39}"/>
               </a:ext>
             </a:extLst>
           </p:cNvPr>
@@ -16771,7 +17612,7 @@
           <p:cNvPr id="20" name="p08-fd-2">
             <a:extLst xmlns:a="http://schemas.openxmlformats.org/drawingml/2006/main">
               <a:ext uri="{FF2B5EF4-FFF2-40B4-BE49-F238E27FC236}">
-                <a16:creationId xmlns:a16="http://schemas.microsoft.com/office/drawing/2014/main" id="{C8D289A2-1752-4CFF-A53A-C605B7C7A076}"/>
+                <a16:creationId xmlns:a16="http://schemas.microsoft.com/office/drawing/2014/main" id="{2D9CCD0F-E962-4363-9C38-BB6B18184AE5}"/>
               </a:ext>
             </a:extLst>
           </p:cNvPr>
@@ -16826,7 +17667,7 @@
           <p:cNvPr id="21" name="p08-fl-3">
             <a:extLst xmlns:a="http://schemas.openxmlformats.org/drawingml/2006/main">
               <a:ext uri="{FF2B5EF4-FFF2-40B4-BE49-F238E27FC236}">
-                <a16:creationId xmlns:a16="http://schemas.microsoft.com/office/drawing/2014/main" id="{3DDC441A-1812-4585-A048-69C12395A568}"/>
+                <a16:creationId xmlns:a16="http://schemas.microsoft.com/office/drawing/2014/main" id="{FFBF9499-8F6D-40CD-BA13-C30080E50FD3}"/>
               </a:ext>
             </a:extLst>
           </p:cNvPr>
@@ -16881,7 +17722,7 @@
           <p:cNvPr id="22" name="p08-fd-3">
             <a:extLst xmlns:a="http://schemas.openxmlformats.org/drawingml/2006/main">
               <a:ext uri="{FF2B5EF4-FFF2-40B4-BE49-F238E27FC236}">
-                <a16:creationId xmlns:a16="http://schemas.microsoft.com/office/drawing/2014/main" id="{D00E8DDE-8650-4FD9-88F2-5203A9AB6D43}"/>
+                <a16:creationId xmlns:a16="http://schemas.microsoft.com/office/drawing/2014/main" id="{B77060FE-6128-480F-B0C6-7E3C7986E272}"/>
               </a:ext>
             </a:extLst>
           </p:cNvPr>
@@ -16936,7 +17777,7 @@
           <p:cNvPr id="23" name="p08-fl-4">
             <a:extLst xmlns:a="http://schemas.openxmlformats.org/drawingml/2006/main">
               <a:ext uri="{FF2B5EF4-FFF2-40B4-BE49-F238E27FC236}">
-                <a16:creationId xmlns:a16="http://schemas.microsoft.com/office/drawing/2014/main" id="{69555EAC-9D79-492A-8E21-B6C85255BC3C}"/>
+                <a16:creationId xmlns:a16="http://schemas.microsoft.com/office/drawing/2014/main" id="{D6C7A31C-F8DE-4BA4-BA14-EC5FA83F3030}"/>
               </a:ext>
             </a:extLst>
           </p:cNvPr>
@@ -16991,7 +17832,7 @@
           <p:cNvPr id="24" name="p08-fd-4">
             <a:extLst xmlns:a="http://schemas.openxmlformats.org/drawingml/2006/main">
               <a:ext uri="{FF2B5EF4-FFF2-40B4-BE49-F238E27FC236}">
-                <a16:creationId xmlns:a16="http://schemas.microsoft.com/office/drawing/2014/main" id="{466CFFB2-C0B0-482B-9BE9-82C99F66C26C}"/>
+                <a16:creationId xmlns:a16="http://schemas.microsoft.com/office/drawing/2014/main" id="{3BC87898-1851-4ADD-9891-6B490814C5A6}"/>
               </a:ext>
             </a:extLst>
           </p:cNvPr>
@@ -17046,7 +17887,7 @@
           <p:cNvPr id="25" name="p08-fl-5">
             <a:extLst xmlns:a="http://schemas.openxmlformats.org/drawingml/2006/main">
               <a:ext uri="{FF2B5EF4-FFF2-40B4-BE49-F238E27FC236}">
-                <a16:creationId xmlns:a16="http://schemas.microsoft.com/office/drawing/2014/main" id="{8204D11E-06E0-4D76-8411-7E41FD2B46A8}"/>
+                <a16:creationId xmlns:a16="http://schemas.microsoft.com/office/drawing/2014/main" id="{909203E1-20C5-442E-A5F0-56FA107FC134}"/>
               </a:ext>
             </a:extLst>
           </p:cNvPr>
@@ -17101,7 +17942,7 @@
           <p:cNvPr id="26" name="p08-fd-5">
             <a:extLst xmlns:a="http://schemas.openxmlformats.org/drawingml/2006/main">
               <a:ext uri="{FF2B5EF4-FFF2-40B4-BE49-F238E27FC236}">
-                <a16:creationId xmlns:a16="http://schemas.microsoft.com/office/drawing/2014/main" id="{984CF2EF-EA10-4F06-B8C4-33B1D414C9A1}"/>
+                <a16:creationId xmlns:a16="http://schemas.microsoft.com/office/drawing/2014/main" id="{05F26CCF-D06E-411C-878D-06892B227F98}"/>
               </a:ext>
             </a:extLst>
           </p:cNvPr>
@@ -17156,7 +17997,7 @@
           <p:cNvPr id="27" name="p08-bottom">
             <a:extLst xmlns:a="http://schemas.openxmlformats.org/drawingml/2006/main">
               <a:ext uri="{FF2B5EF4-FFF2-40B4-BE49-F238E27FC236}">
-                <a16:creationId xmlns:a16="http://schemas.microsoft.com/office/drawing/2014/main" id="{02AA1ED8-6104-482E-8DF2-48B728825F4D}"/>
+                <a16:creationId xmlns:a16="http://schemas.microsoft.com/office/drawing/2014/main" id="{0E24C6C2-5555-4823-8361-0DAF08786466}"/>
               </a:ext>
             </a:extLst>
           </p:cNvPr>
@@ -17303,7 +18144,7 @@
           <p:cNvPr id="6" name="p09-can-title">
             <a:extLst xmlns:a="http://schemas.openxmlformats.org/drawingml/2006/main">
               <a:ext uri="{FF2B5EF4-FFF2-40B4-BE49-F238E27FC236}">
-                <a16:creationId xmlns:a16="http://schemas.microsoft.com/office/drawing/2014/main" id="{98121482-2C22-4072-9E9C-D12A3B465002}"/>
+                <a16:creationId xmlns:a16="http://schemas.microsoft.com/office/drawing/2014/main" id="{38A7D370-8E8E-44FC-BC69-49B48CBB572A}"/>
               </a:ext>
             </a:extLst>
           </p:cNvPr>
@@ -17358,7 +18199,7 @@
           <p:cNvPr id="7" name="p09-can-0">
             <a:extLst xmlns:a="http://schemas.openxmlformats.org/drawingml/2006/main">
               <a:ext uri="{FF2B5EF4-FFF2-40B4-BE49-F238E27FC236}">
-                <a16:creationId xmlns:a16="http://schemas.microsoft.com/office/drawing/2014/main" id="{CCB2C7FF-D415-4327-8755-C94DB9B82A35}"/>
+                <a16:creationId xmlns:a16="http://schemas.microsoft.com/office/drawing/2014/main" id="{B37454EF-B373-41B8-A3BC-8B78BEDD022A}"/>
               </a:ext>
             </a:extLst>
           </p:cNvPr>
@@ -17413,7 +18254,7 @@
           <p:cNvPr id="8" name="p09-can-1">
             <a:extLst xmlns:a="http://schemas.openxmlformats.org/drawingml/2006/main">
               <a:ext uri="{FF2B5EF4-FFF2-40B4-BE49-F238E27FC236}">
-                <a16:creationId xmlns:a16="http://schemas.microsoft.com/office/drawing/2014/main" id="{346E7A85-F4E8-407E-BC09-971C69EDCD2A}"/>
+                <a16:creationId xmlns:a16="http://schemas.microsoft.com/office/drawing/2014/main" id="{BF1B7424-52EC-42B2-975E-86543A9D68C5}"/>
               </a:ext>
             </a:extLst>
           </p:cNvPr>
@@ -17468,7 +18309,7 @@
           <p:cNvPr id="9" name="p09-can-2">
             <a:extLst xmlns:a="http://schemas.openxmlformats.org/drawingml/2006/main">
               <a:ext uri="{FF2B5EF4-FFF2-40B4-BE49-F238E27FC236}">
-                <a16:creationId xmlns:a16="http://schemas.microsoft.com/office/drawing/2014/main" id="{C7CC4EB7-CA2A-45D1-9B8C-FD9DBDC24306}"/>
+                <a16:creationId xmlns:a16="http://schemas.microsoft.com/office/drawing/2014/main" id="{B9A51A35-D211-4675-AF42-A5DD977EC8EB}"/>
               </a:ext>
             </a:extLst>
           </p:cNvPr>
@@ -17523,7 +18364,7 @@
           <p:cNvPr id="10" name="p09-no-title">
             <a:extLst xmlns:a="http://schemas.openxmlformats.org/drawingml/2006/main">
               <a:ext uri="{FF2B5EF4-FFF2-40B4-BE49-F238E27FC236}">
-                <a16:creationId xmlns:a16="http://schemas.microsoft.com/office/drawing/2014/main" id="{366DA452-9665-416A-B95B-0043E971C80E}"/>
+                <a16:creationId xmlns:a16="http://schemas.microsoft.com/office/drawing/2014/main" id="{84E51F05-A66E-4B0D-BAC9-26551C00BEA6}"/>
               </a:ext>
             </a:extLst>
           </p:cNvPr>
@@ -17578,7 +18419,7 @@
           <p:cNvPr id="11" name="p09-no-0">
             <a:extLst xmlns:a="http://schemas.openxmlformats.org/drawingml/2006/main">
               <a:ext uri="{FF2B5EF4-FFF2-40B4-BE49-F238E27FC236}">
-                <a16:creationId xmlns:a16="http://schemas.microsoft.com/office/drawing/2014/main" id="{58B36F88-66D7-4B97-9B4E-FA196C591D65}"/>
+                <a16:creationId xmlns:a16="http://schemas.microsoft.com/office/drawing/2014/main" id="{882A048D-57D8-40BF-A653-64E8A9FF37A7}"/>
               </a:ext>
             </a:extLst>
           </p:cNvPr>
@@ -17633,7 +18474,7 @@
           <p:cNvPr id="12" name="p09-no-1">
             <a:extLst xmlns:a="http://schemas.openxmlformats.org/drawingml/2006/main">
               <a:ext uri="{FF2B5EF4-FFF2-40B4-BE49-F238E27FC236}">
-                <a16:creationId xmlns:a16="http://schemas.microsoft.com/office/drawing/2014/main" id="{86A33582-28F5-4F6F-ADB6-5AE9B81E7024}"/>
+                <a16:creationId xmlns:a16="http://schemas.microsoft.com/office/drawing/2014/main" id="{736D2959-6E9E-4A86-8C14-BD19FD65DA85}"/>
               </a:ext>
             </a:extLst>
           </p:cNvPr>
@@ -17688,7 +18529,7 @@
           <p:cNvPr id="13" name="p09-no-2">
             <a:extLst xmlns:a="http://schemas.openxmlformats.org/drawingml/2006/main">
               <a:ext uri="{FF2B5EF4-FFF2-40B4-BE49-F238E27FC236}">
-                <a16:creationId xmlns:a16="http://schemas.microsoft.com/office/drawing/2014/main" id="{47BE242F-D24D-4E6D-86DF-DB1522A0D697}"/>
+                <a16:creationId xmlns:a16="http://schemas.microsoft.com/office/drawing/2014/main" id="{06995492-3F71-4F8C-8970-DCCEA7FFB76B}"/>
               </a:ext>
             </a:extLst>
           </p:cNvPr>
@@ -17743,7 +18584,7 @@
           <p:cNvPr id="14" name="p09-bottom">
             <a:extLst xmlns:a="http://schemas.openxmlformats.org/drawingml/2006/main">
               <a:ext uri="{FF2B5EF4-FFF2-40B4-BE49-F238E27FC236}">
-                <a16:creationId xmlns:a16="http://schemas.microsoft.com/office/drawing/2014/main" id="{7D3928C0-FE59-4EA9-AB90-3546A73D5192}"/>
+                <a16:creationId xmlns:a16="http://schemas.microsoft.com/office/drawing/2014/main" id="{E54F45F4-2C89-46CE-8240-C4CD71B182D1}"/>
               </a:ext>
             </a:extLst>
           </p:cNvPr>
